--- a/fixtures/pptx-coverage.pptx
+++ b/fixtures/pptx-coverage.pptx
@@ -5,7 +5,7 @@
     <p:sldMasterId id="2147483648" r:id="rId1"/>
   </p:sldMasterIdLst>
   <p:notesMasterIdLst>
-    <p:notesMasterId r:id="rId12"/>
+    <p:notesMasterId r:id="rId14"/>
   </p:notesMasterIdLst>
   <p:sldIdLst>
     <p:sldId id="256" r:id="rId2"/>
@@ -18,6 +18,8 @@
     <p:sldId id="263" r:id="rId9"/>
     <p:sldId id="264" r:id="rId10"/>
     <p:sldId id="265" r:id="rId11"/>
+    <p:sldId id="266" r:id="rId12"/>
+    <p:sldId id="267" r:id="rId13"/>
   </p:sldIdLst>
   <p:sldSz cx="12192000" cy="6858000"/>
   <p:notesSz cx="6858000" cy="9144000"/>
@@ -442,7 +444,7 @@
           <a:p>
             <a:fld id="{86A64A56-4393-4CB6-85C6-C90BB7A8548C}" type="datetimeFigureOut">
               <a:rPr lang="en-US" smtClean="0"/>
-              <a:t>9/23/2026</a:t>
+              <a:t>9/28/2026</a:t>
             </a:fld>
             <a:endParaRPr lang="en-US"/>
           </a:p>
@@ -856,7 +858,7 @@
           <a:p>
             <a:fld id="{60541A7F-F981-4501-AAE0-06F6CB326412}" type="datetime1">
               <a:rPr lang="en-US" smtClean="0"/>
-              <a:t>9/23/2026</a:t>
+              <a:t>9/28/2026</a:t>
             </a:fld>
             <a:endParaRPr lang="en-US"/>
           </a:p>
@@ -1054,7 +1056,7 @@
           <a:p>
             <a:fld id="{F853943D-1B76-47AC-8196-C4B25463BF47}" type="datetime1">
               <a:rPr lang="en-US" smtClean="0"/>
-              <a:t>9/23/2026</a:t>
+              <a:t>9/28/2026</a:t>
             </a:fld>
             <a:endParaRPr lang="en-US"/>
           </a:p>
@@ -1262,7 +1264,7 @@
           <a:p>
             <a:fld id="{2E188C43-274A-49F7-9E8E-741661AA3B8D}" type="datetime1">
               <a:rPr lang="en-US" smtClean="0"/>
-              <a:t>9/23/2026</a:t>
+              <a:t>9/28/2026</a:t>
             </a:fld>
             <a:endParaRPr lang="en-US"/>
           </a:p>
@@ -1460,7 +1462,7 @@
           <a:p>
             <a:fld id="{AFE56759-6820-42B3-B9BE-972720AE0218}" type="datetime1">
               <a:rPr lang="en-US" smtClean="0"/>
-              <a:t>9/23/2026</a:t>
+              <a:t>9/28/2026</a:t>
             </a:fld>
             <a:endParaRPr lang="en-US"/>
           </a:p>
@@ -1735,7 +1737,7 @@
           <a:p>
             <a:fld id="{E60A5D86-3AF6-469E-9631-8585AF639EE9}" type="datetime1">
               <a:rPr lang="en-US" smtClean="0"/>
-              <a:t>9/23/2026</a:t>
+              <a:t>9/28/2026</a:t>
             </a:fld>
             <a:endParaRPr lang="en-US"/>
           </a:p>
@@ -2000,7 +2002,7 @@
           <a:p>
             <a:fld id="{7040F516-D53A-4B36-A577-E8486E25D0EC}" type="datetime1">
               <a:rPr lang="en-US" smtClean="0"/>
-              <a:t>9/23/2026</a:t>
+              <a:t>9/28/2026</a:t>
             </a:fld>
             <a:endParaRPr lang="en-US"/>
           </a:p>
@@ -2412,7 +2414,7 @@
           <a:p>
             <a:fld id="{3E6E30B0-F99E-4FCA-83EF-31E10F2B66B1}" type="datetime1">
               <a:rPr lang="en-US" smtClean="0"/>
-              <a:t>9/23/2026</a:t>
+              <a:t>9/28/2026</a:t>
             </a:fld>
             <a:endParaRPr lang="en-US"/>
           </a:p>
@@ -2553,7 +2555,7 @@
           <a:p>
             <a:fld id="{FF185E36-5297-403D-B499-FD865F8C5A4F}" type="datetime1">
               <a:rPr lang="en-US" smtClean="0"/>
-              <a:t>9/23/2026</a:t>
+              <a:t>9/28/2026</a:t>
             </a:fld>
             <a:endParaRPr lang="en-US"/>
           </a:p>
@@ -2666,7 +2668,7 @@
           <a:p>
             <a:fld id="{2CDF4417-72BA-4D8F-8104-BFB5B423E2DD}" type="datetime1">
               <a:rPr lang="en-US" smtClean="0"/>
-              <a:t>9/23/2026</a:t>
+              <a:t>9/28/2026</a:t>
             </a:fld>
             <a:endParaRPr lang="en-US"/>
           </a:p>
@@ -2977,7 +2979,7 @@
           <a:p>
             <a:fld id="{C30CC0FA-F1D1-458D-9491-18A8D18048F7}" type="datetime1">
               <a:rPr lang="en-US" smtClean="0"/>
-              <a:t>9/23/2026</a:t>
+              <a:t>9/28/2026</a:t>
             </a:fld>
             <a:endParaRPr lang="en-US"/>
           </a:p>
@@ -3265,7 +3267,7 @@
           <a:p>
             <a:fld id="{66BF3E84-4616-4F9E-891F-D3C933FF2937}" type="datetime1">
               <a:rPr lang="en-US" smtClean="0"/>
-              <a:t>9/23/2026</a:t>
+              <a:t>9/28/2026</a:t>
             </a:fld>
             <a:endParaRPr lang="en-US"/>
           </a:p>
@@ -3506,7 +3508,7 @@
           <a:p>
             <a:fld id="{350CAA63-4269-45C0-A8A2-D62AE2EC413F}" type="datetime1">
               <a:rPr lang="en-US" smtClean="0"/>
-              <a:t>9/23/2026</a:t>
+              <a:t>9/28/2026</a:t>
             </a:fld>
             <a:endParaRPr lang="en-US"/>
           </a:p>
@@ -4549,6 +4551,640 @@
     <p:extLst>
       <p:ext uri="{BB962C8B-B14F-4D97-AF65-F5344CB8AC3E}">
         <p14:creationId xmlns:p14="http://schemas.microsoft.com/office/powerpoint/2010/main" val="3906041817"/>
+      </p:ext>
+    </p:extLst>
+  </p:cSld>
+  <p:clrMapOvr>
+    <a:masterClrMapping/>
+  </p:clrMapOvr>
+</p:sld>
+</file>
+
+<file path=ppt/slides/slide11.xml><?xml version="1.0" encoding="utf-8"?>
+<p:sld xmlns:a="http://schemas.openxmlformats.org/drawingml/2006/main" xmlns:r="http://schemas.openxmlformats.org/officeDocument/2006/relationships" xmlns:p="http://schemas.openxmlformats.org/presentationml/2006/main">
+  <p:cSld>
+    <p:spTree>
+      <p:nvGrpSpPr>
+        <p:cNvPr id="1" name=""/>
+        <p:cNvGrpSpPr/>
+        <p:nvPr/>
+      </p:nvGrpSpPr>
+      <p:grpSpPr>
+        <a:xfrm>
+          <a:off x="0" y="0"/>
+          <a:ext cx="0" cy="0"/>
+          <a:chOff x="0" y="0"/>
+          <a:chExt cx="0" cy="0"/>
+        </a:xfrm>
+      </p:grpSpPr>
+      <p:sp>
+        <p:nvSpPr>
+          <p:cNvPr id="4" name="Slide Number Placeholder 3">
+            <a:extLst>
+              <a:ext uri="{FF2B5EF4-FFF2-40B4-BE49-F238E27FC236}">
+                <a16:creationId xmlns:a16="http://schemas.microsoft.com/office/drawing/2014/main" id="{7CF73C67-6A8A-5856-CE07-81FF7A124167}"/>
+              </a:ext>
+            </a:extLst>
+          </p:cNvPr>
+          <p:cNvSpPr>
+            <a:spLocks noGrp="1"/>
+          </p:cNvSpPr>
+          <p:nvPr>
+            <p:ph type="sldNum" sz="quarter" idx="12"/>
+          </p:nvPr>
+        </p:nvSpPr>
+        <p:spPr/>
+        <p:txBody>
+          <a:bodyPr/>
+          <a:lstStyle/>
+          <a:p>
+            <a:fld id="{DCB96425-C66E-449F-8335-3FF27AC80FA3}" type="slidenum">
+              <a:rPr lang="en-US" smtClean="0"/>
+              <a:t>11</a:t>
+            </a:fld>
+            <a:endParaRPr lang="en-US"/>
+          </a:p>
+        </p:txBody>
+      </p:sp>
+      <p:sp>
+        <p:nvSpPr>
+          <p:cNvPr id="5" name="Title">
+            <a:extLst>
+              <a:ext uri="{FF2B5EF4-FFF2-40B4-BE49-F238E27FC236}">
+                <a16:creationId xmlns:a16="http://schemas.microsoft.com/office/drawing/2014/main" id="{34958500-4107-66AD-9E57-FD96394F86E1}"/>
+              </a:ext>
+            </a:extLst>
+          </p:cNvPr>
+          <p:cNvSpPr txBox="1"/>
+          <p:nvPr/>
+        </p:nvSpPr>
+        <p:spPr>
+          <a:xfrm>
+            <a:off x="0" y="304800"/>
+            <a:ext cx="12192000" cy="523220"/>
+          </a:xfrm>
+          <a:prstGeom prst="rect">
+            <a:avLst/>
+          </a:prstGeom>
+          <a:noFill/>
+        </p:spPr>
+        <p:txBody>
+          <a:bodyPr vert="horz" rtlCol="0">
+            <a:spAutoFit/>
+          </a:bodyPr>
+          <a:lstStyle/>
+          <a:p>
+            <a:pPr algn="ctr" rtl="1"/>
+            <a:r>
+              <a:rPr lang="ar-EG" sz="2800"/>
+              <a:t>خطوط وموصلات</a:t>
+            </a:r>
+            <a:endParaRPr lang="en-US" sz="2800"/>
+          </a:p>
+        </p:txBody>
+      </p:sp>
+      <p:cxnSp>
+        <p:nvCxnSpPr>
+          <p:cNvPr id="2" name="Timeline">
+            <a:extLst>
+              <a:ext uri="{FF2B5EF4-FFF2-40B4-BE49-F238E27FC236}">
+                <a16:creationId xmlns:a16="http://schemas.microsoft.com/office/drawing/2014/main" id="{80F9A06E-CA69-73C9-E91F-A3BB40E102E1}"/>
+              </a:ext>
+            </a:extLst>
+          </p:cNvPr>
+          <p:cNvCxnSpPr/>
+          <p:nvPr/>
+        </p:nvCxnSpPr>
+        <p:spPr>
+          <a:xfrm>
+            <a:off x="1016000" y="3048000"/>
+            <a:ext cx="10160000" cy="0"/>
+          </a:xfrm>
+          <a:prstGeom prst="straightConnector1">
+            <a:avLst/>
+          </a:prstGeom>
+          <a:ln w="25400">
+            <a:solidFill>
+              <a:srgbClr val="1E3A5A"/>
+            </a:solidFill>
+          </a:ln>
+        </p:spPr>
+        <p:style>
+          <a:lnRef idx="2">
+            <a:schemeClr val="accent1"/>
+          </a:lnRef>
+          <a:fillRef idx="0">
+            <a:schemeClr val="accent1"/>
+          </a:fillRef>
+          <a:effectRef idx="1">
+            <a:schemeClr val="accent1"/>
+          </a:effectRef>
+          <a:fontRef idx="minor">
+            <a:schemeClr val="tx1"/>
+          </a:fontRef>
+        </p:style>
+      </p:cxnSp>
+      <p:cxnSp>
+        <p:nvCxnSpPr>
+          <p:cNvPr id="3" name="Today">
+            <a:extLst>
+              <a:ext uri="{FF2B5EF4-FFF2-40B4-BE49-F238E27FC236}">
+                <a16:creationId xmlns:a16="http://schemas.microsoft.com/office/drawing/2014/main" id="{38BE034F-34A4-5316-2EA3-7211F6C949CB}"/>
+              </a:ext>
+            </a:extLst>
+          </p:cNvPr>
+          <p:cNvCxnSpPr/>
+          <p:nvPr/>
+        </p:nvCxnSpPr>
+        <p:spPr>
+          <a:xfrm>
+            <a:off x="6096000" y="1524000"/>
+            <a:ext cx="0" cy="3556000"/>
+          </a:xfrm>
+          <a:prstGeom prst="line">
+            <a:avLst/>
+          </a:prstGeom>
+          <a:ln w="19050">
+            <a:solidFill>
+              <a:srgbClr val="F59B1E"/>
+            </a:solidFill>
+            <a:prstDash val="dash"/>
+          </a:ln>
+        </p:spPr>
+        <p:style>
+          <a:lnRef idx="2">
+            <a:schemeClr val="accent1"/>
+          </a:lnRef>
+          <a:fillRef idx="0">
+            <a:schemeClr val="accent1"/>
+          </a:fillRef>
+          <a:effectRef idx="1">
+            <a:schemeClr val="accent1"/>
+          </a:effectRef>
+          <a:fontRef idx="minor">
+            <a:schemeClr val="tx1"/>
+          </a:fontRef>
+        </p:style>
+      </p:cxnSp>
+      <p:cxnSp>
+        <p:nvCxnSpPr>
+          <p:cNvPr id="7" name="Dotted">
+            <a:extLst>
+              <a:ext uri="{FF2B5EF4-FFF2-40B4-BE49-F238E27FC236}">
+                <a16:creationId xmlns:a16="http://schemas.microsoft.com/office/drawing/2014/main" id="{412D5034-8347-C745-3BF3-8C6C630C8B7C}"/>
+              </a:ext>
+            </a:extLst>
+          </p:cNvPr>
+          <p:cNvCxnSpPr/>
+          <p:nvPr/>
+        </p:nvCxnSpPr>
+        <p:spPr>
+          <a:xfrm>
+            <a:off x="1016000" y="4064000"/>
+            <a:ext cx="10160000" cy="0"/>
+          </a:xfrm>
+          <a:prstGeom prst="line">
+            <a:avLst/>
+          </a:prstGeom>
+          <a:ln w="12700" cap="rnd">
+            <a:solidFill>
+              <a:srgbClr val="808F9C"/>
+            </a:solidFill>
+            <a:prstDash val="dot"/>
+          </a:ln>
+        </p:spPr>
+        <p:style>
+          <a:lnRef idx="2">
+            <a:schemeClr val="accent1"/>
+          </a:lnRef>
+          <a:fillRef idx="0">
+            <a:schemeClr val="accent1"/>
+          </a:fillRef>
+          <a:effectRef idx="1">
+            <a:schemeClr val="accent1"/>
+          </a:effectRef>
+          <a:fontRef idx="minor">
+            <a:schemeClr val="tx1"/>
+          </a:fontRef>
+        </p:style>
+      </p:cxnSp>
+      <p:cxnSp>
+        <p:nvCxnSpPr>
+          <p:cNvPr id="8" name="Diagonal">
+            <a:extLst>
+              <a:ext uri="{FF2B5EF4-FFF2-40B4-BE49-F238E27FC236}">
+                <a16:creationId xmlns:a16="http://schemas.microsoft.com/office/drawing/2014/main" id="{8B7729AA-FB6D-E4A4-46F6-92C2F5137AA6}"/>
+              </a:ext>
+            </a:extLst>
+          </p:cNvPr>
+          <p:cNvCxnSpPr/>
+          <p:nvPr/>
+        </p:nvCxnSpPr>
+        <p:spPr>
+          <a:xfrm flipV="1">
+            <a:off x="1016000" y="4826000"/>
+            <a:ext cx="2540000" cy="1016000"/>
+          </a:xfrm>
+          <a:prstGeom prst="line">
+            <a:avLst/>
+          </a:prstGeom>
+          <a:ln w="38100">
+            <a:solidFill>
+              <a:srgbClr val="1E3A5A"/>
+            </a:solidFill>
+          </a:ln>
+        </p:spPr>
+        <p:style>
+          <a:lnRef idx="2">
+            <a:schemeClr val="accent1"/>
+          </a:lnRef>
+          <a:fillRef idx="0">
+            <a:schemeClr val="accent1"/>
+          </a:fillRef>
+          <a:effectRef idx="1">
+            <a:schemeClr val="accent1"/>
+          </a:effectRef>
+          <a:fontRef idx="minor">
+            <a:schemeClr val="tx1"/>
+          </a:fontRef>
+        </p:style>
+      </p:cxnSp>
+      <p:sp>
+        <p:nvSpPr>
+          <p:cNvPr id="6" name="Mixed direction">
+            <a:extLst>
+              <a:ext uri="{FF2B5EF4-FFF2-40B4-BE49-F238E27FC236}">
+                <a16:creationId xmlns:a16="http://schemas.microsoft.com/office/drawing/2014/main" id="{4F49EAE7-3274-8F51-B7EE-B613C7B2FE13}"/>
+              </a:ext>
+            </a:extLst>
+          </p:cNvPr>
+          <p:cNvSpPr txBox="1"/>
+          <p:nvPr/>
+        </p:nvSpPr>
+        <p:spPr>
+          <a:xfrm>
+            <a:off x="1016000" y="5969000"/>
+            <a:ext cx="10160000" cy="449097"/>
+          </a:xfrm>
+          <a:prstGeom prst="rect">
+            <a:avLst/>
+          </a:prstGeom>
+          <a:noFill/>
+        </p:spPr>
+        <p:txBody>
+          <a:bodyPr vert="horz" rtlCol="0">
+            <a:spAutoFit/>
+          </a:bodyPr>
+          <a:lstStyle/>
+          <a:p>
+            <a:pPr algn="r" rtl="1">
+              <a:lnSpc>
+                <a:spcPts val="3000"/>
+              </a:lnSpc>
+            </a:pPr>
+            <a:r>
+              <a:rPr lang="ar-SA" sz="2000"/>
+              <a:t>الإيرادات دون الموازنة بنسبة </a:t>
+            </a:r>
+            <a:r>
+              <a:rPr lang="en-US" sz="2000">
+                <a:latin typeface="Calibri" panose="020F0502020204030204" pitchFamily="34" charset="0"/>
+              </a:rPr>
+              <a:t>2.1%</a:t>
+            </a:r>
+            <a:endParaRPr lang="en-US" sz="2000" dirty="0">
+              <a:latin typeface="Calibri" panose="020F0502020204030204" pitchFamily="34" charset="0"/>
+            </a:endParaRPr>
+          </a:p>
+        </p:txBody>
+      </p:sp>
+    </p:spTree>
+    <p:extLst>
+      <p:ext uri="{BB962C8B-B14F-4D97-AF65-F5344CB8AC3E}">
+        <p14:creationId xmlns:p14="http://schemas.microsoft.com/office/powerpoint/2010/main" val="3578241439"/>
+      </p:ext>
+    </p:extLst>
+  </p:cSld>
+  <p:clrMapOvr>
+    <a:masterClrMapping/>
+  </p:clrMapOvr>
+</p:sld>
+</file>
+
+<file path=ppt/slides/slide12.xml><?xml version="1.0" encoding="utf-8"?>
+<p:sld xmlns:a="http://schemas.openxmlformats.org/drawingml/2006/main" xmlns:r="http://schemas.openxmlformats.org/officeDocument/2006/relationships" xmlns:p="http://schemas.openxmlformats.org/presentationml/2006/main">
+  <p:cSld>
+    <p:spTree>
+      <p:nvGrpSpPr>
+        <p:cNvPr id="1" name=""/>
+        <p:cNvGrpSpPr/>
+        <p:nvPr/>
+      </p:nvGrpSpPr>
+      <p:grpSpPr>
+        <a:xfrm>
+          <a:off x="0" y="0"/>
+          <a:ext cx="0" cy="0"/>
+          <a:chOff x="0" y="0"/>
+          <a:chExt cx="0" cy="0"/>
+        </a:xfrm>
+      </p:grpSpPr>
+      <p:sp>
+        <p:nvSpPr>
+          <p:cNvPr id="4" name="Slide Number Placeholder 3">
+            <a:extLst>
+              <a:ext uri="{FF2B5EF4-FFF2-40B4-BE49-F238E27FC236}">
+                <a16:creationId xmlns:a16="http://schemas.microsoft.com/office/drawing/2014/main" id="{7CF73C67-6A8A-5856-CE07-81FF7A124167}"/>
+              </a:ext>
+            </a:extLst>
+          </p:cNvPr>
+          <p:cNvSpPr>
+            <a:spLocks noGrp="1"/>
+          </p:cNvSpPr>
+          <p:nvPr>
+            <p:ph type="sldNum" sz="quarter" idx="12"/>
+          </p:nvPr>
+        </p:nvSpPr>
+        <p:spPr/>
+        <p:txBody>
+          <a:bodyPr/>
+          <a:lstStyle/>
+          <a:p>
+            <a:fld id="{DCB96425-C66E-449F-8335-3FF27AC80FA3}" type="slidenum">
+              <a:rPr lang="en-US" smtClean="0"/>
+              <a:t>12</a:t>
+            </a:fld>
+            <a:endParaRPr lang="en-US"/>
+          </a:p>
+        </p:txBody>
+      </p:sp>
+      <p:sp>
+        <p:nvSpPr>
+          <p:cNvPr id="5" name="Title">
+            <a:extLst>
+              <a:ext uri="{FF2B5EF4-FFF2-40B4-BE49-F238E27FC236}">
+                <a16:creationId xmlns:a16="http://schemas.microsoft.com/office/drawing/2014/main" id="{34958500-4107-66AD-9E57-FD96394F86E1}"/>
+              </a:ext>
+            </a:extLst>
+          </p:cNvPr>
+          <p:cNvSpPr txBox="1"/>
+          <p:nvPr/>
+        </p:nvSpPr>
+        <p:spPr>
+          <a:xfrm>
+            <a:off x="0" y="304800"/>
+            <a:ext cx="12192000" cy="523220"/>
+          </a:xfrm>
+          <a:prstGeom prst="rect">
+            <a:avLst/>
+          </a:prstGeom>
+          <a:noFill/>
+        </p:spPr>
+        <p:txBody>
+          <a:bodyPr vert="horz" rtlCol="0">
+            <a:spAutoFit/>
+          </a:bodyPr>
+          <a:lstStyle/>
+          <a:p>
+            <a:pPr algn="ctr" rtl="1"/>
+            <a:r>
+              <a:rPr lang="ar-EG" sz="2800"/>
+              <a:t>تباعد الفقرات</a:t>
+            </a:r>
+            <a:endParaRPr lang="en-US" sz="2800"/>
+          </a:p>
+        </p:txBody>
+      </p:sp>
+      <p:sp>
+        <p:nvSpPr>
+          <p:cNvPr id="9" name="Spacing in lines">
+            <a:extLst>
+              <a:ext uri="{FF2B5EF4-FFF2-40B4-BE49-F238E27FC236}">
+                <a16:creationId xmlns:a16="http://schemas.microsoft.com/office/drawing/2014/main" id="{32992895-2F7F-841E-A74A-8486F4DE5FDE}"/>
+              </a:ext>
+            </a:extLst>
+          </p:cNvPr>
+          <p:cNvSpPr txBox="1"/>
+          <p:nvPr/>
+        </p:nvSpPr>
+        <p:spPr>
+          <a:xfrm>
+            <a:off x="5080000" y="1524000"/>
+            <a:ext cx="6096000" cy="4826000"/>
+          </a:xfrm>
+          <a:prstGeom prst="rect">
+            <a:avLst/>
+          </a:prstGeom>
+          <a:noFill/>
+        </p:spPr>
+        <p:txBody>
+          <a:bodyPr vert="horz" rtlCol="0" anchor="t">
+            <a:noAutofit/>
+          </a:bodyPr>
+          <a:lstStyle/>
+          <a:p>
+            <a:pPr algn="r" rtl="1">
+              <a:spcBef>
+                <a:spcPct val="100000"/>
+              </a:spcBef>
+              <a:spcAft>
+                <a:spcPct val="0"/>
+              </a:spcAft>
+            </a:pPr>
+            <a:r>
+              <a:rPr lang="ar-EG"/>
+              <a:t>الفقرة الأولى: سطر قبلها لا يظهر</a:t>
+            </a:r>
+          </a:p>
+          <a:p>
+            <a:pPr algn="r" rtl="1">
+              <a:spcBef>
+                <a:spcPct val="50000"/>
+              </a:spcBef>
+              <a:spcAft>
+                <a:spcPct val="0"/>
+              </a:spcAft>
+            </a:pPr>
+            <a:r>
+              <a:rPr lang="ar-EG"/>
+              <a:t>نصف سطر قبل هذه الفقرة</a:t>
+            </a:r>
+          </a:p>
+          <a:p>
+            <a:pPr algn="r" rtl="1">
+              <a:spcBef>
+                <a:spcPct val="100000"/>
+              </a:spcBef>
+              <a:spcAft>
+                <a:spcPct val="0"/>
+              </a:spcAft>
+            </a:pPr>
+            <a:r>
+              <a:rPr lang="ar-EG"/>
+              <a:t>سطر قبلها بحجم الكلمة </a:t>
+            </a:r>
+            <a:r>
+              <a:rPr lang="ar-EG" sz="2800"/>
+              <a:t>الأكبر</a:t>
+            </a:r>
+          </a:p>
+          <a:p>
+            <a:pPr algn="r" rtl="1">
+              <a:spcBef>
+                <a:spcPct val="0"/>
+              </a:spcBef>
+              <a:spcAft>
+                <a:spcPct val="100000"/>
+              </a:spcAft>
+            </a:pPr>
+            <a:r>
+              <a:rPr lang="ar-EG"/>
+              <a:t>سطر كامل بعد هذه الفقرة</a:t>
+            </a:r>
+          </a:p>
+          <a:p>
+            <a:pPr algn="r" rtl="1">
+              <a:spcBef>
+                <a:spcPct val="100000"/>
+              </a:spcBef>
+              <a:spcAft>
+                <a:spcPct val="0"/>
+              </a:spcAft>
+            </a:pPr>
+            <a:r>
+              <a:rPr lang="ar-EG"/>
+              <a:t>وسطر قبل هذه فيجتمعان</a:t>
+            </a:r>
+          </a:p>
+          <a:p>
+            <a:pPr algn="r" rtl="1">
+              <a:spcBef>
+                <a:spcPct val="0"/>
+              </a:spcBef>
+              <a:spcAft>
+                <a:spcPct val="100000"/>
+              </a:spcAft>
+            </a:pPr>
+            <a:r>
+              <a:rPr lang="ar-EG"/>
+              <a:t>الفقرة الأخيرة: سطر بعدها لا يظهر</a:t>
+            </a:r>
+            <a:endParaRPr lang="en-US"/>
+          </a:p>
+        </p:txBody>
+      </p:sp>
+      <p:graphicFrame>
+        <p:nvGraphicFramePr>
+          <p:cNvPr id="10" name="Spacing in a cell">
+            <a:extLst>
+              <a:ext uri="{FF2B5EF4-FFF2-40B4-BE49-F238E27FC236}">
+                <a16:creationId xmlns:a16="http://schemas.microsoft.com/office/drawing/2014/main" id="{824B5542-66C9-A9FA-1B03-15EB6CD402D1}"/>
+              </a:ext>
+            </a:extLst>
+          </p:cNvPr>
+          <p:cNvGraphicFramePr>
+            <a:graphicFrameLocks noGrp="1"/>
+          </p:cNvGraphicFramePr>
+          <p:nvPr>
+            <p:extLst>
+              <p:ext uri="{D42A27DB-BD31-4B8C-83A1-F6EECF244321}">
+                <p14:modId xmlns:p14="http://schemas.microsoft.com/office/powerpoint/2010/main" val="2608124176"/>
+              </p:ext>
+            </p:extLst>
+          </p:nvPr>
+        </p:nvGraphicFramePr>
+        <p:xfrm>
+          <a:off x="762000" y="1524000"/>
+          <a:ext cx="4318000" cy="2540000"/>
+        </p:xfrm>
+        <a:graphic>
+          <a:graphicData uri="http://schemas.openxmlformats.org/drawingml/2006/table">
+            <a:tbl>
+              <a:tblPr firstRow="1" bandRow="1">
+                <a:tableStyleId>{5C22544A-7EE6-4342-B048-85BDC9FD1C3A}</a:tableStyleId>
+              </a:tblPr>
+              <a:tblGrid>
+                <a:gridCol w="4318000">
+                  <a:extLst>
+                    <a:ext uri="{9D8B030D-6E8A-4147-A177-3AD203B41FA5}">
+                      <a16:colId xmlns:a16="http://schemas.microsoft.com/office/drawing/2014/main" val="144344866"/>
+                    </a:ext>
+                  </a:extLst>
+                </a:gridCol>
+              </a:tblGrid>
+              <a:tr h="2540000">
+                <a:tc>
+                  <a:txBody>
+                    <a:bodyPr/>
+                    <a:lstStyle/>
+                    <a:p>
+                      <a:pPr algn="r" rtl="1">
+                        <a:lnSpc>
+                          <a:spcPct val="100000"/>
+                        </a:lnSpc>
+                        <a:spcBef>
+                          <a:spcPct val="100000"/>
+                        </a:spcBef>
+                        <a:spcAft>
+                          <a:spcPct val="0"/>
+                        </a:spcAft>
+                      </a:pPr>
+                      <a:r>
+                        <a:rPr lang="ar-EG" sz="1800"/>
+                        <a:t>في الخلية: سطر قبل الأولى لا يظهر</a:t>
+                      </a:r>
+                    </a:p>
+                    <a:p>
+                      <a:pPr algn="r" rtl="1">
+                        <a:lnSpc>
+                          <a:spcPct val="100000"/>
+                        </a:lnSpc>
+                        <a:spcBef>
+                          <a:spcPct val="0"/>
+                        </a:spcBef>
+                        <a:spcAft>
+                          <a:spcPct val="50000"/>
+                        </a:spcAft>
+                      </a:pPr>
+                      <a:r>
+                        <a:rPr lang="ar-EG" sz="1800"/>
+                        <a:t>نصف سطر بعد هذه</a:t>
+                      </a:r>
+                    </a:p>
+                    <a:p>
+                      <a:pPr algn="r" rtl="1">
+                        <a:lnSpc>
+                          <a:spcPct val="100000"/>
+                        </a:lnSpc>
+                        <a:spcBef>
+                          <a:spcPct val="50000"/>
+                        </a:spcBef>
+                        <a:spcAft>
+                          <a:spcPct val="0"/>
+                        </a:spcAft>
+                      </a:pPr>
+                      <a:r>
+                        <a:rPr lang="ar-EG" sz="1800"/>
+                        <a:t>ونصف سطر قبل هذه</a:t>
+                      </a:r>
+                      <a:endParaRPr lang="en-US" sz="1800"/>
+                    </a:p>
+                  </a:txBody>
+                  <a:tcPr/>
+                </a:tc>
+                <a:extLst>
+                  <a:ext uri="{0D108BD9-81ED-4DB2-BD59-A6C34878D82A}">
+                    <a16:rowId xmlns:a16="http://schemas.microsoft.com/office/drawing/2014/main" val="1208137714"/>
+                  </a:ext>
+                </a:extLst>
+              </a:tr>
+            </a:tbl>
+          </a:graphicData>
+        </a:graphic>
+      </p:graphicFrame>
+    </p:spTree>
+    <p:extLst>
+      <p:ext uri="{BB962C8B-B14F-4D97-AF65-F5344CB8AC3E}">
+        <p14:creationId xmlns:p14="http://schemas.microsoft.com/office/powerpoint/2010/main" val="596326689"/>
       </p:ext>
     </p:extLst>
   </p:cSld>

--- a/fixtures/pptx-coverage.pptx
+++ b/fixtures/pptx-coverage.pptx
@@ -3,23 +3,30 @@
 <p:presentation xmlns:a="http://schemas.openxmlformats.org/drawingml/2006/main" xmlns:r="http://schemas.openxmlformats.org/officeDocument/2006/relationships" xmlns:p="http://schemas.openxmlformats.org/presentationml/2006/main" saveSubsetFonts="1">
   <p:sldMasterIdLst>
     <p:sldMasterId id="2147483648" r:id="rId1"/>
+    <p:sldMasterId id="2147483660" r:id="rId2"/>
   </p:sldMasterIdLst>
   <p:notesMasterIdLst>
-    <p:notesMasterId r:id="rId14"/>
+    <p:notesMasterId r:id="rId21"/>
   </p:notesMasterIdLst>
   <p:sldIdLst>
-    <p:sldId id="256" r:id="rId2"/>
-    <p:sldId id="257" r:id="rId3"/>
-    <p:sldId id="258" r:id="rId4"/>
-    <p:sldId id="259" r:id="rId5"/>
-    <p:sldId id="260" r:id="rId6"/>
-    <p:sldId id="261" r:id="rId7"/>
-    <p:sldId id="262" r:id="rId8"/>
-    <p:sldId id="263" r:id="rId9"/>
-    <p:sldId id="264" r:id="rId10"/>
-    <p:sldId id="265" r:id="rId11"/>
-    <p:sldId id="266" r:id="rId12"/>
-    <p:sldId id="267" r:id="rId13"/>
+    <p:sldId id="256" r:id="rId3"/>
+    <p:sldId id="257" r:id="rId4"/>
+    <p:sldId id="258" r:id="rId5"/>
+    <p:sldId id="259" r:id="rId6"/>
+    <p:sldId id="260" r:id="rId7"/>
+    <p:sldId id="261" r:id="rId8"/>
+    <p:sldId id="262" r:id="rId9"/>
+    <p:sldId id="263" r:id="rId10"/>
+    <p:sldId id="264" r:id="rId11"/>
+    <p:sldId id="265" r:id="rId12"/>
+    <p:sldId id="266" r:id="rId13"/>
+    <p:sldId id="267" r:id="rId14"/>
+    <p:sldId id="268" r:id="rId15"/>
+    <p:sldId id="269" r:id="rId16"/>
+    <p:sldId id="270" r:id="rId17"/>
+    <p:sldId id="271" r:id="rId18"/>
+    <p:sldId id="272" r:id="rId19"/>
+    <p:sldId id="273" r:id="rId20"/>
   </p:sldIdLst>
   <p:sldSz cx="12192000" cy="6858000"/>
   <p:notesSz cx="6858000" cy="9144000"/>
@@ -124,6 +131,619 @@
     </p:ext>
   </p:extLst>
 </p:presentation>
+</file>
+
+<file path=ppt/charts/chartEx1.xml><?xml version="1.0" encoding="utf-8"?>
+<cx:chartSpace xmlns:a="http://schemas.openxmlformats.org/drawingml/2006/main" xmlns:r="http://schemas.openxmlformats.org/officeDocument/2006/relationships" xmlns:cx="http://schemas.microsoft.com/office/drawing/2014/chartex">
+  <cx:chartData>
+    <cx:externalData r:id="rId1" cx:autoUpdate="0"/>
+    <cx:data id="0">
+      <cx:strDim type="cat">
+        <cx:f>waterfall!$A$2:$A$6</cx:f>
+        <cx:lvl ptCount="5">
+          <cx:pt idx="0">البداية</cx:pt>
+          <cx:pt idx="1">المبيعات</cx:pt>
+          <cx:pt idx="2">التكاليف</cx:pt>
+          <cx:pt idx="3">الضرائب</cx:pt>
+          <cx:pt idx="4">الصافي</cx:pt>
+        </cx:lvl>
+      </cx:strDim>
+      <cx:numDim type="val">
+        <cx:f>waterfall!$B$2:$B$6</cx:f>
+        <cx:lvl ptCount="5" formatCode="General">
+          <cx:pt idx="0">100</cx:pt>
+          <cx:pt idx="1">60</cx:pt>
+          <cx:pt idx="2">-40</cx:pt>
+          <cx:pt idx="3">-15</cx:pt>
+          <cx:pt idx="4">105</cx:pt>
+        </cx:lvl>
+      </cx:numDim>
+    </cx:data>
+  </cx:chartData>
+  <cx:chart>
+    <cx:title pos="t" align="ctr" overlay="0"/>
+    <cx:plotArea>
+      <cx:plotAreaRegion>
+        <cx:series layoutId="waterfall" uniqueId="{00000000-D1D3-4E07-9A76-FCE8C7D96EFB}">
+          <cx:tx>
+            <cx:txData>
+              <cx:f>waterfall!$B$1</cx:f>
+              <cx:v>Amount</cx:v>
+            </cx:txData>
+          </cx:tx>
+          <cx:dataLabels pos="outEnd">
+            <cx:visibility seriesName="0" categoryName="0" value="1"/>
+          </cx:dataLabels>
+          <cx:dataId val="0"/>
+          <cx:layoutPr>
+            <cx:visibility connectorLines="1"/>
+            <cx:subtotals>
+              <cx:idx val="4"/>
+            </cx:subtotals>
+          </cx:layoutPr>
+        </cx:series>
+      </cx:plotAreaRegion>
+      <cx:axis id="0">
+        <cx:catScaling gapWidth="0.5"/>
+        <cx:tickLabels/>
+      </cx:axis>
+      <cx:axis id="1">
+        <cx:valScaling/>
+        <cx:majorGridlines/>
+        <cx:tickLabels/>
+      </cx:axis>
+    </cx:plotArea>
+    <cx:legend pos="t" align="ctr" overlay="0"/>
+  </cx:chart>
+</cx:chartSpace>
+</file>
+
+<file path=ppt/charts/colors1.xml><?xml version="1.0" encoding="utf-8"?>
+<cs:colorStyle xmlns:cs="http://schemas.microsoft.com/office/drawing/2012/chartStyle" xmlns:a="http://schemas.openxmlformats.org/drawingml/2006/main" meth="cycle" id="10">
+  <a:schemeClr val="accent1"/>
+  <a:schemeClr val="accent2"/>
+  <a:schemeClr val="accent3"/>
+  <a:schemeClr val="accent4"/>
+  <a:schemeClr val="accent5"/>
+  <a:schemeClr val="accent6"/>
+  <cs:variation/>
+  <cs:variation>
+    <a:lumMod val="60000"/>
+  </cs:variation>
+  <cs:variation>
+    <a:lumMod val="80000"/>
+    <a:lumOff val="20000"/>
+  </cs:variation>
+  <cs:variation>
+    <a:lumMod val="80000"/>
+  </cs:variation>
+  <cs:variation>
+    <a:lumMod val="60000"/>
+    <a:lumOff val="40000"/>
+  </cs:variation>
+  <cs:variation>
+    <a:lumMod val="50000"/>
+  </cs:variation>
+  <cs:variation>
+    <a:lumMod val="70000"/>
+    <a:lumOff val="30000"/>
+  </cs:variation>
+  <cs:variation>
+    <a:lumMod val="70000"/>
+  </cs:variation>
+  <cs:variation>
+    <a:lumMod val="50000"/>
+    <a:lumOff val="50000"/>
+  </cs:variation>
+</cs:colorStyle>
+</file>
+
+<file path=ppt/charts/style1.xml><?xml version="1.0" encoding="utf-8"?>
+<cs:chartStyle xmlns:cs="http://schemas.microsoft.com/office/drawing/2012/chartStyle" xmlns:a="http://schemas.openxmlformats.org/drawingml/2006/main" id="395">
+  <cs:axisTitle>
+    <cs:lnRef idx="0"/>
+    <cs:fillRef idx="0"/>
+    <cs:effectRef idx="0"/>
+    <cs:fontRef idx="minor">
+      <a:schemeClr val="tx1">
+        <a:lumMod val="65000"/>
+        <a:lumOff val="35000"/>
+      </a:schemeClr>
+    </cs:fontRef>
+    <cs:defRPr sz="900"/>
+  </cs:axisTitle>
+  <cs:categoryAxis>
+    <cs:lnRef idx="0"/>
+    <cs:fillRef idx="0"/>
+    <cs:effectRef idx="0"/>
+    <cs:fontRef idx="minor">
+      <a:schemeClr val="tx1">
+        <a:lumMod val="65000"/>
+        <a:lumOff val="35000"/>
+      </a:schemeClr>
+    </cs:fontRef>
+    <cs:spPr>
+      <a:ln w="9525" cap="flat" cmpd="sng" algn="ctr">
+        <a:solidFill>
+          <a:schemeClr val="tx1">
+            <a:lumMod val="15000"/>
+            <a:lumOff val="85000"/>
+          </a:schemeClr>
+        </a:solidFill>
+        <a:round/>
+      </a:ln>
+    </cs:spPr>
+    <cs:defRPr sz="900"/>
+  </cs:categoryAxis>
+  <cs:chartArea mods="allowNoFillOverride allowNoLineOverride">
+    <cs:lnRef idx="0"/>
+    <cs:fillRef idx="0"/>
+    <cs:effectRef idx="0"/>
+    <cs:fontRef idx="minor">
+      <a:schemeClr val="tx1"/>
+    </cs:fontRef>
+    <cs:spPr>
+      <a:solidFill>
+        <a:schemeClr val="bg1"/>
+      </a:solidFill>
+      <a:ln w="9525" cap="flat" cmpd="sng" algn="ctr">
+        <a:solidFill>
+          <a:schemeClr val="tx1">
+            <a:lumMod val="15000"/>
+            <a:lumOff val="85000"/>
+          </a:schemeClr>
+        </a:solidFill>
+        <a:round/>
+      </a:ln>
+    </cs:spPr>
+    <cs:defRPr sz="1000"/>
+  </cs:chartArea>
+  <cs:dataLabel>
+    <cs:lnRef idx="0"/>
+    <cs:fillRef idx="0"/>
+    <cs:effectRef idx="0"/>
+    <cs:fontRef idx="minor">
+      <a:schemeClr val="tx1">
+        <a:lumMod val="65000"/>
+        <a:lumOff val="35000"/>
+      </a:schemeClr>
+    </cs:fontRef>
+    <cs:defRPr sz="900"/>
+  </cs:dataLabel>
+  <cs:dataLabelCallout>
+    <cs:lnRef idx="0"/>
+    <cs:fillRef idx="0"/>
+    <cs:effectRef idx="0"/>
+    <cs:fontRef idx="minor">
+      <a:schemeClr val="dk1">
+        <a:lumMod val="65000"/>
+        <a:lumOff val="35000"/>
+      </a:schemeClr>
+    </cs:fontRef>
+    <cs:spPr>
+      <a:solidFill>
+        <a:schemeClr val="lt1"/>
+      </a:solidFill>
+      <a:ln>
+        <a:solidFill>
+          <a:schemeClr val="dk1">
+            <a:lumMod val="25000"/>
+            <a:lumOff val="75000"/>
+          </a:schemeClr>
+        </a:solidFill>
+      </a:ln>
+    </cs:spPr>
+    <cs:defRPr sz="900"/>
+    <cs:bodyPr rot="0" spcFirstLastPara="1" vertOverflow="clip" horzOverflow="clip" vert="horz" wrap="square" lIns="36576" tIns="18288" rIns="36576" bIns="18288" anchor="ctr" anchorCtr="1">
+      <a:spAutoFit/>
+    </cs:bodyPr>
+  </cs:dataLabelCallout>
+  <cs:dataPoint>
+    <cs:lnRef idx="0"/>
+    <cs:fillRef idx="0">
+      <cs:styleClr val="auto"/>
+    </cs:fillRef>
+    <cs:effectRef idx="0"/>
+    <cs:fontRef idx="minor">
+      <a:schemeClr val="tx1"/>
+    </cs:fontRef>
+    <cs:spPr>
+      <a:solidFill>
+        <a:schemeClr val="phClr"/>
+      </a:solidFill>
+    </cs:spPr>
+  </cs:dataPoint>
+  <cs:dataPoint3D>
+    <cs:lnRef idx="0"/>
+    <cs:fillRef idx="0">
+      <cs:styleClr val="auto"/>
+    </cs:fillRef>
+    <cs:effectRef idx="0"/>
+    <cs:fontRef idx="minor">
+      <a:schemeClr val="tx1"/>
+    </cs:fontRef>
+    <cs:spPr>
+      <a:solidFill>
+        <a:schemeClr val="phClr"/>
+      </a:solidFill>
+    </cs:spPr>
+  </cs:dataPoint3D>
+  <cs:dataPointLine>
+    <cs:lnRef idx="0">
+      <cs:styleClr val="auto"/>
+    </cs:lnRef>
+    <cs:fillRef idx="0"/>
+    <cs:effectRef idx="0"/>
+    <cs:fontRef idx="minor">
+      <a:schemeClr val="tx1"/>
+    </cs:fontRef>
+    <cs:spPr>
+      <a:ln w="28575" cap="rnd">
+        <a:solidFill>
+          <a:schemeClr val="phClr"/>
+        </a:solidFill>
+        <a:round/>
+      </a:ln>
+    </cs:spPr>
+  </cs:dataPointLine>
+  <cs:dataPointMarker>
+    <cs:lnRef idx="0"/>
+    <cs:fillRef idx="0">
+      <cs:styleClr val="auto"/>
+    </cs:fillRef>
+    <cs:effectRef idx="0"/>
+    <cs:fontRef idx="minor">
+      <a:schemeClr val="tx1"/>
+    </cs:fontRef>
+    <cs:spPr>
+      <a:solidFill>
+        <a:schemeClr val="phClr"/>
+      </a:solidFill>
+      <a:ln w="9525">
+        <a:solidFill>
+          <a:schemeClr val="lt1"/>
+        </a:solidFill>
+      </a:ln>
+    </cs:spPr>
+  </cs:dataPointMarker>
+  <cs:dataPointMarkerLayout symbol="circle" size="5"/>
+  <cs:dataPointWireframe>
+    <cs:lnRef idx="0">
+      <cs:styleClr val="auto"/>
+    </cs:lnRef>
+    <cs:fillRef idx="0"/>
+    <cs:effectRef idx="0"/>
+    <cs:fontRef idx="minor">
+      <a:schemeClr val="tx1"/>
+    </cs:fontRef>
+    <cs:spPr>
+      <a:ln w="28575" cap="rnd">
+        <a:solidFill>
+          <a:schemeClr val="phClr"/>
+        </a:solidFill>
+        <a:round/>
+      </a:ln>
+    </cs:spPr>
+  </cs:dataPointWireframe>
+  <cs:dataTable>
+    <cs:lnRef idx="0"/>
+    <cs:fillRef idx="0"/>
+    <cs:effectRef idx="0"/>
+    <cs:fontRef idx="minor">
+      <a:schemeClr val="tx1">
+        <a:lumMod val="65000"/>
+        <a:lumOff val="35000"/>
+      </a:schemeClr>
+    </cs:fontRef>
+    <cs:spPr>
+      <a:ln w="9525">
+        <a:solidFill>
+          <a:schemeClr val="tx1">
+            <a:lumMod val="15000"/>
+            <a:lumOff val="85000"/>
+          </a:schemeClr>
+        </a:solidFill>
+      </a:ln>
+    </cs:spPr>
+    <cs:defRPr sz="900"/>
+  </cs:dataTable>
+  <cs:downBar>
+    <cs:lnRef idx="0"/>
+    <cs:fillRef idx="0"/>
+    <cs:effectRef idx="0"/>
+    <cs:fontRef idx="minor">
+      <a:schemeClr val="dk1"/>
+    </cs:fontRef>
+    <cs:spPr>
+      <a:solidFill>
+        <a:schemeClr val="dk1">
+          <a:lumMod val="65000"/>
+          <a:lumOff val="35000"/>
+        </a:schemeClr>
+      </a:solidFill>
+      <a:ln w="9525">
+        <a:solidFill>
+          <a:schemeClr val="tx1">
+            <a:lumMod val="65000"/>
+            <a:lumOff val="35000"/>
+          </a:schemeClr>
+        </a:solidFill>
+      </a:ln>
+    </cs:spPr>
+  </cs:downBar>
+  <cs:dropLine>
+    <cs:lnRef idx="0"/>
+    <cs:fillRef idx="0"/>
+    <cs:effectRef idx="0"/>
+    <cs:fontRef idx="minor">
+      <a:schemeClr val="tx1"/>
+    </cs:fontRef>
+    <cs:spPr>
+      <a:ln w="9525" cap="flat" cmpd="sng" algn="ctr">
+        <a:solidFill>
+          <a:schemeClr val="tx1">
+            <a:lumMod val="35000"/>
+            <a:lumOff val="65000"/>
+          </a:schemeClr>
+        </a:solidFill>
+        <a:round/>
+      </a:ln>
+    </cs:spPr>
+  </cs:dropLine>
+  <cs:errorBar>
+    <cs:lnRef idx="0"/>
+    <cs:fillRef idx="0"/>
+    <cs:effectRef idx="0"/>
+    <cs:fontRef idx="minor">
+      <a:schemeClr val="tx1"/>
+    </cs:fontRef>
+    <cs:spPr>
+      <a:ln w="9525" cap="flat" cmpd="sng" algn="ctr">
+        <a:solidFill>
+          <a:schemeClr val="tx1">
+            <a:lumMod val="65000"/>
+            <a:lumOff val="35000"/>
+          </a:schemeClr>
+        </a:solidFill>
+        <a:round/>
+      </a:ln>
+    </cs:spPr>
+  </cs:errorBar>
+  <cs:floor>
+    <cs:lnRef idx="0"/>
+    <cs:fillRef idx="0"/>
+    <cs:effectRef idx="0"/>
+    <cs:fontRef idx="minor">
+      <a:schemeClr val="tx1"/>
+    </cs:fontRef>
+  </cs:floor>
+  <cs:gridlineMajor>
+    <cs:lnRef idx="0"/>
+    <cs:fillRef idx="0"/>
+    <cs:effectRef idx="0"/>
+    <cs:fontRef idx="minor">
+      <a:schemeClr val="tx1"/>
+    </cs:fontRef>
+    <cs:spPr>
+      <a:ln w="9525" cap="flat" cmpd="sng" algn="ctr">
+        <a:solidFill>
+          <a:schemeClr val="tx1">
+            <a:lumMod val="15000"/>
+            <a:lumOff val="85000"/>
+          </a:schemeClr>
+        </a:solidFill>
+        <a:round/>
+      </a:ln>
+    </cs:spPr>
+  </cs:gridlineMajor>
+  <cs:gridlineMinor>
+    <cs:lnRef idx="0"/>
+    <cs:fillRef idx="0"/>
+    <cs:effectRef idx="0"/>
+    <cs:fontRef idx="minor">
+      <a:schemeClr val="tx1"/>
+    </cs:fontRef>
+    <cs:spPr>
+      <a:ln w="9525" cap="flat" cmpd="sng" algn="ctr">
+        <a:solidFill>
+          <a:schemeClr val="tx1">
+            <a:lumMod val="15000"/>
+            <a:lumOff val="85000"/>
+          </a:schemeClr>
+        </a:solidFill>
+        <a:round/>
+      </a:ln>
+    </cs:spPr>
+  </cs:gridlineMinor>
+  <cs:hiLoLine>
+    <cs:lnRef idx="0"/>
+    <cs:fillRef idx="0"/>
+    <cs:effectRef idx="0"/>
+    <cs:fontRef idx="minor">
+      <a:schemeClr val="tx1"/>
+    </cs:fontRef>
+    <cs:spPr>
+      <a:ln w="9525" cap="flat" cmpd="sng" algn="ctr">
+        <a:solidFill>
+          <a:schemeClr val="tx1">
+            <a:lumMod val="75000"/>
+            <a:lumOff val="25000"/>
+          </a:schemeClr>
+        </a:solidFill>
+        <a:round/>
+      </a:ln>
+    </cs:spPr>
+  </cs:hiLoLine>
+  <cs:leaderLine>
+    <cs:lnRef idx="0"/>
+    <cs:fillRef idx="0"/>
+    <cs:effectRef idx="0"/>
+    <cs:fontRef idx="minor">
+      <a:schemeClr val="tx1"/>
+    </cs:fontRef>
+    <cs:spPr>
+      <a:ln w="9525" cap="flat" cmpd="sng" algn="ctr">
+        <a:solidFill>
+          <a:schemeClr val="tx1">
+            <a:lumMod val="35000"/>
+            <a:lumOff val="65000"/>
+          </a:schemeClr>
+        </a:solidFill>
+        <a:round/>
+      </a:ln>
+    </cs:spPr>
+  </cs:leaderLine>
+  <cs:legend>
+    <cs:lnRef idx="0"/>
+    <cs:fillRef idx="0"/>
+    <cs:effectRef idx="0"/>
+    <cs:fontRef idx="minor">
+      <a:schemeClr val="tx1">
+        <a:lumMod val="65000"/>
+        <a:lumOff val="35000"/>
+      </a:schemeClr>
+    </cs:fontRef>
+    <cs:defRPr sz="900"/>
+  </cs:legend>
+  <cs:plotArea mods="allowNoFillOverride allowNoLineOverride">
+    <cs:lnRef idx="0"/>
+    <cs:fillRef idx="0"/>
+    <cs:effectRef idx="0"/>
+    <cs:fontRef idx="minor">
+      <a:schemeClr val="tx1"/>
+    </cs:fontRef>
+  </cs:plotArea>
+  <cs:plotArea3D mods="allowNoFillOverride allowNoLineOverride">
+    <cs:lnRef idx="0"/>
+    <cs:fillRef idx="0"/>
+    <cs:effectRef idx="0"/>
+    <cs:fontRef idx="minor">
+      <a:schemeClr val="tx1"/>
+    </cs:fontRef>
+  </cs:plotArea3D>
+  <cs:seriesAxis>
+    <cs:lnRef idx="0"/>
+    <cs:fillRef idx="0"/>
+    <cs:effectRef idx="0"/>
+    <cs:fontRef idx="minor">
+      <a:schemeClr val="tx1">
+        <a:lumMod val="65000"/>
+        <a:lumOff val="35000"/>
+      </a:schemeClr>
+    </cs:fontRef>
+    <cs:spPr>
+      <a:ln w="9525" cap="flat" cmpd="sng" algn="ctr">
+        <a:solidFill>
+          <a:schemeClr val="tx1">
+            <a:lumMod val="15000"/>
+            <a:lumOff val="85000"/>
+          </a:schemeClr>
+        </a:solidFill>
+        <a:round/>
+      </a:ln>
+    </cs:spPr>
+    <cs:defRPr sz="900"/>
+  </cs:seriesAxis>
+  <cs:seriesLine>
+    <cs:lnRef idx="0"/>
+    <cs:fillRef idx="0"/>
+    <cs:effectRef idx="0"/>
+    <cs:fontRef idx="minor">
+      <a:schemeClr val="tx1"/>
+    </cs:fontRef>
+    <cs:spPr>
+      <a:ln w="9525" cap="flat">
+        <a:solidFill>
+          <a:srgbClr val="D9D9D9"/>
+        </a:solidFill>
+        <a:round/>
+      </a:ln>
+    </cs:spPr>
+  </cs:seriesLine>
+  <cs:title>
+    <cs:lnRef idx="0"/>
+    <cs:fillRef idx="0"/>
+    <cs:effectRef idx="0"/>
+    <cs:fontRef idx="minor">
+      <a:schemeClr val="tx1">
+        <a:lumMod val="65000"/>
+        <a:lumOff val="35000"/>
+      </a:schemeClr>
+    </cs:fontRef>
+    <cs:defRPr sz="1400"/>
+  </cs:title>
+  <cs:trendline>
+    <cs:lnRef idx="0">
+      <cs:styleClr val="auto"/>
+    </cs:lnRef>
+    <cs:fillRef idx="0"/>
+    <cs:effectRef idx="0"/>
+    <cs:fontRef idx="minor">
+      <a:schemeClr val="tx1"/>
+    </cs:fontRef>
+    <cs:spPr>
+      <a:ln w="19050" cap="rnd">
+        <a:solidFill>
+          <a:schemeClr val="phClr"/>
+        </a:solidFill>
+        <a:prstDash val="sysDash"/>
+      </a:ln>
+    </cs:spPr>
+  </cs:trendline>
+  <cs:trendlineLabel>
+    <cs:lnRef idx="0"/>
+    <cs:fillRef idx="0"/>
+    <cs:effectRef idx="0"/>
+    <cs:fontRef idx="minor">
+      <a:schemeClr val="tx1">
+        <a:lumMod val="65000"/>
+        <a:lumOff val="35000"/>
+      </a:schemeClr>
+    </cs:fontRef>
+    <cs:defRPr sz="900"/>
+  </cs:trendlineLabel>
+  <cs:upBar>
+    <cs:lnRef idx="0"/>
+    <cs:fillRef idx="0"/>
+    <cs:effectRef idx="0"/>
+    <cs:fontRef idx="minor">
+      <a:schemeClr val="dk1"/>
+    </cs:fontRef>
+    <cs:spPr>
+      <a:solidFill>
+        <a:schemeClr val="lt1"/>
+      </a:solidFill>
+      <a:ln w="9525">
+        <a:solidFill>
+          <a:schemeClr val="tx1">
+            <a:lumMod val="15000"/>
+            <a:lumOff val="85000"/>
+          </a:schemeClr>
+        </a:solidFill>
+      </a:ln>
+    </cs:spPr>
+  </cs:upBar>
+  <cs:valueAxis>
+    <cs:lnRef idx="0"/>
+    <cs:fillRef idx="0"/>
+    <cs:effectRef idx="0"/>
+    <cs:fontRef idx="minor">
+      <a:schemeClr val="tx1">
+        <a:lumMod val="65000"/>
+        <a:lumOff val="35000"/>
+      </a:schemeClr>
+    </cs:fontRef>
+    <cs:defRPr sz="900"/>
+  </cs:valueAxis>
+  <cs:wall>
+    <cs:lnRef idx="0"/>
+    <cs:fillRef idx="0"/>
+    <cs:effectRef idx="0"/>
+    <cs:fontRef idx="minor">
+      <a:schemeClr val="tx1"/>
+    </cs:fontRef>
+  </cs:wall>
+</cs:chartStyle>
 </file>
 
 <file path=ppt/ink/ink1.xml><?xml version="1.0" encoding="utf-8"?>
@@ -444,7 +1064,7 @@
           <a:p>
             <a:fld id="{86A64A56-4393-4CB6-85C6-C90BB7A8548C}" type="datetimeFigureOut">
               <a:rPr lang="en-US" smtClean="0"/>
-              <a:t>9/28/2026</a:t>
+              <a:t>10/5/2026</a:t>
             </a:fld>
             <a:endParaRPr lang="en-US"/>
           </a:p>
@@ -858,7 +1478,7 @@
           <a:p>
             <a:fld id="{60541A7F-F981-4501-AAE0-06F6CB326412}" type="datetime1">
               <a:rPr lang="en-US" smtClean="0"/>
-              <a:t>9/28/2026</a:t>
+              <a:t>10/5/2026</a:t>
             </a:fld>
             <a:endParaRPr lang="en-US"/>
           </a:p>
@@ -1056,7 +1676,7 @@
           <a:p>
             <a:fld id="{F853943D-1B76-47AC-8196-C4B25463BF47}" type="datetime1">
               <a:rPr lang="en-US" smtClean="0"/>
-              <a:t>9/28/2026</a:t>
+              <a:t>10/5/2026</a:t>
             </a:fld>
             <a:endParaRPr lang="en-US"/>
           </a:p>
@@ -1264,7 +1884,7 @@
           <a:p>
             <a:fld id="{2E188C43-274A-49F7-9E8E-741661AA3B8D}" type="datetime1">
               <a:rPr lang="en-US" smtClean="0"/>
-              <a:t>9/28/2026</a:t>
+              <a:t>10/5/2026</a:t>
             </a:fld>
             <a:endParaRPr lang="en-US"/>
           </a:p>
@@ -1328,6 +1948,280 @@
     <p:extLst>
       <p:ext uri="{BB962C8B-B14F-4D97-AF65-F5344CB8AC3E}">
         <p14:creationId xmlns:p14="http://schemas.microsoft.com/office/powerpoint/2010/main" val="1772351598"/>
+      </p:ext>
+    </p:extLst>
+  </p:cSld>
+  <p:clrMapOvr>
+    <a:masterClrMapping/>
+  </p:clrMapOvr>
+</p:sldLayout>
+</file>
+
+<file path=ppt/slideLayouts/slideLayout12.xml><?xml version="1.0" encoding="utf-8"?>
+<p:sldLayout xmlns:a="http://schemas.openxmlformats.org/drawingml/2006/main" xmlns:r="http://schemas.openxmlformats.org/officeDocument/2006/relationships" xmlns:p="http://schemas.openxmlformats.org/presentationml/2006/main" type="titleOnly">
+  <p:cSld name="Layout A">
+    <p:spTree>
+      <p:nvGrpSpPr>
+        <p:cNvPr id="1" name=""/>
+        <p:cNvGrpSpPr/>
+        <p:nvPr/>
+      </p:nvGrpSpPr>
+      <p:grpSpPr>
+        <a:xfrm>
+          <a:off x="0" y="0"/>
+          <a:ext cx="0" cy="0"/>
+          <a:chOff x="0" y="0"/>
+          <a:chExt cx="0" cy="0"/>
+        </a:xfrm>
+      </p:grpSpPr>
+      <p:sp>
+        <p:nvSpPr>
+          <p:cNvPr id="2" name="Title 1">
+            <a:extLst>
+              <a:ext uri="{FF2B5EF4-FFF2-40B4-BE49-F238E27FC236}">
+                <a16:creationId xmlns:a16="http://schemas.microsoft.com/office/drawing/2014/main" id="{6030150B-B92B-63DC-988E-EA6EF944F7F9}"/>
+              </a:ext>
+            </a:extLst>
+          </p:cNvPr>
+          <p:cNvSpPr>
+            <a:spLocks noGrp="1"/>
+          </p:cNvSpPr>
+          <p:nvPr>
+            <p:ph type="title"/>
+          </p:nvPr>
+        </p:nvSpPr>
+        <p:spPr/>
+        <p:txBody>
+          <a:bodyPr/>
+          <a:lstStyle/>
+          <a:p>
+            <a:r>
+              <a:rPr lang="en-US"/>
+              <a:t>Click to edit Master title style</a:t>
+            </a:r>
+          </a:p>
+        </p:txBody>
+      </p:sp>
+      <p:sp>
+        <p:nvSpPr>
+          <p:cNvPr id="5" name="Slide Number Placeholder 4">
+            <a:extLst>
+              <a:ext uri="{FF2B5EF4-FFF2-40B4-BE49-F238E27FC236}">
+                <a16:creationId xmlns:a16="http://schemas.microsoft.com/office/drawing/2014/main" id="{D3038B06-BF74-5654-F5F0-B5DB822985E1}"/>
+              </a:ext>
+            </a:extLst>
+          </p:cNvPr>
+          <p:cNvSpPr>
+            <a:spLocks noGrp="1"/>
+          </p:cNvSpPr>
+          <p:nvPr>
+            <p:ph type="sldNum" sz="quarter" idx="12"/>
+          </p:nvPr>
+        </p:nvSpPr>
+        <p:spPr/>
+        <p:txBody>
+          <a:bodyPr/>
+          <a:lstStyle/>
+          <a:p>
+            <a:fld id="{C6DDDF4F-F028-4B81-B3D4-6037FCFC1593}" type="slidenum">
+              <a:rPr lang="en-US" smtClean="0"/>
+              <a:t>‹#›</a:t>
+            </a:fld>
+            <a:endParaRPr lang="en-US"/>
+          </a:p>
+        </p:txBody>
+      </p:sp>
+      <p:sp>
+        <p:nvSpPr>
+          <p:cNvPr id="6" name="Layout A graphic">
+            <a:extLst>
+              <a:ext uri="{FF2B5EF4-FFF2-40B4-BE49-F238E27FC236}">
+                <a16:creationId xmlns:a16="http://schemas.microsoft.com/office/drawing/2014/main" id="{A4D09DA9-197B-0F4A-06D7-DB10B6473EB7}"/>
+              </a:ext>
+            </a:extLst>
+          </p:cNvPr>
+          <p:cNvSpPr/>
+          <p:nvPr userDrawn="1"/>
+        </p:nvSpPr>
+        <p:spPr>
+          <a:xfrm>
+            <a:off x="381000" y="685800"/>
+            <a:ext cx="2794000" cy="381000"/>
+          </a:xfrm>
+          <a:prstGeom prst="rect">
+            <a:avLst/>
+          </a:prstGeom>
+        </p:spPr>
+        <p:style>
+          <a:lnRef idx="2">
+            <a:schemeClr val="accent1">
+              <a:shade val="15000"/>
+            </a:schemeClr>
+          </a:lnRef>
+          <a:fillRef idx="1">
+            <a:schemeClr val="accent1"/>
+          </a:fillRef>
+          <a:effectRef idx="0">
+            <a:schemeClr val="accent1"/>
+          </a:effectRef>
+          <a:fontRef idx="minor">
+            <a:schemeClr val="lt1"/>
+          </a:fontRef>
+        </p:style>
+        <p:txBody>
+          <a:bodyPr rtlCol="0" anchor="ctr"/>
+          <a:lstStyle/>
+          <a:p>
+            <a:pPr algn="ctr"/>
+            <a:r>
+              <a:rPr lang="ar-EG" sz="1400"/>
+              <a:t>رسم التخطيط أ</a:t>
+            </a:r>
+            <a:endParaRPr lang="en-US" sz="1400"/>
+          </a:p>
+        </p:txBody>
+      </p:sp>
+    </p:spTree>
+    <p:extLst>
+      <p:ext uri="{BB962C8B-B14F-4D97-AF65-F5344CB8AC3E}">
+        <p14:creationId xmlns:p14="http://schemas.microsoft.com/office/powerpoint/2010/main" val="828789351"/>
+      </p:ext>
+    </p:extLst>
+  </p:cSld>
+  <p:clrMapOvr>
+    <a:masterClrMapping/>
+  </p:clrMapOvr>
+</p:sldLayout>
+</file>
+
+<file path=ppt/slideLayouts/slideLayout13.xml><?xml version="1.0" encoding="utf-8"?>
+<p:sldLayout xmlns:a="http://schemas.openxmlformats.org/drawingml/2006/main" xmlns:r="http://schemas.openxmlformats.org/officeDocument/2006/relationships" xmlns:p="http://schemas.openxmlformats.org/presentationml/2006/main" showMasterSp="0" type="titleOnly">
+  <p:cSld name="Layout B">
+    <p:spTree>
+      <p:nvGrpSpPr>
+        <p:cNvPr id="1" name=""/>
+        <p:cNvGrpSpPr/>
+        <p:nvPr/>
+      </p:nvGrpSpPr>
+      <p:grpSpPr>
+        <a:xfrm>
+          <a:off x="0" y="0"/>
+          <a:ext cx="0" cy="0"/>
+          <a:chOff x="0" y="0"/>
+          <a:chExt cx="0" cy="0"/>
+        </a:xfrm>
+      </p:grpSpPr>
+      <p:sp>
+        <p:nvSpPr>
+          <p:cNvPr id="2" name="Title 1">
+            <a:extLst>
+              <a:ext uri="{FF2B5EF4-FFF2-40B4-BE49-F238E27FC236}">
+                <a16:creationId xmlns:a16="http://schemas.microsoft.com/office/drawing/2014/main" id="{AF3E6521-8CFB-4D01-74E8-723187B4154D}"/>
+              </a:ext>
+            </a:extLst>
+          </p:cNvPr>
+          <p:cNvSpPr>
+            <a:spLocks noGrp="1"/>
+          </p:cNvSpPr>
+          <p:nvPr>
+            <p:ph type="title"/>
+          </p:nvPr>
+        </p:nvSpPr>
+        <p:spPr/>
+        <p:txBody>
+          <a:bodyPr/>
+          <a:lstStyle/>
+          <a:p>
+            <a:r>
+              <a:rPr lang="en-US"/>
+              <a:t>Click to edit Master title style</a:t>
+            </a:r>
+          </a:p>
+        </p:txBody>
+      </p:sp>
+      <p:sp>
+        <p:nvSpPr>
+          <p:cNvPr id="5" name="Slide Number Placeholder 4">
+            <a:extLst>
+              <a:ext uri="{FF2B5EF4-FFF2-40B4-BE49-F238E27FC236}">
+                <a16:creationId xmlns:a16="http://schemas.microsoft.com/office/drawing/2014/main" id="{DCE47D3F-5AE9-4574-C420-CD850FC82765}"/>
+              </a:ext>
+            </a:extLst>
+          </p:cNvPr>
+          <p:cNvSpPr>
+            <a:spLocks noGrp="1"/>
+          </p:cNvSpPr>
+          <p:nvPr>
+            <p:ph type="sldNum" sz="quarter" idx="12"/>
+          </p:nvPr>
+        </p:nvSpPr>
+        <p:spPr/>
+        <p:txBody>
+          <a:bodyPr/>
+          <a:lstStyle/>
+          <a:p>
+            <a:fld id="{C6DDDF4F-F028-4B81-B3D4-6037FCFC1593}" type="slidenum">
+              <a:rPr lang="en-US" smtClean="0"/>
+              <a:t>‹#›</a:t>
+            </a:fld>
+            <a:endParaRPr lang="en-US"/>
+          </a:p>
+        </p:txBody>
+      </p:sp>
+      <p:sp>
+        <p:nvSpPr>
+          <p:cNvPr id="6" name="Layout B graphic">
+            <a:extLst>
+              <a:ext uri="{FF2B5EF4-FFF2-40B4-BE49-F238E27FC236}">
+                <a16:creationId xmlns:a16="http://schemas.microsoft.com/office/drawing/2014/main" id="{14A9AAB3-6159-DF59-074C-EAFE3016E7D8}"/>
+              </a:ext>
+            </a:extLst>
+          </p:cNvPr>
+          <p:cNvSpPr/>
+          <p:nvPr userDrawn="1"/>
+        </p:nvSpPr>
+        <p:spPr>
+          <a:xfrm>
+            <a:off x="381000" y="685800"/>
+            <a:ext cx="2794000" cy="381000"/>
+          </a:xfrm>
+          <a:prstGeom prst="rect">
+            <a:avLst/>
+          </a:prstGeom>
+        </p:spPr>
+        <p:style>
+          <a:lnRef idx="2">
+            <a:schemeClr val="accent1">
+              <a:shade val="15000"/>
+            </a:schemeClr>
+          </a:lnRef>
+          <a:fillRef idx="1">
+            <a:schemeClr val="accent1"/>
+          </a:fillRef>
+          <a:effectRef idx="0">
+            <a:schemeClr val="accent1"/>
+          </a:effectRef>
+          <a:fontRef idx="minor">
+            <a:schemeClr val="lt1"/>
+          </a:fontRef>
+        </p:style>
+        <p:txBody>
+          <a:bodyPr rtlCol="0" anchor="ctr"/>
+          <a:lstStyle/>
+          <a:p>
+            <a:pPr algn="ctr"/>
+            <a:r>
+              <a:rPr lang="ar-EG" sz="1400"/>
+              <a:t>رسم التخطيط ب</a:t>
+            </a:r>
+            <a:endParaRPr lang="en-US" sz="1400"/>
+          </a:p>
+        </p:txBody>
+      </p:sp>
+    </p:spTree>
+    <p:extLst>
+      <p:ext uri="{BB962C8B-B14F-4D97-AF65-F5344CB8AC3E}">
+        <p14:creationId xmlns:p14="http://schemas.microsoft.com/office/powerpoint/2010/main" val="2712827227"/>
       </p:ext>
     </p:extLst>
   </p:cSld>
@@ -1462,7 +2356,7 @@
           <a:p>
             <a:fld id="{AFE56759-6820-42B3-B9BE-972720AE0218}" type="datetime1">
               <a:rPr lang="en-US" smtClean="0"/>
-              <a:t>9/28/2026</a:t>
+              <a:t>10/5/2026</a:t>
             </a:fld>
             <a:endParaRPr lang="en-US"/>
           </a:p>
@@ -1737,7 +2631,7 @@
           <a:p>
             <a:fld id="{E60A5D86-3AF6-469E-9631-8585AF639EE9}" type="datetime1">
               <a:rPr lang="en-US" smtClean="0"/>
-              <a:t>9/28/2026</a:t>
+              <a:t>10/5/2026</a:t>
             </a:fld>
             <a:endParaRPr lang="en-US"/>
           </a:p>
@@ -2002,7 +2896,7 @@
           <a:p>
             <a:fld id="{7040F516-D53A-4B36-A577-E8486E25D0EC}" type="datetime1">
               <a:rPr lang="en-US" smtClean="0"/>
-              <a:t>9/28/2026</a:t>
+              <a:t>10/5/2026</a:t>
             </a:fld>
             <a:endParaRPr lang="en-US"/>
           </a:p>
@@ -2414,7 +3308,7 @@
           <a:p>
             <a:fld id="{3E6E30B0-F99E-4FCA-83EF-31E10F2B66B1}" type="datetime1">
               <a:rPr lang="en-US" smtClean="0"/>
-              <a:t>9/28/2026</a:t>
+              <a:t>10/5/2026</a:t>
             </a:fld>
             <a:endParaRPr lang="en-US"/>
           </a:p>
@@ -2555,7 +3449,7 @@
           <a:p>
             <a:fld id="{FF185E36-5297-403D-B499-FD865F8C5A4F}" type="datetime1">
               <a:rPr lang="en-US" smtClean="0"/>
-              <a:t>9/28/2026</a:t>
+              <a:t>10/5/2026</a:t>
             </a:fld>
             <a:endParaRPr lang="en-US"/>
           </a:p>
@@ -2668,7 +3562,7 @@
           <a:p>
             <a:fld id="{2CDF4417-72BA-4D8F-8104-BFB5B423E2DD}" type="datetime1">
               <a:rPr lang="en-US" smtClean="0"/>
-              <a:t>9/28/2026</a:t>
+              <a:t>10/5/2026</a:t>
             </a:fld>
             <a:endParaRPr lang="en-US"/>
           </a:p>
@@ -2979,7 +3873,7 @@
           <a:p>
             <a:fld id="{C30CC0FA-F1D1-458D-9491-18A8D18048F7}" type="datetime1">
               <a:rPr lang="en-US" smtClean="0"/>
-              <a:t>9/28/2026</a:t>
+              <a:t>10/5/2026</a:t>
             </a:fld>
             <a:endParaRPr lang="en-US"/>
           </a:p>
@@ -3267,7 +4161,7 @@
           <a:p>
             <a:fld id="{66BF3E84-4616-4F9E-891F-D3C933FF2937}" type="datetime1">
               <a:rPr lang="en-US" smtClean="0"/>
-              <a:t>9/28/2026</a:t>
+              <a:t>10/5/2026</a:t>
             </a:fld>
             <a:endParaRPr lang="en-US"/>
           </a:p>
@@ -3508,7 +4402,7 @@
           <a:p>
             <a:fld id="{350CAA63-4269-45C0-A8A2-D62AE2EC413F}" type="datetime1">
               <a:rPr lang="en-US" smtClean="0"/>
-              <a:t>9/28/2026</a:t>
+              <a:t>10/5/2026</a:t>
             </a:fld>
             <a:endParaRPr lang="en-US"/>
           </a:p>
@@ -3908,6 +4802,621 @@
 </p:sldMaster>
 </file>
 
+<file path=ppt/slideMasters/slideMaster2.xml><?xml version="1.0" encoding="utf-8"?>
+<p:sldMaster xmlns:a="http://schemas.openxmlformats.org/drawingml/2006/main" xmlns:r="http://schemas.openxmlformats.org/officeDocument/2006/relationships" xmlns:p="http://schemas.openxmlformats.org/presentationml/2006/main" preserve="1">
+  <p:cSld>
+    <p:bg>
+      <p:bgPr>
+        <a:blipFill>
+          <a:blip r:embed="rId4"/>
+          <a:stretch>
+            <a:fillRect/>
+          </a:stretch>
+        </a:blipFill>
+        <a:effectLst/>
+      </p:bgPr>
+    </p:bg>
+    <p:spTree>
+      <p:nvGrpSpPr>
+        <p:cNvPr id="1" name=""/>
+        <p:cNvGrpSpPr/>
+        <p:nvPr/>
+      </p:nvGrpSpPr>
+      <p:grpSpPr>
+        <a:xfrm>
+          <a:off x="0" y="0"/>
+          <a:ext cx="0" cy="0"/>
+          <a:chOff x="0" y="0"/>
+          <a:chExt cx="0" cy="0"/>
+        </a:xfrm>
+      </p:grpSpPr>
+      <p:sp>
+        <p:nvSpPr>
+          <p:cNvPr id="2" name="Title Placeholder 1">
+            <a:extLst>
+              <a:ext uri="{FF2B5EF4-FFF2-40B4-BE49-F238E27FC236}">
+                <a16:creationId xmlns:a16="http://schemas.microsoft.com/office/drawing/2014/main" id="{C3E90674-C2C1-EE23-B14D-9859AD21165F}"/>
+              </a:ext>
+            </a:extLst>
+          </p:cNvPr>
+          <p:cNvSpPr>
+            <a:spLocks noGrp="1"/>
+          </p:cNvSpPr>
+          <p:nvPr>
+            <p:ph type="title"/>
+          </p:nvPr>
+        </p:nvSpPr>
+        <p:spPr>
+          <a:xfrm>
+            <a:off x="838200" y="365125"/>
+            <a:ext cx="10515600" cy="1325563"/>
+          </a:xfrm>
+          <a:prstGeom prst="rect">
+            <a:avLst/>
+          </a:prstGeom>
+        </p:spPr>
+        <p:txBody>
+          <a:bodyPr vert="horz" lIns="91440" tIns="45720" rIns="91440" bIns="45720" rtlCol="0" anchor="ctr">
+            <a:normAutofit/>
+          </a:bodyPr>
+          <a:lstStyle/>
+          <a:p>
+            <a:r>
+              <a:rPr lang="en-US"/>
+              <a:t>Click to edit Master title style</a:t>
+            </a:r>
+          </a:p>
+        </p:txBody>
+      </p:sp>
+      <p:sp>
+        <p:nvSpPr>
+          <p:cNvPr id="3" name="Text Placeholder 2">
+            <a:extLst>
+              <a:ext uri="{FF2B5EF4-FFF2-40B4-BE49-F238E27FC236}">
+                <a16:creationId xmlns:a16="http://schemas.microsoft.com/office/drawing/2014/main" id="{A3195541-4A69-8667-EE84-A8518AC74033}"/>
+              </a:ext>
+            </a:extLst>
+          </p:cNvPr>
+          <p:cNvSpPr>
+            <a:spLocks noGrp="1"/>
+          </p:cNvSpPr>
+          <p:nvPr>
+            <p:ph type="body" idx="1"/>
+          </p:nvPr>
+        </p:nvSpPr>
+        <p:spPr>
+          <a:xfrm>
+            <a:off x="838200" y="1825625"/>
+            <a:ext cx="10515600" cy="4351338"/>
+          </a:xfrm>
+          <a:prstGeom prst="rect">
+            <a:avLst/>
+          </a:prstGeom>
+        </p:spPr>
+        <p:txBody>
+          <a:bodyPr vert="horz" lIns="91440" tIns="45720" rIns="91440" bIns="45720" rtlCol="0">
+            <a:normAutofit/>
+          </a:bodyPr>
+          <a:lstStyle/>
+          <a:p>
+            <a:pPr lvl="0"/>
+            <a:r>
+              <a:rPr lang="en-US"/>
+              <a:t>Click to edit Master text styles</a:t>
+            </a:r>
+          </a:p>
+          <a:p>
+            <a:pPr lvl="1"/>
+            <a:r>
+              <a:rPr lang="en-US"/>
+              <a:t>Second level</a:t>
+            </a:r>
+          </a:p>
+          <a:p>
+            <a:pPr lvl="2"/>
+            <a:r>
+              <a:rPr lang="en-US"/>
+              <a:t>Third level</a:t>
+            </a:r>
+          </a:p>
+          <a:p>
+            <a:pPr lvl="3"/>
+            <a:r>
+              <a:rPr lang="en-US"/>
+              <a:t>Fourth level</a:t>
+            </a:r>
+          </a:p>
+          <a:p>
+            <a:pPr lvl="4"/>
+            <a:r>
+              <a:rPr lang="en-US"/>
+              <a:t>Fifth level</a:t>
+            </a:r>
+          </a:p>
+        </p:txBody>
+      </p:sp>
+      <p:sp>
+        <p:nvSpPr>
+          <p:cNvPr id="4" name="Date Placeholder 3">
+            <a:extLst>
+              <a:ext uri="{FF2B5EF4-FFF2-40B4-BE49-F238E27FC236}">
+                <a16:creationId xmlns:a16="http://schemas.microsoft.com/office/drawing/2014/main" id="{4FF32A8D-7850-3170-169C-FACD9064E9A8}"/>
+              </a:ext>
+            </a:extLst>
+          </p:cNvPr>
+          <p:cNvSpPr>
+            <a:spLocks noGrp="1"/>
+          </p:cNvSpPr>
+          <p:nvPr>
+            <p:ph type="dt" sz="half" idx="2"/>
+          </p:nvPr>
+        </p:nvSpPr>
+        <p:spPr>
+          <a:xfrm>
+            <a:off x="838200" y="6356350"/>
+            <a:ext cx="2743200" cy="365125"/>
+          </a:xfrm>
+          <a:prstGeom prst="rect">
+            <a:avLst/>
+          </a:prstGeom>
+        </p:spPr>
+        <p:txBody>
+          <a:bodyPr vert="horz" lIns="91440" tIns="45720" rIns="91440" bIns="45720" rtlCol="0" anchor="ctr"/>
+          <a:lstStyle>
+            <a:lvl1pPr algn="l">
+              <a:defRPr sz="1200">
+                <a:solidFill>
+                  <a:schemeClr val="tx1">
+                    <a:tint val="82000"/>
+                  </a:schemeClr>
+                </a:solidFill>
+              </a:defRPr>
+            </a:lvl1pPr>
+          </a:lstStyle>
+          <a:p>
+            <a:fld id="{27E3A6A4-31A5-4BF1-8F46-4A08E4DED6B4}" type="datetimeFigureOut">
+              <a:rPr lang="en-US" smtClean="0"/>
+              <a:t>10/5/2026</a:t>
+            </a:fld>
+            <a:endParaRPr lang="en-US"/>
+          </a:p>
+        </p:txBody>
+      </p:sp>
+      <p:sp>
+        <p:nvSpPr>
+          <p:cNvPr id="5" name="Footer Placeholder 4">
+            <a:extLst>
+              <a:ext uri="{FF2B5EF4-FFF2-40B4-BE49-F238E27FC236}">
+                <a16:creationId xmlns:a16="http://schemas.microsoft.com/office/drawing/2014/main" id="{D2CD2B44-AE81-2D59-EF35-488D48E80B04}"/>
+              </a:ext>
+            </a:extLst>
+          </p:cNvPr>
+          <p:cNvSpPr>
+            <a:spLocks noGrp="1"/>
+          </p:cNvSpPr>
+          <p:nvPr>
+            <p:ph type="ftr" sz="quarter" idx="3"/>
+          </p:nvPr>
+        </p:nvSpPr>
+        <p:spPr>
+          <a:xfrm>
+            <a:off x="4038600" y="6356350"/>
+            <a:ext cx="4114800" cy="365125"/>
+          </a:xfrm>
+          <a:prstGeom prst="rect">
+            <a:avLst/>
+          </a:prstGeom>
+        </p:spPr>
+        <p:txBody>
+          <a:bodyPr vert="horz" lIns="91440" tIns="45720" rIns="91440" bIns="45720" rtlCol="0" anchor="ctr"/>
+          <a:lstStyle>
+            <a:lvl1pPr algn="ctr">
+              <a:defRPr sz="1200">
+                <a:solidFill>
+                  <a:schemeClr val="tx1">
+                    <a:tint val="82000"/>
+                  </a:schemeClr>
+                </a:solidFill>
+              </a:defRPr>
+            </a:lvl1pPr>
+          </a:lstStyle>
+          <a:p>
+            <a:endParaRPr lang="en-US"/>
+          </a:p>
+        </p:txBody>
+      </p:sp>
+      <p:sp>
+        <p:nvSpPr>
+          <p:cNvPr id="6" name="Slide Number Placeholder 5">
+            <a:extLst>
+              <a:ext uri="{FF2B5EF4-FFF2-40B4-BE49-F238E27FC236}">
+                <a16:creationId xmlns:a16="http://schemas.microsoft.com/office/drawing/2014/main" id="{954F755E-3A70-91ED-AC02-517E8BD9E114}"/>
+              </a:ext>
+            </a:extLst>
+          </p:cNvPr>
+          <p:cNvSpPr>
+            <a:spLocks noGrp="1"/>
+          </p:cNvSpPr>
+          <p:nvPr>
+            <p:ph type="sldNum" sz="quarter" idx="4"/>
+          </p:nvPr>
+        </p:nvSpPr>
+        <p:spPr>
+          <a:xfrm>
+            <a:off x="8610600" y="6356350"/>
+            <a:ext cx="2743200" cy="365125"/>
+          </a:xfrm>
+          <a:prstGeom prst="rect">
+            <a:avLst/>
+          </a:prstGeom>
+        </p:spPr>
+        <p:txBody>
+          <a:bodyPr vert="horz" lIns="91440" tIns="45720" rIns="91440" bIns="45720" rtlCol="0" anchor="ctr"/>
+          <a:lstStyle>
+            <a:lvl1pPr algn="r">
+              <a:defRPr sz="1200">
+                <a:solidFill>
+                  <a:schemeClr val="tx1">
+                    <a:tint val="82000"/>
+                  </a:schemeClr>
+                </a:solidFill>
+              </a:defRPr>
+            </a:lvl1pPr>
+          </a:lstStyle>
+          <a:p>
+            <a:fld id="{C6DDDF4F-F028-4B81-B3D4-6037FCFC1593}" type="slidenum">
+              <a:rPr lang="en-US" smtClean="0"/>
+              <a:t>‹#›</a:t>
+            </a:fld>
+            <a:endParaRPr lang="en-US"/>
+          </a:p>
+        </p:txBody>
+      </p:sp>
+      <p:sp>
+        <p:nvSpPr>
+          <p:cNvPr id="7" name="Master logo">
+            <a:extLst>
+              <a:ext uri="{FF2B5EF4-FFF2-40B4-BE49-F238E27FC236}">
+                <a16:creationId xmlns:a16="http://schemas.microsoft.com/office/drawing/2014/main" id="{670868CD-C909-BF29-7562-E0BC1DE02FDE}"/>
+              </a:ext>
+            </a:extLst>
+          </p:cNvPr>
+          <p:cNvSpPr/>
+          <p:nvPr userDrawn="1"/>
+        </p:nvSpPr>
+        <p:spPr>
+          <a:xfrm>
+            <a:off x="381000" y="177800"/>
+            <a:ext cx="2794000" cy="381000"/>
+          </a:xfrm>
+          <a:prstGeom prst="rect">
+            <a:avLst/>
+          </a:prstGeom>
+        </p:spPr>
+        <p:style>
+          <a:lnRef idx="2">
+            <a:schemeClr val="accent1">
+              <a:shade val="15000"/>
+            </a:schemeClr>
+          </a:lnRef>
+          <a:fillRef idx="1">
+            <a:schemeClr val="accent1"/>
+          </a:fillRef>
+          <a:effectRef idx="0">
+            <a:schemeClr val="accent1"/>
+          </a:effectRef>
+          <a:fontRef idx="minor">
+            <a:schemeClr val="lt1"/>
+          </a:fontRef>
+        </p:style>
+        <p:txBody>
+          <a:bodyPr rtlCol="0" anchor="ctr"/>
+          <a:lstStyle/>
+          <a:p>
+            <a:pPr algn="ctr"/>
+            <a:r>
+              <a:rPr lang="ar-EG" sz="1400"/>
+              <a:t>شعار الاستوديو</a:t>
+            </a:r>
+            <a:endParaRPr lang="en-US" sz="1400"/>
+          </a:p>
+        </p:txBody>
+      </p:sp>
+    </p:spTree>
+    <p:extLst>
+      <p:ext uri="{BB962C8B-B14F-4D97-AF65-F5344CB8AC3E}">
+        <p14:creationId xmlns:p14="http://schemas.microsoft.com/office/powerpoint/2010/main" val="2184331512"/>
+      </p:ext>
+    </p:extLst>
+  </p:cSld>
+  <p:clrMap bg1="lt1" tx1="dk1" bg2="lt2" tx2="dk2" accent1="accent1" accent2="accent2" accent3="accent3" accent4="accent4" accent5="accent5" accent6="accent6" hlink="hlink" folHlink="folHlink"/>
+  <p:sldLayoutIdLst>
+    <p:sldLayoutId id="2147483672" r:id="rId1"/>
+    <p:sldLayoutId id="2147483673" r:id="rId2"/>
+  </p:sldLayoutIdLst>
+  <p:txStyles>
+    <p:titleStyle>
+      <a:lvl1pPr algn="l" defTabSz="914400" rtl="0" eaLnBrk="1" latinLnBrk="0" hangingPunct="1">
+        <a:lnSpc>
+          <a:spcPct val="90000"/>
+        </a:lnSpc>
+        <a:spcBef>
+          <a:spcPct val="0"/>
+        </a:spcBef>
+        <a:buNone/>
+        <a:defRPr sz="4400" kern="1200">
+          <a:solidFill>
+            <a:schemeClr val="tx1"/>
+          </a:solidFill>
+          <a:latin typeface="+mj-lt"/>
+          <a:ea typeface="+mj-ea"/>
+          <a:cs typeface="+mj-cs"/>
+        </a:defRPr>
+      </a:lvl1pPr>
+    </p:titleStyle>
+    <p:bodyStyle>
+      <a:lvl1pPr marL="228600" indent="-228600" algn="l" defTabSz="914400" rtl="0" eaLnBrk="1" latinLnBrk="0" hangingPunct="1">
+        <a:lnSpc>
+          <a:spcPct val="90000"/>
+        </a:lnSpc>
+        <a:spcBef>
+          <a:spcPts val="1000"/>
+        </a:spcBef>
+        <a:buFont typeface="Arial" panose="020B0604020202020204" pitchFamily="34" charset="0"/>
+        <a:buChar char="•"/>
+        <a:defRPr sz="2800" kern="1200">
+          <a:solidFill>
+            <a:schemeClr val="tx1"/>
+          </a:solidFill>
+          <a:latin typeface="+mn-lt"/>
+          <a:ea typeface="+mn-ea"/>
+          <a:cs typeface="+mn-cs"/>
+        </a:defRPr>
+      </a:lvl1pPr>
+      <a:lvl2pPr marL="685800" indent="-228600" algn="l" defTabSz="914400" rtl="0" eaLnBrk="1" latinLnBrk="0" hangingPunct="1">
+        <a:lnSpc>
+          <a:spcPct val="90000"/>
+        </a:lnSpc>
+        <a:spcBef>
+          <a:spcPts val="500"/>
+        </a:spcBef>
+        <a:buFont typeface="Arial" panose="020B0604020202020204" pitchFamily="34" charset="0"/>
+        <a:buChar char="•"/>
+        <a:defRPr sz="2400" kern="1200">
+          <a:solidFill>
+            <a:schemeClr val="tx1"/>
+          </a:solidFill>
+          <a:latin typeface="+mn-lt"/>
+          <a:ea typeface="+mn-ea"/>
+          <a:cs typeface="+mn-cs"/>
+        </a:defRPr>
+      </a:lvl2pPr>
+      <a:lvl3pPr marL="1143000" indent="-228600" algn="l" defTabSz="914400" rtl="0" eaLnBrk="1" latinLnBrk="0" hangingPunct="1">
+        <a:lnSpc>
+          <a:spcPct val="90000"/>
+        </a:lnSpc>
+        <a:spcBef>
+          <a:spcPts val="500"/>
+        </a:spcBef>
+        <a:buFont typeface="Arial" panose="020B0604020202020204" pitchFamily="34" charset="0"/>
+        <a:buChar char="•"/>
+        <a:defRPr sz="2000" kern="1200">
+          <a:solidFill>
+            <a:schemeClr val="tx1"/>
+          </a:solidFill>
+          <a:latin typeface="+mn-lt"/>
+          <a:ea typeface="+mn-ea"/>
+          <a:cs typeface="+mn-cs"/>
+        </a:defRPr>
+      </a:lvl3pPr>
+      <a:lvl4pPr marL="1600200" indent="-228600" algn="l" defTabSz="914400" rtl="0" eaLnBrk="1" latinLnBrk="0" hangingPunct="1">
+        <a:lnSpc>
+          <a:spcPct val="90000"/>
+        </a:lnSpc>
+        <a:spcBef>
+          <a:spcPts val="500"/>
+        </a:spcBef>
+        <a:buFont typeface="Arial" panose="020B0604020202020204" pitchFamily="34" charset="0"/>
+        <a:buChar char="•"/>
+        <a:defRPr sz="1800" kern="1200">
+          <a:solidFill>
+            <a:schemeClr val="tx1"/>
+          </a:solidFill>
+          <a:latin typeface="+mn-lt"/>
+          <a:ea typeface="+mn-ea"/>
+          <a:cs typeface="+mn-cs"/>
+        </a:defRPr>
+      </a:lvl4pPr>
+      <a:lvl5pPr marL="2057400" indent="-228600" algn="l" defTabSz="914400" rtl="0" eaLnBrk="1" latinLnBrk="0" hangingPunct="1">
+        <a:lnSpc>
+          <a:spcPct val="90000"/>
+        </a:lnSpc>
+        <a:spcBef>
+          <a:spcPts val="500"/>
+        </a:spcBef>
+        <a:buFont typeface="Arial" panose="020B0604020202020204" pitchFamily="34" charset="0"/>
+        <a:buChar char="•"/>
+        <a:defRPr sz="1800" kern="1200">
+          <a:solidFill>
+            <a:schemeClr val="tx1"/>
+          </a:solidFill>
+          <a:latin typeface="+mn-lt"/>
+          <a:ea typeface="+mn-ea"/>
+          <a:cs typeface="+mn-cs"/>
+        </a:defRPr>
+      </a:lvl5pPr>
+      <a:lvl6pPr marL="2514600" indent="-228600" algn="l" defTabSz="914400" rtl="0" eaLnBrk="1" latinLnBrk="0" hangingPunct="1">
+        <a:lnSpc>
+          <a:spcPct val="90000"/>
+        </a:lnSpc>
+        <a:spcBef>
+          <a:spcPts val="500"/>
+        </a:spcBef>
+        <a:buFont typeface="Arial" panose="020B0604020202020204" pitchFamily="34" charset="0"/>
+        <a:buChar char="•"/>
+        <a:defRPr sz="1800" kern="1200">
+          <a:solidFill>
+            <a:schemeClr val="tx1"/>
+          </a:solidFill>
+          <a:latin typeface="+mn-lt"/>
+          <a:ea typeface="+mn-ea"/>
+          <a:cs typeface="+mn-cs"/>
+        </a:defRPr>
+      </a:lvl6pPr>
+      <a:lvl7pPr marL="2971800" indent="-228600" algn="l" defTabSz="914400" rtl="0" eaLnBrk="1" latinLnBrk="0" hangingPunct="1">
+        <a:lnSpc>
+          <a:spcPct val="90000"/>
+        </a:lnSpc>
+        <a:spcBef>
+          <a:spcPts val="500"/>
+        </a:spcBef>
+        <a:buFont typeface="Arial" panose="020B0604020202020204" pitchFamily="34" charset="0"/>
+        <a:buChar char="•"/>
+        <a:defRPr sz="1800" kern="1200">
+          <a:solidFill>
+            <a:schemeClr val="tx1"/>
+          </a:solidFill>
+          <a:latin typeface="+mn-lt"/>
+          <a:ea typeface="+mn-ea"/>
+          <a:cs typeface="+mn-cs"/>
+        </a:defRPr>
+      </a:lvl7pPr>
+      <a:lvl8pPr marL="3429000" indent="-228600" algn="l" defTabSz="914400" rtl="0" eaLnBrk="1" latinLnBrk="0" hangingPunct="1">
+        <a:lnSpc>
+          <a:spcPct val="90000"/>
+        </a:lnSpc>
+        <a:spcBef>
+          <a:spcPts val="500"/>
+        </a:spcBef>
+        <a:buFont typeface="Arial" panose="020B0604020202020204" pitchFamily="34" charset="0"/>
+        <a:buChar char="•"/>
+        <a:defRPr sz="1800" kern="1200">
+          <a:solidFill>
+            <a:schemeClr val="tx1"/>
+          </a:solidFill>
+          <a:latin typeface="+mn-lt"/>
+          <a:ea typeface="+mn-ea"/>
+          <a:cs typeface="+mn-cs"/>
+        </a:defRPr>
+      </a:lvl8pPr>
+      <a:lvl9pPr marL="3886200" indent="-228600" algn="l" defTabSz="914400" rtl="0" eaLnBrk="1" latinLnBrk="0" hangingPunct="1">
+        <a:lnSpc>
+          <a:spcPct val="90000"/>
+        </a:lnSpc>
+        <a:spcBef>
+          <a:spcPts val="500"/>
+        </a:spcBef>
+        <a:buFont typeface="Arial" panose="020B0604020202020204" pitchFamily="34" charset="0"/>
+        <a:buChar char="•"/>
+        <a:defRPr sz="1800" kern="1200">
+          <a:solidFill>
+            <a:schemeClr val="tx1"/>
+          </a:solidFill>
+          <a:latin typeface="+mn-lt"/>
+          <a:ea typeface="+mn-ea"/>
+          <a:cs typeface="+mn-cs"/>
+        </a:defRPr>
+      </a:lvl9pPr>
+    </p:bodyStyle>
+    <p:otherStyle>
+      <a:defPPr>
+        <a:defRPr lang="en-US"/>
+      </a:defPPr>
+      <a:lvl1pPr marL="0" algn="l" defTabSz="914400" rtl="0" eaLnBrk="1" latinLnBrk="0" hangingPunct="1">
+        <a:defRPr sz="1800" kern="1200">
+          <a:solidFill>
+            <a:schemeClr val="tx1"/>
+          </a:solidFill>
+          <a:latin typeface="+mn-lt"/>
+          <a:ea typeface="+mn-ea"/>
+          <a:cs typeface="+mn-cs"/>
+        </a:defRPr>
+      </a:lvl1pPr>
+      <a:lvl2pPr marL="457200" algn="l" defTabSz="914400" rtl="0" eaLnBrk="1" latinLnBrk="0" hangingPunct="1">
+        <a:defRPr sz="1800" kern="1200">
+          <a:solidFill>
+            <a:schemeClr val="tx1"/>
+          </a:solidFill>
+          <a:latin typeface="+mn-lt"/>
+          <a:ea typeface="+mn-ea"/>
+          <a:cs typeface="+mn-cs"/>
+        </a:defRPr>
+      </a:lvl2pPr>
+      <a:lvl3pPr marL="914400" algn="l" defTabSz="914400" rtl="0" eaLnBrk="1" latinLnBrk="0" hangingPunct="1">
+        <a:defRPr sz="1800" kern="1200">
+          <a:solidFill>
+            <a:schemeClr val="tx1"/>
+          </a:solidFill>
+          <a:latin typeface="+mn-lt"/>
+          <a:ea typeface="+mn-ea"/>
+          <a:cs typeface="+mn-cs"/>
+        </a:defRPr>
+      </a:lvl3pPr>
+      <a:lvl4pPr marL="1371600" algn="l" defTabSz="914400" rtl="0" eaLnBrk="1" latinLnBrk="0" hangingPunct="1">
+        <a:defRPr sz="1800" kern="1200">
+          <a:solidFill>
+            <a:schemeClr val="tx1"/>
+          </a:solidFill>
+          <a:latin typeface="+mn-lt"/>
+          <a:ea typeface="+mn-ea"/>
+          <a:cs typeface="+mn-cs"/>
+        </a:defRPr>
+      </a:lvl4pPr>
+      <a:lvl5pPr marL="1828800" algn="l" defTabSz="914400" rtl="0" eaLnBrk="1" latinLnBrk="0" hangingPunct="1">
+        <a:defRPr sz="1800" kern="1200">
+          <a:solidFill>
+            <a:schemeClr val="tx1"/>
+          </a:solidFill>
+          <a:latin typeface="+mn-lt"/>
+          <a:ea typeface="+mn-ea"/>
+          <a:cs typeface="+mn-cs"/>
+        </a:defRPr>
+      </a:lvl5pPr>
+      <a:lvl6pPr marL="2286000" algn="l" defTabSz="914400" rtl="0" eaLnBrk="1" latinLnBrk="0" hangingPunct="1">
+        <a:defRPr sz="1800" kern="1200">
+          <a:solidFill>
+            <a:schemeClr val="tx1"/>
+          </a:solidFill>
+          <a:latin typeface="+mn-lt"/>
+          <a:ea typeface="+mn-ea"/>
+          <a:cs typeface="+mn-cs"/>
+        </a:defRPr>
+      </a:lvl6pPr>
+      <a:lvl7pPr marL="2743200" algn="l" defTabSz="914400" rtl="0" eaLnBrk="1" latinLnBrk="0" hangingPunct="1">
+        <a:defRPr sz="1800" kern="1200">
+          <a:solidFill>
+            <a:schemeClr val="tx1"/>
+          </a:solidFill>
+          <a:latin typeface="+mn-lt"/>
+          <a:ea typeface="+mn-ea"/>
+          <a:cs typeface="+mn-cs"/>
+        </a:defRPr>
+      </a:lvl7pPr>
+      <a:lvl8pPr marL="3200400" algn="l" defTabSz="914400" rtl="0" eaLnBrk="1" latinLnBrk="0" hangingPunct="1">
+        <a:defRPr sz="1800" kern="1200">
+          <a:solidFill>
+            <a:schemeClr val="tx1"/>
+          </a:solidFill>
+          <a:latin typeface="+mn-lt"/>
+          <a:ea typeface="+mn-ea"/>
+          <a:cs typeface="+mn-cs"/>
+        </a:defRPr>
+      </a:lvl8pPr>
+      <a:lvl9pPr marL="3657600" algn="l" defTabSz="914400" rtl="0" eaLnBrk="1" latinLnBrk="0" hangingPunct="1">
+        <a:defRPr sz="1800" kern="1200">
+          <a:solidFill>
+            <a:schemeClr val="tx1"/>
+          </a:solidFill>
+          <a:latin typeface="+mn-lt"/>
+          <a:ea typeface="+mn-ea"/>
+          <a:cs typeface="+mn-cs"/>
+        </a:defRPr>
+      </a:lvl9pPr>
+    </p:otherStyle>
+  </p:txStyles>
+</p:sldMaster>
+</file>
+
 <file path=ppt/slides/slide1.xml><?xml version="1.0" encoding="utf-8"?>
 <p:sld xmlns:a="http://schemas.openxmlformats.org/drawingml/2006/main" xmlns:r="http://schemas.openxmlformats.org/officeDocument/2006/relationships" xmlns:p="http://schemas.openxmlformats.org/presentationml/2006/main">
   <p:cSld>
@@ -5185,6 +6694,986 @@
     <p:extLst>
       <p:ext uri="{BB962C8B-B14F-4D97-AF65-F5344CB8AC3E}">
         <p14:creationId xmlns:p14="http://schemas.microsoft.com/office/powerpoint/2010/main" val="596326689"/>
+      </p:ext>
+    </p:extLst>
+  </p:cSld>
+  <p:clrMapOvr>
+    <a:masterClrMapping/>
+  </p:clrMapOvr>
+</p:sld>
+</file>
+
+<file path=ppt/slides/slide13.xml><?xml version="1.0" encoding="utf-8"?>
+<p:sld xmlns:a="http://schemas.openxmlformats.org/drawingml/2006/main" xmlns:r="http://schemas.openxmlformats.org/officeDocument/2006/relationships" xmlns:p="http://schemas.openxmlformats.org/presentationml/2006/main">
+  <p:cSld>
+    <p:spTree>
+      <p:nvGrpSpPr>
+        <p:cNvPr id="1" name=""/>
+        <p:cNvGrpSpPr/>
+        <p:nvPr/>
+      </p:nvGrpSpPr>
+      <p:grpSpPr>
+        <a:xfrm>
+          <a:off x="0" y="0"/>
+          <a:ext cx="0" cy="0"/>
+          <a:chOff x="0" y="0"/>
+          <a:chExt cx="0" cy="0"/>
+        </a:xfrm>
+      </p:grpSpPr>
+      <p:sp>
+        <p:nvSpPr>
+          <p:cNvPr id="4" name="Slide Number Placeholder 3">
+            <a:extLst>
+              <a:ext uri="{FF2B5EF4-FFF2-40B4-BE49-F238E27FC236}">
+                <a16:creationId xmlns:a16="http://schemas.microsoft.com/office/drawing/2014/main" id="{7CF73C67-6A8A-5856-CE07-81FF7A124167}"/>
+              </a:ext>
+            </a:extLst>
+          </p:cNvPr>
+          <p:cNvSpPr>
+            <a:spLocks noGrp="1"/>
+          </p:cNvSpPr>
+          <p:nvPr>
+            <p:ph type="sldNum" sz="quarter" idx="12"/>
+          </p:nvPr>
+        </p:nvSpPr>
+        <p:spPr/>
+        <p:txBody>
+          <a:bodyPr/>
+          <a:lstStyle/>
+          <a:p>
+            <a:fld id="{DCB96425-C66E-449F-8335-3FF27AC80FA3}" type="slidenum">
+              <a:rPr lang="en-US" smtClean="0"/>
+              <a:t>13</a:t>
+            </a:fld>
+            <a:endParaRPr lang="en-US"/>
+          </a:p>
+        </p:txBody>
+      </p:sp>
+      <p:sp>
+        <p:nvSpPr>
+          <p:cNvPr id="5" name="Title">
+            <a:extLst>
+              <a:ext uri="{FF2B5EF4-FFF2-40B4-BE49-F238E27FC236}">
+                <a16:creationId xmlns:a16="http://schemas.microsoft.com/office/drawing/2014/main" id="{34958500-4107-66AD-9E57-FD96394F86E1}"/>
+              </a:ext>
+            </a:extLst>
+          </p:cNvPr>
+          <p:cNvSpPr txBox="1"/>
+          <p:nvPr/>
+        </p:nvSpPr>
+        <p:spPr>
+          <a:xfrm>
+            <a:off x="0" y="304800"/>
+            <a:ext cx="12192000" cy="523220"/>
+          </a:xfrm>
+          <a:prstGeom prst="rect">
+            <a:avLst/>
+          </a:prstGeom>
+          <a:noFill/>
+        </p:spPr>
+        <p:txBody>
+          <a:bodyPr vert="horz" rtlCol="0">
+            <a:spAutoFit/>
+          </a:bodyPr>
+          <a:lstStyle/>
+          <a:p>
+            <a:pPr algn="ctr" rtl="1"/>
+            <a:r>
+              <a:rPr lang="ar-EG" sz="2800"/>
+              <a:t>خلايا مدمجة</a:t>
+            </a:r>
+            <a:endParaRPr lang="en-US" sz="2800"/>
+          </a:p>
+        </p:txBody>
+      </p:sp>
+      <p:graphicFrame>
+        <p:nvGraphicFramePr>
+          <p:cNvPr id="2" name="Merged cells">
+            <a:extLst>
+              <a:ext uri="{FF2B5EF4-FFF2-40B4-BE49-F238E27FC236}">
+                <a16:creationId xmlns:a16="http://schemas.microsoft.com/office/drawing/2014/main" id="{AE1598A0-8E6D-5F0B-76FF-1530671F5E8F}"/>
+              </a:ext>
+            </a:extLst>
+          </p:cNvPr>
+          <p:cNvGraphicFramePr>
+            <a:graphicFrameLocks noGrp="1"/>
+          </p:cNvGraphicFramePr>
+          <p:nvPr>
+            <p:extLst>
+              <p:ext uri="{D42A27DB-BD31-4B8C-83A1-F6EECF244321}">
+                <p14:modId xmlns:p14="http://schemas.microsoft.com/office/powerpoint/2010/main" val="4144017258"/>
+              </p:ext>
+            </p:extLst>
+          </p:nvPr>
+        </p:nvGraphicFramePr>
+        <p:xfrm>
+          <a:off x="762000" y="1651000"/>
+          <a:ext cx="10668000" cy="3302000"/>
+        </p:xfrm>
+        <a:graphic>
+          <a:graphicData uri="http://schemas.openxmlformats.org/drawingml/2006/table">
+            <a:tbl>
+              <a:tblPr firstRow="1" bandRow="1">
+                <a:tableStyleId>{5C22544A-7EE6-4342-B048-85BDC9FD1C3A}</a:tableStyleId>
+              </a:tblPr>
+              <a:tblGrid>
+                <a:gridCol w="2667000">
+                  <a:extLst>
+                    <a:ext uri="{9D8B030D-6E8A-4147-A177-3AD203B41FA5}">
+                      <a16:colId xmlns:a16="http://schemas.microsoft.com/office/drawing/2014/main" val="1604742891"/>
+                    </a:ext>
+                  </a:extLst>
+                </a:gridCol>
+                <a:gridCol w="2667000">
+                  <a:extLst>
+                    <a:ext uri="{9D8B030D-6E8A-4147-A177-3AD203B41FA5}">
+                      <a16:colId xmlns:a16="http://schemas.microsoft.com/office/drawing/2014/main" val="3722589525"/>
+                    </a:ext>
+                  </a:extLst>
+                </a:gridCol>
+                <a:gridCol w="2667000">
+                  <a:extLst>
+                    <a:ext uri="{9D8B030D-6E8A-4147-A177-3AD203B41FA5}">
+                      <a16:colId xmlns:a16="http://schemas.microsoft.com/office/drawing/2014/main" val="1829845810"/>
+                    </a:ext>
+                  </a:extLst>
+                </a:gridCol>
+                <a:gridCol w="2667000">
+                  <a:extLst>
+                    <a:ext uri="{9D8B030D-6E8A-4147-A177-3AD203B41FA5}">
+                      <a16:colId xmlns:a16="http://schemas.microsoft.com/office/drawing/2014/main" val="3177147476"/>
+                    </a:ext>
+                  </a:extLst>
+                </a:gridCol>
+              </a:tblGrid>
+              <a:tr h="825500">
+                <a:tc gridSpan="2">
+                  <a:txBody>
+                    <a:bodyPr/>
+                    <a:lstStyle/>
+                    <a:p>
+                      <a:r>
+                        <a:rPr lang="ar-EG"/>
+                        <a:t>العنوان المدمج</a:t>
+                      </a:r>
+                      <a:endParaRPr lang="en-US"/>
+                    </a:p>
+                  </a:txBody>
+                  <a:tcPr/>
+                </a:tc>
+                <a:tc hMerge="1">
+                  <a:txBody>
+                    <a:bodyPr/>
+                    <a:lstStyle/>
+                    <a:p>
+                      <a:endParaRPr lang="en-US"/>
+                    </a:p>
+                  </a:txBody>
+                  <a:tcPr/>
+                </a:tc>
+                <a:tc>
+                  <a:txBody>
+                    <a:bodyPr/>
+                    <a:lstStyle/>
+                    <a:p>
+                      <a:r>
+                        <a:rPr lang="ar-EG"/>
+                        <a:t>الحالة</a:t>
+                      </a:r>
+                      <a:endParaRPr lang="en-US"/>
+                    </a:p>
+                  </a:txBody>
+                  <a:tcPr/>
+                </a:tc>
+                <a:tc>
+                  <a:txBody>
+                    <a:bodyPr/>
+                    <a:lstStyle/>
+                    <a:p>
+                      <a:r>
+                        <a:rPr lang="ar-EG"/>
+                        <a:t>المبلغ</a:t>
+                      </a:r>
+                      <a:endParaRPr lang="en-US"/>
+                    </a:p>
+                  </a:txBody>
+                  <a:tcPr/>
+                </a:tc>
+                <a:extLst>
+                  <a:ext uri="{0D108BD9-81ED-4DB2-BD59-A6C34878D82A}">
+                    <a16:rowId xmlns:a16="http://schemas.microsoft.com/office/drawing/2014/main" val="148934365"/>
+                  </a:ext>
+                </a:extLst>
+              </a:tr>
+              <a:tr h="825500">
+                <a:tc>
+                  <a:txBody>
+                    <a:bodyPr/>
+                    <a:lstStyle/>
+                    <a:p>
+                      <a:r>
+                        <a:rPr lang="ar-EG"/>
+                        <a:t>التصوير</a:t>
+                      </a:r>
+                      <a:endParaRPr lang="en-US"/>
+                    </a:p>
+                  </a:txBody>
+                  <a:tcPr/>
+                </a:tc>
+                <a:tc>
+                  <a:txBody>
+                    <a:bodyPr/>
+                    <a:lstStyle/>
+                    <a:p>
+                      <a:r>
+                        <a:rPr lang="en-US"/>
+                        <a:t>٣</a:t>
+                      </a:r>
+                    </a:p>
+                  </a:txBody>
+                  <a:tcPr/>
+                </a:tc>
+                <a:tc rowSpan="2">
+                  <a:txBody>
+                    <a:bodyPr/>
+                    <a:lstStyle/>
+                    <a:p>
+                      <a:r>
+                        <a:rPr lang="ar-EG"/>
+                        <a:t>جارٍ</a:t>
+                      </a:r>
+                      <a:endParaRPr lang="en-US"/>
+                    </a:p>
+                  </a:txBody>
+                  <a:tcPr/>
+                </a:tc>
+                <a:tc>
+                  <a:txBody>
+                    <a:bodyPr/>
+                    <a:lstStyle/>
+                    <a:p>
+                      <a:r>
+                        <a:rPr lang="en-US"/>
+                        <a:t>٤٠</a:t>
+                      </a:r>
+                    </a:p>
+                  </a:txBody>
+                  <a:tcPr/>
+                </a:tc>
+                <a:extLst>
+                  <a:ext uri="{0D108BD9-81ED-4DB2-BD59-A6C34878D82A}">
+                    <a16:rowId xmlns:a16="http://schemas.microsoft.com/office/drawing/2014/main" val="2271396686"/>
+                  </a:ext>
+                </a:extLst>
+              </a:tr>
+              <a:tr h="825500">
+                <a:tc>
+                  <a:txBody>
+                    <a:bodyPr/>
+                    <a:lstStyle/>
+                    <a:p>
+                      <a:r>
+                        <a:rPr lang="ar-EG"/>
+                        <a:t>المونتاج</a:t>
+                      </a:r>
+                      <a:endParaRPr lang="en-US"/>
+                    </a:p>
+                  </a:txBody>
+                  <a:tcPr/>
+                </a:tc>
+                <a:tc>
+                  <a:txBody>
+                    <a:bodyPr/>
+                    <a:lstStyle/>
+                    <a:p>
+                      <a:r>
+                        <a:rPr lang="en-US"/>
+                        <a:t>٢</a:t>
+                      </a:r>
+                    </a:p>
+                  </a:txBody>
+                  <a:tcPr/>
+                </a:tc>
+                <a:tc vMerge="1">
+                  <a:txBody>
+                    <a:bodyPr/>
+                    <a:lstStyle/>
+                    <a:p>
+                      <a:endParaRPr lang="en-US"/>
+                    </a:p>
+                  </a:txBody>
+                  <a:tcPr/>
+                </a:tc>
+                <a:tc>
+                  <a:txBody>
+                    <a:bodyPr/>
+                    <a:lstStyle/>
+                    <a:p>
+                      <a:r>
+                        <a:rPr lang="en-US"/>
+                        <a:t>٣٠</a:t>
+                      </a:r>
+                    </a:p>
+                  </a:txBody>
+                  <a:tcPr/>
+                </a:tc>
+                <a:extLst>
+                  <a:ext uri="{0D108BD9-81ED-4DB2-BD59-A6C34878D82A}">
+                    <a16:rowId xmlns:a16="http://schemas.microsoft.com/office/drawing/2014/main" val="1854552322"/>
+                  </a:ext>
+                </a:extLst>
+              </a:tr>
+              <a:tr h="825500">
+                <a:tc>
+                  <a:txBody>
+                    <a:bodyPr/>
+                    <a:lstStyle/>
+                    <a:p>
+                      <a:r>
+                        <a:rPr lang="ar-EG"/>
+                        <a:t>الصوت</a:t>
+                      </a:r>
+                      <a:endParaRPr lang="en-US"/>
+                    </a:p>
+                  </a:txBody>
+                  <a:tcPr/>
+                </a:tc>
+                <a:tc>
+                  <a:txBody>
+                    <a:bodyPr/>
+                    <a:lstStyle/>
+                    <a:p>
+                      <a:r>
+                        <a:rPr lang="en-US"/>
+                        <a:t>١</a:t>
+                      </a:r>
+                    </a:p>
+                  </a:txBody>
+                  <a:tcPr/>
+                </a:tc>
+                <a:tc>
+                  <a:txBody>
+                    <a:bodyPr/>
+                    <a:lstStyle/>
+                    <a:p>
+                      <a:r>
+                        <a:rPr lang="ar-EG"/>
+                        <a:t>تم</a:t>
+                      </a:r>
+                      <a:endParaRPr lang="en-US"/>
+                    </a:p>
+                  </a:txBody>
+                  <a:tcPr/>
+                </a:tc>
+                <a:tc>
+                  <a:txBody>
+                    <a:bodyPr/>
+                    <a:lstStyle/>
+                    <a:p>
+                      <a:r>
+                        <a:rPr lang="en-US"/>
+                        <a:t>٢٠</a:t>
+                      </a:r>
+                    </a:p>
+                  </a:txBody>
+                  <a:tcPr/>
+                </a:tc>
+                <a:extLst>
+                  <a:ext uri="{0D108BD9-81ED-4DB2-BD59-A6C34878D82A}">
+                    <a16:rowId xmlns:a16="http://schemas.microsoft.com/office/drawing/2014/main" val="219908762"/>
+                  </a:ext>
+                </a:extLst>
+              </a:tr>
+            </a:tbl>
+          </a:graphicData>
+        </a:graphic>
+      </p:graphicFrame>
+    </p:spTree>
+    <p:extLst>
+      <p:ext uri="{BB962C8B-B14F-4D97-AF65-F5344CB8AC3E}">
+        <p14:creationId xmlns:p14="http://schemas.microsoft.com/office/powerpoint/2010/main" val="379884370"/>
+      </p:ext>
+    </p:extLst>
+  </p:cSld>
+  <p:clrMapOvr>
+    <a:masterClrMapping/>
+  </p:clrMapOvr>
+</p:sld>
+</file>
+
+<file path=ppt/slides/slide14.xml><?xml version="1.0" encoding="utf-8"?>
+<p:sld xmlns:a="http://schemas.openxmlformats.org/drawingml/2006/main" xmlns:r="http://schemas.openxmlformats.org/officeDocument/2006/relationships" xmlns:p="http://schemas.openxmlformats.org/presentationml/2006/main">
+  <p:cSld>
+    <p:spTree>
+      <p:nvGrpSpPr>
+        <p:cNvPr id="1" name=""/>
+        <p:cNvGrpSpPr/>
+        <p:nvPr/>
+      </p:nvGrpSpPr>
+      <p:grpSpPr>
+        <a:xfrm>
+          <a:off x="0" y="0"/>
+          <a:ext cx="0" cy="0"/>
+          <a:chOff x="0" y="0"/>
+          <a:chExt cx="0" cy="0"/>
+        </a:xfrm>
+      </p:grpSpPr>
+      <p:sp>
+        <p:nvSpPr>
+          <p:cNvPr id="2" name="Title 1">
+            <a:extLst>
+              <a:ext uri="{FF2B5EF4-FFF2-40B4-BE49-F238E27FC236}">
+                <a16:creationId xmlns:a16="http://schemas.microsoft.com/office/drawing/2014/main" id="{82C31481-920F-16EE-8F2C-E3D3E438664F}"/>
+              </a:ext>
+            </a:extLst>
+          </p:cNvPr>
+          <p:cNvSpPr>
+            <a:spLocks noGrp="1"/>
+          </p:cNvSpPr>
+          <p:nvPr>
+            <p:ph type="title"/>
+          </p:nvPr>
+        </p:nvSpPr>
+        <p:spPr/>
+        <p:txBody>
+          <a:bodyPr/>
+          <a:lstStyle/>
+          <a:p>
+            <a:r>
+              <a:rPr lang="ar-EG"/>
+              <a:t>الشلال: الميزانية</a:t>
+            </a:r>
+            <a:endParaRPr lang="en-US"/>
+          </a:p>
+        </p:txBody>
+      </p:sp>
+      <p:sp>
+        <p:nvSpPr>
+          <p:cNvPr id="3" name="Content Placeholder 2">
+            <a:extLst>
+              <a:ext uri="{FF2B5EF4-FFF2-40B4-BE49-F238E27FC236}">
+                <a16:creationId xmlns:a16="http://schemas.microsoft.com/office/drawing/2014/main" id="{FAA40049-449A-0FE1-2FA9-5518F226F93B}"/>
+              </a:ext>
+            </a:extLst>
+          </p:cNvPr>
+          <p:cNvSpPr>
+            <a:spLocks noGrp="1"/>
+          </p:cNvSpPr>
+          <p:nvPr>
+            <p:ph idx="1"/>
+          </p:nvPr>
+        </p:nvSpPr>
+        <p:spPr/>
+        <p:txBody>
+          <a:bodyPr/>
+          <a:lstStyle/>
+          <a:p>
+            <a:endParaRPr lang="en-US"/>
+          </a:p>
+        </p:txBody>
+      </p:sp>
+      <p:sp>
+        <p:nvSpPr>
+          <p:cNvPr id="4" name="Slide Number Placeholder 3">
+            <a:extLst>
+              <a:ext uri="{FF2B5EF4-FFF2-40B4-BE49-F238E27FC236}">
+                <a16:creationId xmlns:a16="http://schemas.microsoft.com/office/drawing/2014/main" id="{BE6F8DE4-C774-EA08-E8C7-F6F1E63C14F2}"/>
+              </a:ext>
+            </a:extLst>
+          </p:cNvPr>
+          <p:cNvSpPr>
+            <a:spLocks noGrp="1"/>
+          </p:cNvSpPr>
+          <p:nvPr>
+            <p:ph type="sldNum" sz="quarter" idx="12"/>
+          </p:nvPr>
+        </p:nvSpPr>
+        <p:spPr/>
+        <p:txBody>
+          <a:bodyPr/>
+          <a:lstStyle/>
+          <a:p>
+            <a:fld id="{DCB96425-C66E-449F-8335-3FF27AC80FA3}" type="slidenum">
+              <a:rPr lang="en-US" smtClean="0"/>
+              <a:t>14</a:t>
+            </a:fld>
+            <a:endParaRPr lang="en-US"/>
+          </a:p>
+        </p:txBody>
+      </p:sp>
+      <mc:AlternateContent xmlns:mc="http://schemas.openxmlformats.org/markup-compatibility/2006" xmlns:cx1="http://schemas.microsoft.com/office/drawing/2015/9/8/chartex">
+        <mc:Choice Requires="cx1">
+          <p:graphicFrame>
+            <p:nvGraphicFramePr>
+              <p:cNvPr id="5" name="Waterfall">
+                <a:extLst>
+                  <a:ext uri="{FF2B5EF4-FFF2-40B4-BE49-F238E27FC236}">
+                    <a16:creationId xmlns:a16="http://schemas.microsoft.com/office/drawing/2014/main" id="{4D78685F-76BC-638B-33C2-757D774A6E75}"/>
+                  </a:ext>
+                </a:extLst>
+              </p:cNvPr>
+              <p:cNvGraphicFramePr/>
+              <p:nvPr>
+                <p:extLst>
+                  <p:ext uri="{D42A27DB-BD31-4B8C-83A1-F6EECF244321}">
+                    <p14:modId xmlns:p14="http://schemas.microsoft.com/office/powerpoint/2010/main" val="326830524"/>
+                  </p:ext>
+                </p:extLst>
+              </p:nvPr>
+            </p:nvGraphicFramePr>
+            <p:xfrm>
+              <a:off x="1016000" y="1651000"/>
+              <a:ext cx="10160000" cy="4318000"/>
+            </p:xfrm>
+            <a:graphic>
+              <a:graphicData uri="http://schemas.microsoft.com/office/drawing/2014/chartex">
+                <cx:chart xmlns:cx="http://schemas.microsoft.com/office/drawing/2014/chartex" xmlns:r="http://schemas.openxmlformats.org/officeDocument/2006/relationships" r:id="rId2"/>
+              </a:graphicData>
+            </a:graphic>
+          </p:graphicFrame>
+        </mc:Choice>
+        <mc:Fallback xmlns="">
+          <p:pic>
+            <p:nvPicPr>
+              <p:cNvPr id="5" name="Waterfall">
+                <a:extLst>
+                  <a:ext uri="{FF2B5EF4-FFF2-40B4-BE49-F238E27FC236}">
+                    <a16:creationId xmlns:a16="http://schemas.microsoft.com/office/drawing/2014/main" id="{4D78685F-76BC-638B-33C2-757D774A6E75}"/>
+                  </a:ext>
+                </a:extLst>
+              </p:cNvPr>
+              <p:cNvPicPr>
+                <a:picLocks noGrp="1" noRot="1" noChangeAspect="1" noMove="1" noResize="1" noEditPoints="1" noAdjustHandles="1" noChangeArrowheads="1" noChangeShapeType="1"/>
+              </p:cNvPicPr>
+              <p:nvPr/>
+            </p:nvPicPr>
+            <p:blipFill>
+              <a:blip r:embed="rId3"/>
+              <a:stretch>
+                <a:fillRect/>
+              </a:stretch>
+            </p:blipFill>
+            <p:spPr>
+              <a:xfrm>
+                <a:off x="1016000" y="1651000"/>
+                <a:ext cx="10160000" cy="4318000"/>
+              </a:xfrm>
+              <a:prstGeom prst="rect">
+                <a:avLst/>
+              </a:prstGeom>
+            </p:spPr>
+          </p:pic>
+        </mc:Fallback>
+      </mc:AlternateContent>
+    </p:spTree>
+    <p:extLst>
+      <p:ext uri="{BB962C8B-B14F-4D97-AF65-F5344CB8AC3E}">
+        <p14:creationId xmlns:p14="http://schemas.microsoft.com/office/powerpoint/2010/main" val="3749411348"/>
+      </p:ext>
+    </p:extLst>
+  </p:cSld>
+  <p:clrMapOvr>
+    <a:masterClrMapping/>
+  </p:clrMapOvr>
+</p:sld>
+</file>
+
+<file path=ppt/slides/slide15.xml><?xml version="1.0" encoding="utf-8"?>
+<p:sld xmlns:a="http://schemas.openxmlformats.org/drawingml/2006/main" xmlns:r="http://schemas.openxmlformats.org/officeDocument/2006/relationships" xmlns:p="http://schemas.openxmlformats.org/presentationml/2006/main">
+  <p:cSld>
+    <p:spTree>
+      <p:nvGrpSpPr>
+        <p:cNvPr id="1" name=""/>
+        <p:cNvGrpSpPr/>
+        <p:nvPr/>
+      </p:nvGrpSpPr>
+      <p:grpSpPr>
+        <a:xfrm>
+          <a:off x="0" y="0"/>
+          <a:ext cx="0" cy="0"/>
+          <a:chOff x="0" y="0"/>
+          <a:chExt cx="0" cy="0"/>
+        </a:xfrm>
+      </p:grpSpPr>
+      <p:sp>
+        <p:nvSpPr>
+          <p:cNvPr id="2" name="Title">
+            <a:extLst>
+              <a:ext uri="{FF2B5EF4-FFF2-40B4-BE49-F238E27FC236}">
+                <a16:creationId xmlns:a16="http://schemas.microsoft.com/office/drawing/2014/main" id="{772041BC-3873-0E2D-B108-BBFB268BFD3C}"/>
+              </a:ext>
+            </a:extLst>
+          </p:cNvPr>
+          <p:cNvSpPr>
+            <a:spLocks noGrp="1"/>
+          </p:cNvSpPr>
+          <p:nvPr>
+            <p:ph type="title"/>
+          </p:nvPr>
+        </p:nvSpPr>
+        <p:spPr/>
+        <p:txBody>
+          <a:bodyPr/>
+          <a:lstStyle/>
+          <a:p>
+            <a:r>
+              <a:rPr lang="ar-EG"/>
+              <a:t>شريحة على التخطيط أ</a:t>
+            </a:r>
+            <a:endParaRPr lang="en-US"/>
+          </a:p>
+        </p:txBody>
+      </p:sp>
+      <p:sp>
+        <p:nvSpPr>
+          <p:cNvPr id="3" name="Slide Number Placeholder 2">
+            <a:extLst>
+              <a:ext uri="{FF2B5EF4-FFF2-40B4-BE49-F238E27FC236}">
+                <a16:creationId xmlns:a16="http://schemas.microsoft.com/office/drawing/2014/main" id="{F48BB6BF-0F43-B3BB-9726-9E24AF4AF1F2}"/>
+              </a:ext>
+            </a:extLst>
+          </p:cNvPr>
+          <p:cNvSpPr>
+            <a:spLocks noGrp="1"/>
+          </p:cNvSpPr>
+          <p:nvPr>
+            <p:ph type="sldNum" sz="quarter" idx="12"/>
+          </p:nvPr>
+        </p:nvSpPr>
+        <p:spPr/>
+        <p:txBody>
+          <a:bodyPr/>
+          <a:lstStyle/>
+          <a:p>
+            <a:fld id="{C6DDDF4F-F028-4B81-B3D4-6037FCFC1593}" type="slidenum">
+              <a:rPr lang="en-US" smtClean="0"/>
+              <a:t>15</a:t>
+            </a:fld>
+            <a:endParaRPr lang="en-US"/>
+          </a:p>
+        </p:txBody>
+      </p:sp>
+      <p:sp>
+        <p:nvSpPr>
+          <p:cNvPr id="4" name="Accent box">
+            <a:extLst>
+              <a:ext uri="{FF2B5EF4-FFF2-40B4-BE49-F238E27FC236}">
+                <a16:creationId xmlns:a16="http://schemas.microsoft.com/office/drawing/2014/main" id="{8BC34ECF-89BB-4E09-C605-80FA1413755F}"/>
+              </a:ext>
+            </a:extLst>
+          </p:cNvPr>
+          <p:cNvSpPr/>
+          <p:nvPr/>
+        </p:nvSpPr>
+        <p:spPr>
+          <a:xfrm>
+            <a:off x="762000" y="3302000"/>
+            <a:ext cx="3048000" cy="762000"/>
+          </a:xfrm>
+          <a:prstGeom prst="rect">
+            <a:avLst/>
+          </a:prstGeom>
+          <a:solidFill>
+            <a:schemeClr val="accent1"/>
+          </a:solidFill>
+        </p:spPr>
+        <p:style>
+          <a:lnRef idx="2">
+            <a:schemeClr val="accent1">
+              <a:shade val="15000"/>
+            </a:schemeClr>
+          </a:lnRef>
+          <a:fillRef idx="1">
+            <a:schemeClr val="accent1"/>
+          </a:fillRef>
+          <a:effectRef idx="0">
+            <a:schemeClr val="accent1"/>
+          </a:effectRef>
+          <a:fontRef idx="minor">
+            <a:schemeClr val="lt1"/>
+          </a:fontRef>
+        </p:style>
+        <p:txBody>
+          <a:bodyPr rtlCol="0" anchor="ctr"/>
+          <a:lstStyle/>
+          <a:p>
+            <a:pPr algn="ctr"/>
+            <a:r>
+              <a:rPr lang="ar-EG"/>
+              <a:t>لون التمييز الأول</a:t>
+            </a:r>
+            <a:endParaRPr lang="en-US"/>
+          </a:p>
+        </p:txBody>
+      </p:sp>
+    </p:spTree>
+    <p:extLst>
+      <p:ext uri="{BB962C8B-B14F-4D97-AF65-F5344CB8AC3E}">
+        <p14:creationId xmlns:p14="http://schemas.microsoft.com/office/powerpoint/2010/main" val="4226322720"/>
+      </p:ext>
+    </p:extLst>
+  </p:cSld>
+  <p:clrMapOvr>
+    <a:masterClrMapping/>
+  </p:clrMapOvr>
+</p:sld>
+</file>
+
+<file path=ppt/slides/slide16.xml><?xml version="1.0" encoding="utf-8"?>
+<p:sld xmlns:a="http://schemas.openxmlformats.org/drawingml/2006/main" xmlns:r="http://schemas.openxmlformats.org/officeDocument/2006/relationships" xmlns:p="http://schemas.openxmlformats.org/presentationml/2006/main">
+  <p:cSld>
+    <p:spTree>
+      <p:nvGrpSpPr>
+        <p:cNvPr id="1" name=""/>
+        <p:cNvGrpSpPr/>
+        <p:nvPr/>
+      </p:nvGrpSpPr>
+      <p:grpSpPr>
+        <a:xfrm>
+          <a:off x="0" y="0"/>
+          <a:ext cx="0" cy="0"/>
+          <a:chOff x="0" y="0"/>
+          <a:chExt cx="0" cy="0"/>
+        </a:xfrm>
+      </p:grpSpPr>
+      <p:sp>
+        <p:nvSpPr>
+          <p:cNvPr id="2" name="Title">
+            <a:extLst>
+              <a:ext uri="{FF2B5EF4-FFF2-40B4-BE49-F238E27FC236}">
+                <a16:creationId xmlns:a16="http://schemas.microsoft.com/office/drawing/2014/main" id="{77C35447-3B69-8290-4B68-032CFFAFA8DF}"/>
+              </a:ext>
+            </a:extLst>
+          </p:cNvPr>
+          <p:cNvSpPr>
+            <a:spLocks noGrp="1"/>
+          </p:cNvSpPr>
+          <p:nvPr>
+            <p:ph type="title"/>
+          </p:nvPr>
+        </p:nvSpPr>
+        <p:spPr/>
+        <p:txBody>
+          <a:bodyPr/>
+          <a:lstStyle/>
+          <a:p>
+            <a:r>
+              <a:rPr lang="ar-EG"/>
+              <a:t>شريحة ثانية على التخطيط أ</a:t>
+            </a:r>
+            <a:endParaRPr lang="en-US"/>
+          </a:p>
+        </p:txBody>
+      </p:sp>
+      <p:sp>
+        <p:nvSpPr>
+          <p:cNvPr id="3" name="Slide Number Placeholder 2">
+            <a:extLst>
+              <a:ext uri="{FF2B5EF4-FFF2-40B4-BE49-F238E27FC236}">
+                <a16:creationId xmlns:a16="http://schemas.microsoft.com/office/drawing/2014/main" id="{296FE604-8505-A095-2591-7110126032D1}"/>
+              </a:ext>
+            </a:extLst>
+          </p:cNvPr>
+          <p:cNvSpPr>
+            <a:spLocks noGrp="1"/>
+          </p:cNvSpPr>
+          <p:nvPr>
+            <p:ph type="sldNum" sz="quarter" idx="12"/>
+          </p:nvPr>
+        </p:nvSpPr>
+        <p:spPr/>
+        <p:txBody>
+          <a:bodyPr/>
+          <a:lstStyle/>
+          <a:p>
+            <a:fld id="{C6DDDF4F-F028-4B81-B3D4-6037FCFC1593}" type="slidenum">
+              <a:rPr lang="en-US" smtClean="0"/>
+              <a:t>16</a:t>
+            </a:fld>
+            <a:endParaRPr lang="en-US"/>
+          </a:p>
+        </p:txBody>
+      </p:sp>
+    </p:spTree>
+    <p:extLst>
+      <p:ext uri="{BB962C8B-B14F-4D97-AF65-F5344CB8AC3E}">
+        <p14:creationId xmlns:p14="http://schemas.microsoft.com/office/powerpoint/2010/main" val="3806732660"/>
+      </p:ext>
+    </p:extLst>
+  </p:cSld>
+  <p:clrMapOvr>
+    <a:masterClrMapping/>
+  </p:clrMapOvr>
+</p:sld>
+</file>
+
+<file path=ppt/slides/slide17.xml><?xml version="1.0" encoding="utf-8"?>
+<p:sld xmlns:a="http://schemas.openxmlformats.org/drawingml/2006/main" xmlns:r="http://schemas.openxmlformats.org/officeDocument/2006/relationships" xmlns:p="http://schemas.openxmlformats.org/presentationml/2006/main">
+  <p:cSld>
+    <p:spTree>
+      <p:nvGrpSpPr>
+        <p:cNvPr id="1" name=""/>
+        <p:cNvGrpSpPr/>
+        <p:nvPr/>
+      </p:nvGrpSpPr>
+      <p:grpSpPr>
+        <a:xfrm>
+          <a:off x="0" y="0"/>
+          <a:ext cx="0" cy="0"/>
+          <a:chOff x="0" y="0"/>
+          <a:chExt cx="0" cy="0"/>
+        </a:xfrm>
+      </p:grpSpPr>
+      <p:sp>
+        <p:nvSpPr>
+          <p:cNvPr id="2" name="Title">
+            <a:extLst>
+              <a:ext uri="{FF2B5EF4-FFF2-40B4-BE49-F238E27FC236}">
+                <a16:creationId xmlns:a16="http://schemas.microsoft.com/office/drawing/2014/main" id="{DD9FEE69-9AF8-6C4A-C179-E6427D9F7617}"/>
+              </a:ext>
+            </a:extLst>
+          </p:cNvPr>
+          <p:cNvSpPr>
+            <a:spLocks noGrp="1"/>
+          </p:cNvSpPr>
+          <p:nvPr>
+            <p:ph type="title"/>
+          </p:nvPr>
+        </p:nvSpPr>
+        <p:spPr/>
+        <p:txBody>
+          <a:bodyPr/>
+          <a:lstStyle/>
+          <a:p>
+            <a:r>
+              <a:rPr lang="ar-EG"/>
+              <a:t>شريحة على التخطيط ب</a:t>
+            </a:r>
+            <a:endParaRPr lang="en-US"/>
+          </a:p>
+        </p:txBody>
+      </p:sp>
+      <p:sp>
+        <p:nvSpPr>
+          <p:cNvPr id="3" name="Slide Number Placeholder 2">
+            <a:extLst>
+              <a:ext uri="{FF2B5EF4-FFF2-40B4-BE49-F238E27FC236}">
+                <a16:creationId xmlns:a16="http://schemas.microsoft.com/office/drawing/2014/main" id="{AD523B5E-A794-A434-59B8-0DD5E355BA4B}"/>
+              </a:ext>
+            </a:extLst>
+          </p:cNvPr>
+          <p:cNvSpPr>
+            <a:spLocks noGrp="1"/>
+          </p:cNvSpPr>
+          <p:nvPr>
+            <p:ph type="sldNum" sz="quarter" idx="12"/>
+          </p:nvPr>
+        </p:nvSpPr>
+        <p:spPr/>
+        <p:txBody>
+          <a:bodyPr/>
+          <a:lstStyle/>
+          <a:p>
+            <a:fld id="{C6DDDF4F-F028-4B81-B3D4-6037FCFC1593}" type="slidenum">
+              <a:rPr lang="en-US" smtClean="0"/>
+              <a:t>17</a:t>
+            </a:fld>
+            <a:endParaRPr lang="en-US"/>
+          </a:p>
+        </p:txBody>
+      </p:sp>
+    </p:spTree>
+    <p:extLst>
+      <p:ext uri="{BB962C8B-B14F-4D97-AF65-F5344CB8AC3E}">
+        <p14:creationId xmlns:p14="http://schemas.microsoft.com/office/powerpoint/2010/main" val="2862519318"/>
+      </p:ext>
+    </p:extLst>
+  </p:cSld>
+  <p:clrMapOvr>
+    <a:masterClrMapping/>
+  </p:clrMapOvr>
+</p:sld>
+</file>
+
+<file path=ppt/slides/slide18.xml><?xml version="1.0" encoding="utf-8"?>
+<p:sld xmlns:a="http://schemas.openxmlformats.org/drawingml/2006/main" xmlns:r="http://schemas.openxmlformats.org/officeDocument/2006/relationships" xmlns:p="http://schemas.openxmlformats.org/presentationml/2006/main" showMasterSp="0">
+  <p:cSld>
+    <p:spTree>
+      <p:nvGrpSpPr>
+        <p:cNvPr id="1" name=""/>
+        <p:cNvGrpSpPr/>
+        <p:nvPr/>
+      </p:nvGrpSpPr>
+      <p:grpSpPr>
+        <a:xfrm>
+          <a:off x="0" y="0"/>
+          <a:ext cx="0" cy="0"/>
+          <a:chOff x="0" y="0"/>
+          <a:chExt cx="0" cy="0"/>
+        </a:xfrm>
+      </p:grpSpPr>
+      <p:sp>
+        <p:nvSpPr>
+          <p:cNvPr id="2" name="Title">
+            <a:extLst>
+              <a:ext uri="{FF2B5EF4-FFF2-40B4-BE49-F238E27FC236}">
+                <a16:creationId xmlns:a16="http://schemas.microsoft.com/office/drawing/2014/main" id="{C0F35A0F-1EFA-9FEF-8C2A-A2D60A0C99F1}"/>
+              </a:ext>
+            </a:extLst>
+          </p:cNvPr>
+          <p:cNvSpPr>
+            <a:spLocks noGrp="1"/>
+          </p:cNvSpPr>
+          <p:nvPr>
+            <p:ph type="title"/>
+          </p:nvPr>
+        </p:nvSpPr>
+        <p:spPr/>
+        <p:txBody>
+          <a:bodyPr/>
+          <a:lstStyle/>
+          <a:p>
+            <a:r>
+              <a:rPr lang="ar-EG"/>
+              <a:t>شريحة تخفي الرسومات</a:t>
+            </a:r>
+            <a:endParaRPr lang="en-US"/>
+          </a:p>
+        </p:txBody>
+      </p:sp>
+      <p:sp>
+        <p:nvSpPr>
+          <p:cNvPr id="3" name="Slide Number Placeholder 2">
+            <a:extLst>
+              <a:ext uri="{FF2B5EF4-FFF2-40B4-BE49-F238E27FC236}">
+                <a16:creationId xmlns:a16="http://schemas.microsoft.com/office/drawing/2014/main" id="{F4FEFA19-FBBF-5EC2-7ED6-E33233854321}"/>
+              </a:ext>
+            </a:extLst>
+          </p:cNvPr>
+          <p:cNvSpPr>
+            <a:spLocks noGrp="1"/>
+          </p:cNvSpPr>
+          <p:nvPr>
+            <p:ph type="sldNum" sz="quarter" idx="12"/>
+          </p:nvPr>
+        </p:nvSpPr>
+        <p:spPr/>
+        <p:txBody>
+          <a:bodyPr/>
+          <a:lstStyle/>
+          <a:p>
+            <a:fld id="{C6DDDF4F-F028-4B81-B3D4-6037FCFC1593}" type="slidenum">
+              <a:rPr lang="en-US" smtClean="0"/>
+              <a:t>18</a:t>
+            </a:fld>
+            <a:endParaRPr lang="en-US"/>
+          </a:p>
+        </p:txBody>
+      </p:sp>
+    </p:spTree>
+    <p:extLst>
+      <p:ext uri="{BB962C8B-B14F-4D97-AF65-F5344CB8AC3E}">
+        <p14:creationId xmlns:p14="http://schemas.microsoft.com/office/powerpoint/2010/main" val="3179111390"/>
       </p:ext>
     </p:extLst>
   </p:cSld>
@@ -10303,6 +12792,321 @@
 </file>
 
 <file path=ppt/theme/theme2.xml><?xml version="1.0" encoding="utf-8"?>
+<a:theme xmlns:a="http://schemas.openxmlformats.org/drawingml/2006/main" name="Second master">
+  <a:themeElements>
+    <a:clrScheme name="Office">
+      <a:dk1>
+        <a:sysClr val="windowText" lastClr="000000"/>
+      </a:dk1>
+      <a:lt1>
+        <a:sysClr val="window" lastClr="FFFFFF"/>
+      </a:lt1>
+      <a:dk2>
+        <a:srgbClr val="0E2841"/>
+      </a:dk2>
+      <a:lt2>
+        <a:srgbClr val="E8E8E8"/>
+      </a:lt2>
+      <a:accent1>
+        <a:srgbClr val="1E6B3C"/>
+      </a:accent1>
+      <a:accent2>
+        <a:srgbClr val="E97132"/>
+      </a:accent2>
+      <a:accent3>
+        <a:srgbClr val="196B24"/>
+      </a:accent3>
+      <a:accent4>
+        <a:srgbClr val="0F9ED5"/>
+      </a:accent4>
+      <a:accent5>
+        <a:srgbClr val="A02B93"/>
+      </a:accent5>
+      <a:accent6>
+        <a:srgbClr val="4EA72E"/>
+      </a:accent6>
+      <a:hlink>
+        <a:srgbClr val="467886"/>
+      </a:hlink>
+      <a:folHlink>
+        <a:srgbClr val="96607D"/>
+      </a:folHlink>
+    </a:clrScheme>
+    <a:fontScheme name="Office">
+      <a:majorFont>
+        <a:latin typeface="Aptos Display" panose="02110004020202020204"/>
+        <a:ea typeface=""/>
+        <a:cs typeface=""/>
+        <a:font script="Jpan" typeface="游ゴシック Light"/>
+        <a:font script="Hang" typeface="맑은 고딕"/>
+        <a:font script="Hans" typeface="等线 Light"/>
+        <a:font script="Hant" typeface="新細明體"/>
+        <a:font script="Arab" typeface="Times New Roman"/>
+        <a:font script="Hebr" typeface="Times New Roman"/>
+        <a:font script="Thai" typeface="Angsana New"/>
+        <a:font script="Ethi" typeface="Nyala"/>
+        <a:font script="Beng" typeface="Vrinda"/>
+        <a:font script="Gujr" typeface="Shruti"/>
+        <a:font script="Khmr" typeface="MoolBoran"/>
+        <a:font script="Knda" typeface="Tunga"/>
+        <a:font script="Guru" typeface="Raavi"/>
+        <a:font script="Cans" typeface="Euphemia"/>
+        <a:font script="Cher" typeface="Plantagenet Cherokee"/>
+        <a:font script="Yiii" typeface="Microsoft Yi Baiti"/>
+        <a:font script="Tibt" typeface="Microsoft Himalaya"/>
+        <a:font script="Thaa" typeface="MV Boli"/>
+        <a:font script="Deva" typeface="Mangal"/>
+        <a:font script="Telu" typeface="Gautami"/>
+        <a:font script="Taml" typeface="Latha"/>
+        <a:font script="Syrc" typeface="Estrangelo Edessa"/>
+        <a:font script="Orya" typeface="Kalinga"/>
+        <a:font script="Mlym" typeface="Kartika"/>
+        <a:font script="Laoo" typeface="DokChampa"/>
+        <a:font script="Sinh" typeface="Iskoola Pota"/>
+        <a:font script="Mong" typeface="Mongolian Baiti"/>
+        <a:font script="Viet" typeface="Times New Roman"/>
+        <a:font script="Uigh" typeface="Microsoft Uighur"/>
+        <a:font script="Geor" typeface="Sylfaen"/>
+        <a:font script="Armn" typeface="Arial"/>
+        <a:font script="Bugi" typeface="Leelawadee UI"/>
+        <a:font script="Bopo" typeface="Microsoft JhengHei"/>
+        <a:font script="Java" typeface="Javanese Text"/>
+        <a:font script="Lisu" typeface="Segoe UI"/>
+        <a:font script="Mymr" typeface="Myanmar Text"/>
+        <a:font script="Nkoo" typeface="Ebrima"/>
+        <a:font script="Olck" typeface="Nirmala UI"/>
+        <a:font script="Osma" typeface="Ebrima"/>
+        <a:font script="Phag" typeface="Phagspa"/>
+        <a:font script="Syrn" typeface="Estrangelo Edessa"/>
+        <a:font script="Syrj" typeface="Estrangelo Edessa"/>
+        <a:font script="Syre" typeface="Estrangelo Edessa"/>
+        <a:font script="Sora" typeface="Nirmala UI"/>
+        <a:font script="Tale" typeface="Microsoft Tai Le"/>
+        <a:font script="Talu" typeface="Microsoft New Tai Lue"/>
+        <a:font script="Tfng" typeface="Ebrima"/>
+      </a:majorFont>
+      <a:minorFont>
+        <a:latin typeface="Aptos" panose="02110004020202020204"/>
+        <a:ea typeface=""/>
+        <a:cs typeface=""/>
+        <a:font script="Jpan" typeface="游ゴシック"/>
+        <a:font script="Hang" typeface="맑은 고딕"/>
+        <a:font script="Hans" typeface="等线"/>
+        <a:font script="Hant" typeface="新細明體"/>
+        <a:font script="Arab" typeface="Arial"/>
+        <a:font script="Hebr" typeface="Arial"/>
+        <a:font script="Thai" typeface="Cordia New"/>
+        <a:font script="Ethi" typeface="Nyala"/>
+        <a:font script="Beng" typeface="Vrinda"/>
+        <a:font script="Gujr" typeface="Shruti"/>
+        <a:font script="Khmr" typeface="DaunPenh"/>
+        <a:font script="Knda" typeface="Tunga"/>
+        <a:font script="Guru" typeface="Raavi"/>
+        <a:font script="Cans" typeface="Euphemia"/>
+        <a:font script="Cher" typeface="Plantagenet Cherokee"/>
+        <a:font script="Yiii" typeface="Microsoft Yi Baiti"/>
+        <a:font script="Tibt" typeface="Microsoft Himalaya"/>
+        <a:font script="Thaa" typeface="MV Boli"/>
+        <a:font script="Deva" typeface="Mangal"/>
+        <a:font script="Telu" typeface="Gautami"/>
+        <a:font script="Taml" typeface="Latha"/>
+        <a:font script="Syrc" typeface="Estrangelo Edessa"/>
+        <a:font script="Orya" typeface="Kalinga"/>
+        <a:font script="Mlym" typeface="Kartika"/>
+        <a:font script="Laoo" typeface="DokChampa"/>
+        <a:font script="Sinh" typeface="Iskoola Pota"/>
+        <a:font script="Mong" typeface="Mongolian Baiti"/>
+        <a:font script="Viet" typeface="Arial"/>
+        <a:font script="Uigh" typeface="Microsoft Uighur"/>
+        <a:font script="Geor" typeface="Sylfaen"/>
+        <a:font script="Armn" typeface="Arial"/>
+        <a:font script="Bugi" typeface="Leelawadee UI"/>
+        <a:font script="Bopo" typeface="Microsoft JhengHei"/>
+        <a:font script="Java" typeface="Javanese Text"/>
+        <a:font script="Lisu" typeface="Segoe UI"/>
+        <a:font script="Mymr" typeface="Myanmar Text"/>
+        <a:font script="Nkoo" typeface="Ebrima"/>
+        <a:font script="Olck" typeface="Nirmala UI"/>
+        <a:font script="Osma" typeface="Ebrima"/>
+        <a:font script="Phag" typeface="Phagspa"/>
+        <a:font script="Syrn" typeface="Estrangelo Edessa"/>
+        <a:font script="Syrj" typeface="Estrangelo Edessa"/>
+        <a:font script="Syre" typeface="Estrangelo Edessa"/>
+        <a:font script="Sora" typeface="Nirmala UI"/>
+        <a:font script="Tale" typeface="Microsoft Tai Le"/>
+        <a:font script="Talu" typeface="Microsoft New Tai Lue"/>
+        <a:font script="Tfng" typeface="Ebrima"/>
+      </a:minorFont>
+    </a:fontScheme>
+    <a:fmtScheme name="Office">
+      <a:fillStyleLst>
+        <a:solidFill>
+          <a:schemeClr val="phClr"/>
+        </a:solidFill>
+        <a:gradFill rotWithShape="1">
+          <a:gsLst>
+            <a:gs pos="0">
+              <a:schemeClr val="phClr">
+                <a:lumMod val="110000"/>
+                <a:satMod val="105000"/>
+                <a:tint val="67000"/>
+              </a:schemeClr>
+            </a:gs>
+            <a:gs pos="50000">
+              <a:schemeClr val="phClr">
+                <a:lumMod val="105000"/>
+                <a:satMod val="103000"/>
+                <a:tint val="73000"/>
+              </a:schemeClr>
+            </a:gs>
+            <a:gs pos="100000">
+              <a:schemeClr val="phClr">
+                <a:lumMod val="105000"/>
+                <a:satMod val="109000"/>
+                <a:tint val="81000"/>
+              </a:schemeClr>
+            </a:gs>
+          </a:gsLst>
+          <a:lin ang="5400000" scaled="0"/>
+        </a:gradFill>
+        <a:gradFill rotWithShape="1">
+          <a:gsLst>
+            <a:gs pos="0">
+              <a:schemeClr val="phClr">
+                <a:satMod val="103000"/>
+                <a:lumMod val="102000"/>
+                <a:tint val="94000"/>
+              </a:schemeClr>
+            </a:gs>
+            <a:gs pos="50000">
+              <a:schemeClr val="phClr">
+                <a:satMod val="110000"/>
+                <a:lumMod val="100000"/>
+                <a:shade val="100000"/>
+              </a:schemeClr>
+            </a:gs>
+            <a:gs pos="100000">
+              <a:schemeClr val="phClr">
+                <a:lumMod val="99000"/>
+                <a:satMod val="120000"/>
+                <a:shade val="78000"/>
+              </a:schemeClr>
+            </a:gs>
+          </a:gsLst>
+          <a:lin ang="5400000" scaled="0"/>
+        </a:gradFill>
+      </a:fillStyleLst>
+      <a:lnStyleLst>
+        <a:ln w="12700" cap="flat" cmpd="sng" algn="ctr">
+          <a:solidFill>
+            <a:schemeClr val="phClr"/>
+          </a:solidFill>
+          <a:prstDash val="solid"/>
+          <a:miter lim="800000"/>
+        </a:ln>
+        <a:ln w="19050" cap="flat" cmpd="sng" algn="ctr">
+          <a:solidFill>
+            <a:schemeClr val="phClr"/>
+          </a:solidFill>
+          <a:prstDash val="solid"/>
+          <a:miter lim="800000"/>
+        </a:ln>
+        <a:ln w="25400" cap="flat" cmpd="sng" algn="ctr">
+          <a:solidFill>
+            <a:schemeClr val="phClr"/>
+          </a:solidFill>
+          <a:prstDash val="solid"/>
+          <a:miter lim="800000"/>
+        </a:ln>
+      </a:lnStyleLst>
+      <a:effectStyleLst>
+        <a:effectStyle>
+          <a:effectLst/>
+        </a:effectStyle>
+        <a:effectStyle>
+          <a:effectLst/>
+        </a:effectStyle>
+        <a:effectStyle>
+          <a:effectLst>
+            <a:outerShdw blurRad="57150" dist="19050" dir="5400000" algn="ctr" rotWithShape="0">
+              <a:srgbClr val="000000">
+                <a:alpha val="63000"/>
+              </a:srgbClr>
+            </a:outerShdw>
+          </a:effectLst>
+        </a:effectStyle>
+      </a:effectStyleLst>
+      <a:bgFillStyleLst>
+        <a:solidFill>
+          <a:schemeClr val="phClr"/>
+        </a:solidFill>
+        <a:solidFill>
+          <a:schemeClr val="phClr">
+            <a:tint val="95000"/>
+            <a:satMod val="170000"/>
+          </a:schemeClr>
+        </a:solidFill>
+        <a:gradFill rotWithShape="1">
+          <a:gsLst>
+            <a:gs pos="0">
+              <a:schemeClr val="phClr">
+                <a:tint val="93000"/>
+                <a:satMod val="150000"/>
+                <a:shade val="98000"/>
+                <a:lumMod val="102000"/>
+              </a:schemeClr>
+            </a:gs>
+            <a:gs pos="50000">
+              <a:schemeClr val="phClr">
+                <a:tint val="98000"/>
+                <a:satMod val="130000"/>
+                <a:shade val="90000"/>
+                <a:lumMod val="103000"/>
+              </a:schemeClr>
+            </a:gs>
+            <a:gs pos="100000">
+              <a:schemeClr val="phClr">
+                <a:shade val="63000"/>
+                <a:satMod val="120000"/>
+              </a:schemeClr>
+            </a:gs>
+          </a:gsLst>
+          <a:lin ang="5400000" scaled="0"/>
+        </a:gradFill>
+      </a:bgFillStyleLst>
+    </a:fmtScheme>
+  </a:themeElements>
+  <a:objectDefaults>
+    <a:lnDef>
+      <a:spPr/>
+      <a:bodyPr/>
+      <a:lstStyle/>
+      <a:style>
+        <a:lnRef idx="2">
+          <a:schemeClr val="accent1"/>
+        </a:lnRef>
+        <a:fillRef idx="0">
+          <a:schemeClr val="accent1"/>
+        </a:fillRef>
+        <a:effectRef idx="1">
+          <a:schemeClr val="accent1"/>
+        </a:effectRef>
+        <a:fontRef idx="minor">
+          <a:schemeClr val="tx1"/>
+        </a:fontRef>
+      </a:style>
+    </a:lnDef>
+  </a:objectDefaults>
+  <a:extraClrSchemeLst/>
+  <a:extLst>
+    <a:ext uri="{05A4C25C-085E-4340-85A3-A5531E510DB2}">
+      <thm15:themeFamily xmlns:thm15="http://schemas.microsoft.com/office/thememl/2012/main" name="Office Theme" id="{2E142A2C-CD16-42D6-873A-C26D2A0506FA}" vid="{1BDDFF52-6CD6-40A5-AB3C-68EB2F1E4D0A}"/>
+    </a:ext>
+  </a:extLst>
+</a:theme>
+</file>
+
+<file path=ppt/theme/theme3.xml><?xml version="1.0" encoding="utf-8"?>
 <a:theme xmlns:a="http://schemas.openxmlformats.org/drawingml/2006/main" name="Office Theme">
   <a:themeElements>
     <a:clrScheme name="Office">

--- a/fixtures/pptx-coverage.pptx
+++ b/fixtures/pptx-coverage.pptx
@@ -6,7 +6,7 @@
     <p:sldMasterId id="2147483660" r:id="rId2"/>
   </p:sldMasterIdLst>
   <p:notesMasterIdLst>
-    <p:notesMasterId r:id="rId21"/>
+    <p:notesMasterId r:id="rId23"/>
   </p:notesMasterIdLst>
   <p:sldIdLst>
     <p:sldId id="256" r:id="rId3"/>
@@ -27,6 +27,8 @@
     <p:sldId id="271" r:id="rId18"/>
     <p:sldId id="272" r:id="rId19"/>
     <p:sldId id="273" r:id="rId20"/>
+    <p:sldId id="274" r:id="rId21"/>
+    <p:sldId id="275" r:id="rId22"/>
   </p:sldIdLst>
   <p:sldSz cx="12192000" cy="6858000"/>
   <p:notesSz cx="6858000" cy="9144000"/>
@@ -1064,7 +1066,7 @@
           <a:p>
             <a:fld id="{86A64A56-4393-4CB6-85C6-C90BB7A8548C}" type="datetimeFigureOut">
               <a:rPr lang="en-US" smtClean="0"/>
-              <a:t>10/5/2026</a:t>
+              <a:t>10/10/2026</a:t>
             </a:fld>
             <a:endParaRPr lang="en-US"/>
           </a:p>
@@ -1478,7 +1480,7 @@
           <a:p>
             <a:fld id="{60541A7F-F981-4501-AAE0-06F6CB326412}" type="datetime1">
               <a:rPr lang="en-US" smtClean="0"/>
-              <a:t>10/5/2026</a:t>
+              <a:t>10/10/2026</a:t>
             </a:fld>
             <a:endParaRPr lang="en-US"/>
           </a:p>
@@ -1676,7 +1678,7 @@
           <a:p>
             <a:fld id="{F853943D-1B76-47AC-8196-C4B25463BF47}" type="datetime1">
               <a:rPr lang="en-US" smtClean="0"/>
-              <a:t>10/5/2026</a:t>
+              <a:t>10/10/2026</a:t>
             </a:fld>
             <a:endParaRPr lang="en-US"/>
           </a:p>
@@ -1884,7 +1886,7 @@
           <a:p>
             <a:fld id="{2E188C43-274A-49F7-9E8E-741661AA3B8D}" type="datetime1">
               <a:rPr lang="en-US" smtClean="0"/>
-              <a:t>10/5/2026</a:t>
+              <a:t>10/10/2026</a:t>
             </a:fld>
             <a:endParaRPr lang="en-US"/>
           </a:p>
@@ -2231,6 +2233,119 @@
 </p:sldLayout>
 </file>
 
+<file path=ppt/slideLayouts/slideLayout14.xml><?xml version="1.0" encoding="utf-8"?>
+<p:sldLayout xmlns:a="http://schemas.openxmlformats.org/drawingml/2006/main" xmlns:r="http://schemas.openxmlformats.org/officeDocument/2006/relationships" xmlns:p="http://schemas.openxmlformats.org/presentationml/2006/main" type="blank" preserve="1">
+  <p:cSld name="Blank">
+    <p:spTree>
+      <p:nvGrpSpPr>
+        <p:cNvPr id="1" name=""/>
+        <p:cNvGrpSpPr/>
+        <p:nvPr/>
+      </p:nvGrpSpPr>
+      <p:grpSpPr>
+        <a:xfrm>
+          <a:off x="0" y="0"/>
+          <a:ext cx="0" cy="0"/>
+          <a:chOff x="0" y="0"/>
+          <a:chExt cx="0" cy="0"/>
+        </a:xfrm>
+      </p:grpSpPr>
+      <p:sp>
+        <p:nvSpPr>
+          <p:cNvPr id="2" name="Date Placeholder 1">
+            <a:extLst>
+              <a:ext uri="{FF2B5EF4-FFF2-40B4-BE49-F238E27FC236}">
+                <a16:creationId xmlns:a16="http://schemas.microsoft.com/office/drawing/2014/main" id="{EFA39068-ABE7-C387-6E59-4270E7B0EBC7}"/>
+              </a:ext>
+            </a:extLst>
+          </p:cNvPr>
+          <p:cNvSpPr>
+            <a:spLocks noGrp="1"/>
+          </p:cNvSpPr>
+          <p:nvPr>
+            <p:ph type="dt" sz="half" idx="10"/>
+          </p:nvPr>
+        </p:nvSpPr>
+        <p:spPr/>
+        <p:txBody>
+          <a:bodyPr/>
+          <a:lstStyle/>
+          <a:p>
+            <a:fld id="{27E3A6A4-31A5-4BF1-8F46-4A08E4DED6B4}" type="datetimeFigureOut">
+              <a:rPr lang="en-US" smtClean="0"/>
+              <a:t>10/10/2026</a:t>
+            </a:fld>
+            <a:endParaRPr lang="en-US"/>
+          </a:p>
+        </p:txBody>
+      </p:sp>
+      <p:sp>
+        <p:nvSpPr>
+          <p:cNvPr id="3" name="Footer Placeholder 2">
+            <a:extLst>
+              <a:ext uri="{FF2B5EF4-FFF2-40B4-BE49-F238E27FC236}">
+                <a16:creationId xmlns:a16="http://schemas.microsoft.com/office/drawing/2014/main" id="{D22EF6E9-DE26-C468-BF42-27D0C6A41FDD}"/>
+              </a:ext>
+            </a:extLst>
+          </p:cNvPr>
+          <p:cNvSpPr>
+            <a:spLocks noGrp="1"/>
+          </p:cNvSpPr>
+          <p:nvPr>
+            <p:ph type="ftr" sz="quarter" idx="11"/>
+          </p:nvPr>
+        </p:nvSpPr>
+        <p:spPr/>
+        <p:txBody>
+          <a:bodyPr/>
+          <a:lstStyle/>
+          <a:p>
+            <a:endParaRPr lang="en-US"/>
+          </a:p>
+        </p:txBody>
+      </p:sp>
+      <p:sp>
+        <p:nvSpPr>
+          <p:cNvPr id="4" name="Slide Number Placeholder 3">
+            <a:extLst>
+              <a:ext uri="{FF2B5EF4-FFF2-40B4-BE49-F238E27FC236}">
+                <a16:creationId xmlns:a16="http://schemas.microsoft.com/office/drawing/2014/main" id="{192DB7DC-03BE-00C3-9609-8DB7362D1F8F}"/>
+              </a:ext>
+            </a:extLst>
+          </p:cNvPr>
+          <p:cNvSpPr>
+            <a:spLocks noGrp="1"/>
+          </p:cNvSpPr>
+          <p:nvPr>
+            <p:ph type="sldNum" sz="quarter" idx="12"/>
+          </p:nvPr>
+        </p:nvSpPr>
+        <p:spPr/>
+        <p:txBody>
+          <a:bodyPr/>
+          <a:lstStyle/>
+          <a:p>
+            <a:fld id="{C6DDDF4F-F028-4B81-B3D4-6037FCFC1593}" type="slidenum">
+              <a:rPr lang="en-US" smtClean="0"/>
+              <a:t>‹#›</a:t>
+            </a:fld>
+            <a:endParaRPr lang="en-US"/>
+          </a:p>
+        </p:txBody>
+      </p:sp>
+    </p:spTree>
+    <p:extLst>
+      <p:ext uri="{BB962C8B-B14F-4D97-AF65-F5344CB8AC3E}">
+        <p14:creationId xmlns:p14="http://schemas.microsoft.com/office/powerpoint/2010/main" val="4289214459"/>
+      </p:ext>
+    </p:extLst>
+  </p:cSld>
+  <p:clrMapOvr>
+    <a:masterClrMapping/>
+  </p:clrMapOvr>
+</p:sldLayout>
+</file>
+
 <file path=ppt/slideLayouts/slideLayout2.xml><?xml version="1.0" encoding="utf-8"?>
 <p:sldLayout xmlns:a="http://schemas.openxmlformats.org/drawingml/2006/main" xmlns:r="http://schemas.openxmlformats.org/officeDocument/2006/relationships" xmlns:p="http://schemas.openxmlformats.org/presentationml/2006/main" type="obj" preserve="1">
   <p:cSld name="Title and Content">
@@ -2356,7 +2471,7 @@
           <a:p>
             <a:fld id="{AFE56759-6820-42B3-B9BE-972720AE0218}" type="datetime1">
               <a:rPr lang="en-US" smtClean="0"/>
-              <a:t>10/5/2026</a:t>
+              <a:t>10/10/2026</a:t>
             </a:fld>
             <a:endParaRPr lang="en-US"/>
           </a:p>
@@ -2631,7 +2746,7 @@
           <a:p>
             <a:fld id="{E60A5D86-3AF6-469E-9631-8585AF639EE9}" type="datetime1">
               <a:rPr lang="en-US" smtClean="0"/>
-              <a:t>10/5/2026</a:t>
+              <a:t>10/10/2026</a:t>
             </a:fld>
             <a:endParaRPr lang="en-US"/>
           </a:p>
@@ -2896,7 +3011,7 @@
           <a:p>
             <a:fld id="{7040F516-D53A-4B36-A577-E8486E25D0EC}" type="datetime1">
               <a:rPr lang="en-US" smtClean="0"/>
-              <a:t>10/5/2026</a:t>
+              <a:t>10/10/2026</a:t>
             </a:fld>
             <a:endParaRPr lang="en-US"/>
           </a:p>
@@ -3308,7 +3423,7 @@
           <a:p>
             <a:fld id="{3E6E30B0-F99E-4FCA-83EF-31E10F2B66B1}" type="datetime1">
               <a:rPr lang="en-US" smtClean="0"/>
-              <a:t>10/5/2026</a:t>
+              <a:t>10/10/2026</a:t>
             </a:fld>
             <a:endParaRPr lang="en-US"/>
           </a:p>
@@ -3449,7 +3564,7 @@
           <a:p>
             <a:fld id="{FF185E36-5297-403D-B499-FD865F8C5A4F}" type="datetime1">
               <a:rPr lang="en-US" smtClean="0"/>
-              <a:t>10/5/2026</a:t>
+              <a:t>10/10/2026</a:t>
             </a:fld>
             <a:endParaRPr lang="en-US"/>
           </a:p>
@@ -3562,7 +3677,7 @@
           <a:p>
             <a:fld id="{2CDF4417-72BA-4D8F-8104-BFB5B423E2DD}" type="datetime1">
               <a:rPr lang="en-US" smtClean="0"/>
-              <a:t>10/5/2026</a:t>
+              <a:t>10/10/2026</a:t>
             </a:fld>
             <a:endParaRPr lang="en-US"/>
           </a:p>
@@ -3873,7 +3988,7 @@
           <a:p>
             <a:fld id="{C30CC0FA-F1D1-458D-9491-18A8D18048F7}" type="datetime1">
               <a:rPr lang="en-US" smtClean="0"/>
-              <a:t>10/5/2026</a:t>
+              <a:t>10/10/2026</a:t>
             </a:fld>
             <a:endParaRPr lang="en-US"/>
           </a:p>
@@ -4161,7 +4276,7 @@
           <a:p>
             <a:fld id="{66BF3E84-4616-4F9E-891F-D3C933FF2937}" type="datetime1">
               <a:rPr lang="en-US" smtClean="0"/>
-              <a:t>10/5/2026</a:t>
+              <a:t>10/10/2026</a:t>
             </a:fld>
             <a:endParaRPr lang="en-US"/>
           </a:p>
@@ -4402,7 +4517,7 @@
           <a:p>
             <a:fld id="{350CAA63-4269-45C0-A8A2-D62AE2EC413F}" type="datetime1">
               <a:rPr lang="en-US" smtClean="0"/>
-              <a:t>10/5/2026</a:t>
+              <a:t>10/10/2026</a:t>
             </a:fld>
             <a:endParaRPr lang="en-US"/>
           </a:p>
@@ -4808,7 +4923,7 @@
     <p:bg>
       <p:bgPr>
         <a:blipFill>
-          <a:blip r:embed="rId4"/>
+          <a:blip r:embed="rId5"/>
           <a:stretch>
             <a:fillRect/>
           </a:stretch>
@@ -4976,7 +5091,7 @@
           <a:p>
             <a:fld id="{27E3A6A4-31A5-4BF1-8F46-4A08E4DED6B4}" type="datetimeFigureOut">
               <a:rPr lang="en-US" smtClean="0"/>
-              <a:t>10/5/2026</a:t>
+              <a:t>10/10/2026</a:t>
             </a:fld>
             <a:endParaRPr lang="en-US"/>
           </a:p>
@@ -5133,6 +5248,7 @@
   <p:sldLayoutIdLst>
     <p:sldLayoutId id="2147483672" r:id="rId1"/>
     <p:sldLayoutId id="2147483673" r:id="rId2"/>
+    <p:sldLayoutId id="2147483674" r:id="rId3"/>
   </p:sldLayoutIdLst>
   <p:txStyles>
     <p:titleStyle>
@@ -7674,6 +7790,1421 @@
     <p:extLst>
       <p:ext uri="{BB962C8B-B14F-4D97-AF65-F5344CB8AC3E}">
         <p14:creationId xmlns:p14="http://schemas.microsoft.com/office/powerpoint/2010/main" val="3179111390"/>
+      </p:ext>
+    </p:extLst>
+  </p:cSld>
+  <p:clrMapOvr>
+    <a:masterClrMapping/>
+  </p:clrMapOvr>
+</p:sld>
+</file>
+
+<file path=ppt/slides/slide19.xml><?xml version="1.0" encoding="utf-8"?>
+<p:sld xmlns:a="http://schemas.openxmlformats.org/drawingml/2006/main" xmlns:r="http://schemas.openxmlformats.org/officeDocument/2006/relationships" xmlns:p="http://schemas.openxmlformats.org/presentationml/2006/main" showMasterSp="0">
+  <p:cSld>
+    <p:bg>
+      <p:bgPr>
+        <a:solidFill>
+          <a:srgbClr val="FFFFFF"/>
+        </a:solidFill>
+        <a:effectLst/>
+      </p:bgPr>
+    </p:bg>
+    <p:spTree>
+      <p:nvGrpSpPr>
+        <p:cNvPr id="1" name=""/>
+        <p:cNvGrpSpPr/>
+        <p:nvPr/>
+      </p:nvGrpSpPr>
+      <p:grpSpPr>
+        <a:xfrm>
+          <a:off x="0" y="0"/>
+          <a:ext cx="0" cy="0"/>
+          <a:chOff x="0" y="0"/>
+          <a:chExt cx="0" cy="0"/>
+        </a:xfrm>
+      </p:grpSpPr>
+      <p:sp>
+        <p:nvSpPr>
+          <p:cNvPr id="2" name="TextBox 1">
+            <a:extLst>
+              <a:ext uri="{FF2B5EF4-FFF2-40B4-BE49-F238E27FC236}">
+                <a16:creationId xmlns:a16="http://schemas.microsoft.com/office/drawing/2014/main" id="{A51325DE-31BC-CD28-7041-318E0FA652C7}"/>
+              </a:ext>
+            </a:extLst>
+          </p:cNvPr>
+          <p:cNvSpPr txBox="1"/>
+          <p:nvPr/>
+        </p:nvSpPr>
+        <p:spPr>
+          <a:xfrm>
+            <a:off x="381000" y="152400"/>
+            <a:ext cx="8255000" cy="461665"/>
+          </a:xfrm>
+          <a:prstGeom prst="rect">
+            <a:avLst/>
+          </a:prstGeom>
+          <a:noFill/>
+        </p:spPr>
+        <p:txBody>
+          <a:bodyPr vert="horz" rtlCol="0">
+            <a:spAutoFit/>
+          </a:bodyPr>
+          <a:lstStyle/>
+          <a:p>
+            <a:r>
+              <a:rPr lang="en-US" sz="2400">
+                <a:latin typeface="Arial" panose="020B0604020202020204" pitchFamily="34" charset="0"/>
+              </a:rPr>
+              <a:t>Group appearance / </a:t>
+            </a:r>
+            <a:r>
+              <a:rPr lang="ar-EG" sz="2400">
+                <a:latin typeface="Arial" panose="020B0604020202020204" pitchFamily="34" charset="0"/>
+              </a:rPr>
+              <a:t>مظهر المجموعة</a:t>
+            </a:r>
+            <a:endParaRPr lang="en-US" sz="2400">
+              <a:latin typeface="Arial" panose="020B0604020202020204" pitchFamily="34" charset="0"/>
+            </a:endParaRPr>
+          </a:p>
+        </p:txBody>
+      </p:sp>
+      <p:grpSp>
+        <p:nvGrpSpPr>
+          <p:cNvPr id="5" name="Group fill inheritance">
+            <a:extLst>
+              <a:ext uri="{FF2B5EF4-FFF2-40B4-BE49-F238E27FC236}">
+                <a16:creationId xmlns:a16="http://schemas.microsoft.com/office/drawing/2014/main" id="{38DDD7A7-3A69-EA61-42F6-D2CEC9BDD659}"/>
+              </a:ext>
+            </a:extLst>
+          </p:cNvPr>
+          <p:cNvGrpSpPr/>
+          <p:nvPr/>
+        </p:nvGrpSpPr>
+        <p:grpSpPr>
+          <a:xfrm>
+            <a:off x="508000" y="1016000"/>
+            <a:ext cx="1778000" cy="1206500"/>
+            <a:chOff x="508000" y="1016000"/>
+            <a:chExt cx="1778000" cy="1206500"/>
+          </a:xfrm>
+          <a:solidFill>
+            <a:srgbClr val="156082"/>
+          </a:solidFill>
+        </p:grpSpPr>
+        <p:sp>
+          <p:nvSpPr>
+            <p:cNvPr id="3" name="Group fill inheritance A">
+              <a:extLst>
+                <a:ext uri="{FF2B5EF4-FFF2-40B4-BE49-F238E27FC236}">
+                  <a16:creationId xmlns:a16="http://schemas.microsoft.com/office/drawing/2014/main" id="{139E4F8A-9FD1-0A0C-2D9E-369CA61C8841}"/>
+                </a:ext>
+              </a:extLst>
+            </p:cNvPr>
+            <p:cNvSpPr/>
+            <p:nvPr/>
+          </p:nvSpPr>
+          <p:spPr>
+            <a:xfrm>
+              <a:off x="508000" y="1016000"/>
+              <a:ext cx="1079500" cy="825500"/>
+            </a:xfrm>
+            <a:prstGeom prst="rect">
+              <a:avLst/>
+            </a:prstGeom>
+            <a:grpFill/>
+            <a:ln w="19050" cap="flat" cmpd="sng" algn="ctr">
+              <a:noFill/>
+              <a:prstDash val="solid"/>
+              <a:miter lim="800000"/>
+            </a:ln>
+            <a:effectLst/>
+            <a:extLst>
+              <a:ext uri="{91240B29-F687-4F45-9708-019B960494DF}">
+                <a14:hiddenLine xmlns:a14="http://schemas.microsoft.com/office/drawing/2010/main" w="19050" cap="flat" cmpd="sng" algn="ctr">
+                  <a:solidFill>
+                    <a:schemeClr val="accent1">
+                      <a:shade val="15000"/>
+                    </a:schemeClr>
+                  </a:solidFill>
+                  <a:prstDash val="solid"/>
+                  <a:miter lim="800000"/>
+                </a14:hiddenLine>
+              </a:ext>
+            </a:extLst>
+          </p:spPr>
+          <p:style>
+            <a:lnRef idx="2">
+              <a:schemeClr val="accent1">
+                <a:shade val="15000"/>
+              </a:schemeClr>
+            </a:lnRef>
+            <a:fillRef idx="1">
+              <a:schemeClr val="accent1"/>
+            </a:fillRef>
+            <a:effectRef idx="0">
+              <a:schemeClr val="accent1"/>
+            </a:effectRef>
+            <a:fontRef idx="minor">
+              <a:schemeClr val="lt1"/>
+            </a:fontRef>
+          </p:style>
+          <p:txBody>
+            <a:bodyPr rtlCol="0" anchor="ctr"/>
+            <a:lstStyle/>
+            <a:p>
+              <a:pPr algn="ctr"/>
+              <a:r>
+                <a:rPr lang="ar-EG" sz="1400">
+                  <a:latin typeface="Arial" panose="020B0604020202020204" pitchFamily="34" charset="0"/>
+                </a:rPr>
+                <a:t>مجموعة</a:t>
+              </a:r>
+              <a:endParaRPr lang="en-US" sz="1400">
+                <a:latin typeface="Arial" panose="020B0604020202020204" pitchFamily="34" charset="0"/>
+              </a:endParaRPr>
+            </a:p>
+          </p:txBody>
+        </p:sp>
+        <p:sp>
+          <p:nvSpPr>
+            <p:cNvPr id="4" name="Group fill inheritance B">
+              <a:extLst>
+                <a:ext uri="{FF2B5EF4-FFF2-40B4-BE49-F238E27FC236}">
+                  <a16:creationId xmlns:a16="http://schemas.microsoft.com/office/drawing/2014/main" id="{8FD1249E-015A-915D-C5C8-E8FCFD9465C1}"/>
+                </a:ext>
+              </a:extLst>
+            </p:cNvPr>
+            <p:cNvSpPr/>
+            <p:nvPr/>
+          </p:nvSpPr>
+          <p:spPr>
+            <a:xfrm>
+              <a:off x="1206500" y="1397000"/>
+              <a:ext cx="1079500" cy="825500"/>
+            </a:xfrm>
+            <a:prstGeom prst="ellipse">
+              <a:avLst/>
+            </a:prstGeom>
+            <a:solidFill>
+              <a:srgbClr val="BE2832"/>
+            </a:solidFill>
+            <a:ln w="19050" cap="flat" cmpd="sng" algn="ctr">
+              <a:noFill/>
+              <a:prstDash val="solid"/>
+              <a:miter lim="800000"/>
+            </a:ln>
+            <a:effectLst/>
+            <a:extLst>
+              <a:ext uri="{91240B29-F687-4F45-9708-019B960494DF}">
+                <a14:hiddenLine xmlns:a14="http://schemas.microsoft.com/office/drawing/2010/main" w="19050" cap="flat" cmpd="sng" algn="ctr">
+                  <a:solidFill>
+                    <a:schemeClr val="accent1">
+                      <a:shade val="15000"/>
+                    </a:schemeClr>
+                  </a:solidFill>
+                  <a:prstDash val="solid"/>
+                  <a:miter lim="800000"/>
+                </a14:hiddenLine>
+              </a:ext>
+            </a:extLst>
+          </p:spPr>
+          <p:style>
+            <a:lnRef idx="2">
+              <a:schemeClr val="accent1">
+                <a:shade val="15000"/>
+              </a:schemeClr>
+            </a:lnRef>
+            <a:fillRef idx="1">
+              <a:schemeClr val="accent1"/>
+            </a:fillRef>
+            <a:effectRef idx="0">
+              <a:schemeClr val="accent1"/>
+            </a:effectRef>
+            <a:fontRef idx="minor">
+              <a:schemeClr val="lt1"/>
+            </a:fontRef>
+          </p:style>
+          <p:txBody>
+            <a:bodyPr rtlCol="0" anchor="ctr"/>
+            <a:lstStyle/>
+            <a:p>
+              <a:pPr algn="ctr"/>
+              <a:r>
+                <a:rPr lang="en-US" sz="1400">
+                  <a:grpFill/>
+                  <a:latin typeface="Arial" panose="020B0604020202020204" pitchFamily="34" charset="0"/>
+                </a:rPr>
+                <a:t>Group</a:t>
+              </a:r>
+            </a:p>
+          </p:txBody>
+        </p:sp>
+      </p:grpSp>
+      <p:grpSp>
+        <p:nvGrpSpPr>
+          <p:cNvPr id="8" name="Group outer shadow">
+            <a:extLst>
+              <a:ext uri="{FF2B5EF4-FFF2-40B4-BE49-F238E27FC236}">
+                <a16:creationId xmlns:a16="http://schemas.microsoft.com/office/drawing/2014/main" id="{716FA7A4-2873-D167-E06F-32FA59F25836}"/>
+              </a:ext>
+            </a:extLst>
+          </p:cNvPr>
+          <p:cNvGrpSpPr/>
+          <p:nvPr/>
+        </p:nvGrpSpPr>
+        <p:grpSpPr>
+          <a:xfrm>
+            <a:off x="3175000" y="1016000"/>
+            <a:ext cx="1778000" cy="1206500"/>
+            <a:chOff x="3175000" y="1016000"/>
+            <a:chExt cx="1778000" cy="1206500"/>
+          </a:xfrm>
+          <a:solidFill>
+            <a:srgbClr val="156082"/>
+          </a:solidFill>
+          <a:effectLst>
+            <a:outerShdw blurRad="50800" dist="127000" dir="2212190" rotWithShape="0">
+              <a:srgbClr val="000000">
+                <a:alpha val="60000"/>
+              </a:srgbClr>
+            </a:outerShdw>
+          </a:effectLst>
+        </p:grpSpPr>
+        <p:sp>
+          <p:nvSpPr>
+            <p:cNvPr id="6" name="Group outer shadow A">
+              <a:extLst>
+                <a:ext uri="{FF2B5EF4-FFF2-40B4-BE49-F238E27FC236}">
+                  <a16:creationId xmlns:a16="http://schemas.microsoft.com/office/drawing/2014/main" id="{4F2422EA-71E0-0AA3-ADA7-63DB5549016C}"/>
+                </a:ext>
+              </a:extLst>
+            </p:cNvPr>
+            <p:cNvSpPr/>
+            <p:nvPr/>
+          </p:nvSpPr>
+          <p:spPr>
+            <a:xfrm>
+              <a:off x="3175000" y="1016000"/>
+              <a:ext cx="1079500" cy="825500"/>
+            </a:xfrm>
+            <a:prstGeom prst="rect">
+              <a:avLst/>
+            </a:prstGeom>
+            <a:grpFill/>
+            <a:ln w="19050" cap="flat" cmpd="sng" algn="ctr">
+              <a:noFill/>
+              <a:prstDash val="solid"/>
+              <a:miter lim="800000"/>
+            </a:ln>
+            <a:effectLst/>
+            <a:extLst>
+              <a:ext uri="{91240B29-F687-4F45-9708-019B960494DF}">
+                <a14:hiddenLine xmlns:a14="http://schemas.microsoft.com/office/drawing/2010/main" w="19050" cap="flat" cmpd="sng" algn="ctr">
+                  <a:solidFill>
+                    <a:schemeClr val="accent1">
+                      <a:shade val="15000"/>
+                    </a:schemeClr>
+                  </a:solidFill>
+                  <a:prstDash val="solid"/>
+                  <a:miter lim="800000"/>
+                </a14:hiddenLine>
+              </a:ext>
+            </a:extLst>
+          </p:spPr>
+          <p:style>
+            <a:lnRef idx="2">
+              <a:schemeClr val="accent1">
+                <a:shade val="15000"/>
+              </a:schemeClr>
+            </a:lnRef>
+            <a:fillRef idx="1">
+              <a:schemeClr val="accent1"/>
+            </a:fillRef>
+            <a:effectRef idx="0">
+              <a:schemeClr val="accent1"/>
+            </a:effectRef>
+            <a:fontRef idx="minor">
+              <a:schemeClr val="lt1"/>
+            </a:fontRef>
+          </p:style>
+          <p:txBody>
+            <a:bodyPr rtlCol="0" anchor="ctr"/>
+            <a:lstStyle/>
+            <a:p>
+              <a:pPr algn="ctr"/>
+              <a:r>
+                <a:rPr lang="ar-EG" sz="1400">
+                  <a:latin typeface="Arial" panose="020B0604020202020204" pitchFamily="34" charset="0"/>
+                </a:rPr>
+                <a:t>مجموعة</a:t>
+              </a:r>
+              <a:endParaRPr lang="en-US" sz="1400">
+                <a:latin typeface="Arial" panose="020B0604020202020204" pitchFamily="34" charset="0"/>
+              </a:endParaRPr>
+            </a:p>
+          </p:txBody>
+        </p:sp>
+        <p:sp>
+          <p:nvSpPr>
+            <p:cNvPr id="7" name="Group outer shadow B">
+              <a:extLst>
+                <a:ext uri="{FF2B5EF4-FFF2-40B4-BE49-F238E27FC236}">
+                  <a16:creationId xmlns:a16="http://schemas.microsoft.com/office/drawing/2014/main" id="{FF08A866-8821-264E-7B4B-E8D75A74B1C4}"/>
+                </a:ext>
+              </a:extLst>
+            </p:cNvPr>
+            <p:cNvSpPr/>
+            <p:nvPr/>
+          </p:nvSpPr>
+          <p:spPr>
+            <a:xfrm>
+              <a:off x="3873500" y="1397000"/>
+              <a:ext cx="1079500" cy="825500"/>
+            </a:xfrm>
+            <a:prstGeom prst="ellipse">
+              <a:avLst/>
+            </a:prstGeom>
+            <a:grpFill/>
+            <a:ln w="19050" cap="flat" cmpd="sng" algn="ctr">
+              <a:noFill/>
+              <a:prstDash val="solid"/>
+              <a:miter lim="800000"/>
+            </a:ln>
+            <a:effectLst/>
+            <a:extLst>
+              <a:ext uri="{91240B29-F687-4F45-9708-019B960494DF}">
+                <a14:hiddenLine xmlns:a14="http://schemas.microsoft.com/office/drawing/2010/main" w="19050" cap="flat" cmpd="sng" algn="ctr">
+                  <a:solidFill>
+                    <a:schemeClr val="accent1">
+                      <a:shade val="15000"/>
+                    </a:schemeClr>
+                  </a:solidFill>
+                  <a:prstDash val="solid"/>
+                  <a:miter lim="800000"/>
+                </a14:hiddenLine>
+              </a:ext>
+            </a:extLst>
+          </p:spPr>
+          <p:style>
+            <a:lnRef idx="2">
+              <a:schemeClr val="accent1">
+                <a:shade val="15000"/>
+              </a:schemeClr>
+            </a:lnRef>
+            <a:fillRef idx="1">
+              <a:schemeClr val="accent1"/>
+            </a:fillRef>
+            <a:effectRef idx="0">
+              <a:schemeClr val="accent1"/>
+            </a:effectRef>
+            <a:fontRef idx="minor">
+              <a:schemeClr val="lt1"/>
+            </a:fontRef>
+          </p:style>
+          <p:txBody>
+            <a:bodyPr rtlCol="0" anchor="ctr"/>
+            <a:lstStyle/>
+            <a:p>
+              <a:pPr algn="ctr"/>
+              <a:r>
+                <a:rPr lang="en-US" sz="1400">
+                  <a:latin typeface="Arial" panose="020B0604020202020204" pitchFamily="34" charset="0"/>
+                </a:rPr>
+                <a:t>Group</a:t>
+              </a:r>
+            </a:p>
+          </p:txBody>
+        </p:sp>
+      </p:grpSp>
+      <p:grpSp>
+        <p:nvGrpSpPr>
+          <p:cNvPr id="11" name="Group glow">
+            <a:extLst>
+              <a:ext uri="{FF2B5EF4-FFF2-40B4-BE49-F238E27FC236}">
+                <a16:creationId xmlns:a16="http://schemas.microsoft.com/office/drawing/2014/main" id="{14ACDAAA-C45A-6378-85D1-64EC3A7FED03}"/>
+              </a:ext>
+            </a:extLst>
+          </p:cNvPr>
+          <p:cNvGrpSpPr/>
+          <p:nvPr/>
+        </p:nvGrpSpPr>
+        <p:grpSpPr>
+          <a:xfrm>
+            <a:off x="5842000" y="1016000"/>
+            <a:ext cx="1778000" cy="1206500"/>
+            <a:chOff x="5842000" y="1016000"/>
+            <a:chExt cx="1778000" cy="1206500"/>
+          </a:xfrm>
+          <a:solidFill>
+            <a:srgbClr val="156082"/>
+          </a:solidFill>
+          <a:effectLst>
+            <a:glow rad="101600">
+              <a:srgbClr val="DC780A">
+                <a:alpha val="80000"/>
+              </a:srgbClr>
+            </a:glow>
+          </a:effectLst>
+        </p:grpSpPr>
+        <p:sp>
+          <p:nvSpPr>
+            <p:cNvPr id="9" name="Group glow A">
+              <a:extLst>
+                <a:ext uri="{FF2B5EF4-FFF2-40B4-BE49-F238E27FC236}">
+                  <a16:creationId xmlns:a16="http://schemas.microsoft.com/office/drawing/2014/main" id="{68E5F410-40E5-A402-82EA-E01AE357E203}"/>
+                </a:ext>
+              </a:extLst>
+            </p:cNvPr>
+            <p:cNvSpPr/>
+            <p:nvPr/>
+          </p:nvSpPr>
+          <p:spPr>
+            <a:xfrm>
+              <a:off x="5842000" y="1016000"/>
+              <a:ext cx="1079500" cy="825500"/>
+            </a:xfrm>
+            <a:prstGeom prst="rect">
+              <a:avLst/>
+            </a:prstGeom>
+            <a:grpFill/>
+            <a:ln w="19050" cap="flat" cmpd="sng" algn="ctr">
+              <a:noFill/>
+              <a:prstDash val="solid"/>
+              <a:miter lim="800000"/>
+            </a:ln>
+            <a:effectLst/>
+            <a:extLst>
+              <a:ext uri="{91240B29-F687-4F45-9708-019B960494DF}">
+                <a14:hiddenLine xmlns:a14="http://schemas.microsoft.com/office/drawing/2010/main" w="19050" cap="flat" cmpd="sng" algn="ctr">
+                  <a:solidFill>
+                    <a:schemeClr val="accent1">
+                      <a:shade val="15000"/>
+                    </a:schemeClr>
+                  </a:solidFill>
+                  <a:prstDash val="solid"/>
+                  <a:miter lim="800000"/>
+                </a14:hiddenLine>
+              </a:ext>
+            </a:extLst>
+          </p:spPr>
+          <p:style>
+            <a:lnRef idx="2">
+              <a:schemeClr val="accent1">
+                <a:shade val="15000"/>
+              </a:schemeClr>
+            </a:lnRef>
+            <a:fillRef idx="1">
+              <a:schemeClr val="accent1"/>
+            </a:fillRef>
+            <a:effectRef idx="0">
+              <a:schemeClr val="accent1"/>
+            </a:effectRef>
+            <a:fontRef idx="minor">
+              <a:schemeClr val="lt1"/>
+            </a:fontRef>
+          </p:style>
+          <p:txBody>
+            <a:bodyPr rtlCol="0" anchor="ctr"/>
+            <a:lstStyle/>
+            <a:p>
+              <a:pPr algn="ctr"/>
+              <a:r>
+                <a:rPr lang="ar-EG" sz="1400">
+                  <a:latin typeface="Arial" panose="020B0604020202020204" pitchFamily="34" charset="0"/>
+                </a:rPr>
+                <a:t>مجموعة</a:t>
+              </a:r>
+              <a:endParaRPr lang="en-US" sz="1400">
+                <a:latin typeface="Arial" panose="020B0604020202020204" pitchFamily="34" charset="0"/>
+              </a:endParaRPr>
+            </a:p>
+          </p:txBody>
+        </p:sp>
+        <p:sp>
+          <p:nvSpPr>
+            <p:cNvPr id="10" name="Group glow B">
+              <a:extLst>
+                <a:ext uri="{FF2B5EF4-FFF2-40B4-BE49-F238E27FC236}">
+                  <a16:creationId xmlns:a16="http://schemas.microsoft.com/office/drawing/2014/main" id="{E93FBC87-0054-980B-A551-2553F7E75297}"/>
+                </a:ext>
+              </a:extLst>
+            </p:cNvPr>
+            <p:cNvSpPr/>
+            <p:nvPr/>
+          </p:nvSpPr>
+          <p:spPr>
+            <a:xfrm>
+              <a:off x="6540500" y="1397000"/>
+              <a:ext cx="1079500" cy="825500"/>
+            </a:xfrm>
+            <a:prstGeom prst="ellipse">
+              <a:avLst/>
+            </a:prstGeom>
+            <a:grpFill/>
+            <a:ln w="19050" cap="flat" cmpd="sng" algn="ctr">
+              <a:noFill/>
+              <a:prstDash val="solid"/>
+              <a:miter lim="800000"/>
+            </a:ln>
+            <a:effectLst/>
+            <a:extLst>
+              <a:ext uri="{91240B29-F687-4F45-9708-019B960494DF}">
+                <a14:hiddenLine xmlns:a14="http://schemas.microsoft.com/office/drawing/2010/main" w="19050" cap="flat" cmpd="sng" algn="ctr">
+                  <a:solidFill>
+                    <a:schemeClr val="accent1">
+                      <a:shade val="15000"/>
+                    </a:schemeClr>
+                  </a:solidFill>
+                  <a:prstDash val="solid"/>
+                  <a:miter lim="800000"/>
+                </a14:hiddenLine>
+              </a:ext>
+            </a:extLst>
+          </p:spPr>
+          <p:style>
+            <a:lnRef idx="2">
+              <a:schemeClr val="accent1">
+                <a:shade val="15000"/>
+              </a:schemeClr>
+            </a:lnRef>
+            <a:fillRef idx="1">
+              <a:schemeClr val="accent1"/>
+            </a:fillRef>
+            <a:effectRef idx="0">
+              <a:schemeClr val="accent1"/>
+            </a:effectRef>
+            <a:fontRef idx="minor">
+              <a:schemeClr val="lt1"/>
+            </a:fontRef>
+          </p:style>
+          <p:txBody>
+            <a:bodyPr rtlCol="0" anchor="ctr"/>
+            <a:lstStyle/>
+            <a:p>
+              <a:pPr algn="ctr"/>
+              <a:r>
+                <a:rPr lang="en-US" sz="1400">
+                  <a:latin typeface="Arial" panose="020B0604020202020204" pitchFamily="34" charset="0"/>
+                </a:rPr>
+                <a:t>Group</a:t>
+              </a:r>
+            </a:p>
+          </p:txBody>
+        </p:sp>
+      </p:grpSp>
+      <p:grpSp>
+        <p:nvGrpSpPr>
+          <p:cNvPr id="16" name="Group nested outer">
+            <a:extLst>
+              <a:ext uri="{FF2B5EF4-FFF2-40B4-BE49-F238E27FC236}">
+                <a16:creationId xmlns:a16="http://schemas.microsoft.com/office/drawing/2014/main" id="{32905409-6067-0D74-436D-7056991DFB56}"/>
+              </a:ext>
+            </a:extLst>
+          </p:cNvPr>
+          <p:cNvGrpSpPr/>
+          <p:nvPr/>
+        </p:nvGrpSpPr>
+        <p:grpSpPr>
+          <a:xfrm>
+            <a:off x="508000" y="3175000"/>
+            <a:ext cx="2032000" cy="1206500"/>
+            <a:chOff x="508000" y="3175000"/>
+            <a:chExt cx="2032000" cy="1206500"/>
+          </a:xfrm>
+          <a:gradFill flip="none" rotWithShape="1">
+            <a:gsLst>
+              <a:gs pos="0">
+                <a:srgbClr val="156082"/>
+              </a:gs>
+              <a:gs pos="100000">
+                <a:srgbClr val="FFFFFF"/>
+              </a:gs>
+            </a:gsLst>
+            <a:lin ang="5400000" scaled="1"/>
+            <a:tileRect/>
+          </a:gradFill>
+        </p:grpSpPr>
+        <p:grpSp>
+          <p:nvGrpSpPr>
+            <p:cNvPr id="14" name="Group nested fill">
+              <a:extLst>
+                <a:ext uri="{FF2B5EF4-FFF2-40B4-BE49-F238E27FC236}">
+                  <a16:creationId xmlns:a16="http://schemas.microsoft.com/office/drawing/2014/main" id="{C2BE28D3-4140-3BCD-C30F-2E781C3F4EE4}"/>
+                </a:ext>
+              </a:extLst>
+            </p:cNvPr>
+            <p:cNvGrpSpPr/>
+            <p:nvPr/>
+          </p:nvGrpSpPr>
+          <p:grpSpPr>
+            <a:xfrm>
+              <a:off x="508000" y="3175000"/>
+              <a:ext cx="1778000" cy="1206500"/>
+              <a:chOff x="508000" y="3175000"/>
+              <a:chExt cx="1778000" cy="1206500"/>
+            </a:xfrm>
+            <a:grpFill/>
+          </p:grpSpPr>
+          <p:sp>
+            <p:nvSpPr>
+              <p:cNvPr id="12" name="Group nested fill A">
+                <a:extLst>
+                  <a:ext uri="{FF2B5EF4-FFF2-40B4-BE49-F238E27FC236}">
+                    <a16:creationId xmlns:a16="http://schemas.microsoft.com/office/drawing/2014/main" id="{F0C0CEB5-5AA8-1723-150E-ADC9A2A43DCD}"/>
+                  </a:ext>
+                </a:extLst>
+              </p:cNvPr>
+              <p:cNvSpPr/>
+              <p:nvPr/>
+            </p:nvSpPr>
+            <p:spPr>
+              <a:xfrm>
+                <a:off x="508000" y="3175000"/>
+                <a:ext cx="1079500" cy="825500"/>
+              </a:xfrm>
+              <a:prstGeom prst="rect">
+                <a:avLst/>
+              </a:prstGeom>
+              <a:grpFill/>
+              <a:ln w="19050" cap="flat" cmpd="sng" algn="ctr">
+                <a:noFill/>
+                <a:prstDash val="solid"/>
+                <a:miter lim="800000"/>
+              </a:ln>
+              <a:effectLst/>
+              <a:extLst>
+                <a:ext uri="{91240B29-F687-4F45-9708-019B960494DF}">
+                  <a14:hiddenLine xmlns:a14="http://schemas.microsoft.com/office/drawing/2010/main" w="19050" cap="flat" cmpd="sng" algn="ctr">
+                    <a:solidFill>
+                      <a:schemeClr val="accent1">
+                        <a:shade val="15000"/>
+                      </a:schemeClr>
+                    </a:solidFill>
+                    <a:prstDash val="solid"/>
+                    <a:miter lim="800000"/>
+                  </a14:hiddenLine>
+                </a:ext>
+              </a:extLst>
+            </p:spPr>
+            <p:style>
+              <a:lnRef idx="2">
+                <a:schemeClr val="accent1">
+                  <a:shade val="15000"/>
+                </a:schemeClr>
+              </a:lnRef>
+              <a:fillRef idx="1">
+                <a:schemeClr val="accent1"/>
+              </a:fillRef>
+              <a:effectRef idx="0">
+                <a:schemeClr val="accent1"/>
+              </a:effectRef>
+              <a:fontRef idx="minor">
+                <a:schemeClr val="lt1"/>
+              </a:fontRef>
+            </p:style>
+            <p:txBody>
+              <a:bodyPr rtlCol="0" anchor="ctr"/>
+              <a:lstStyle/>
+              <a:p>
+                <a:pPr algn="ctr"/>
+                <a:r>
+                  <a:rPr lang="ar-EG" sz="1400">
+                    <a:latin typeface="Arial" panose="020B0604020202020204" pitchFamily="34" charset="0"/>
+                  </a:rPr>
+                  <a:t>مجموعة</a:t>
+                </a:r>
+                <a:endParaRPr lang="en-US" sz="1400">
+                  <a:latin typeface="Arial" panose="020B0604020202020204" pitchFamily="34" charset="0"/>
+                </a:endParaRPr>
+              </a:p>
+            </p:txBody>
+          </p:sp>
+          <p:sp>
+            <p:nvSpPr>
+              <p:cNvPr id="13" name="Group nested fill B">
+                <a:extLst>
+                  <a:ext uri="{FF2B5EF4-FFF2-40B4-BE49-F238E27FC236}">
+                    <a16:creationId xmlns:a16="http://schemas.microsoft.com/office/drawing/2014/main" id="{CD178A9C-908C-0D7C-E0A4-343600C92807}"/>
+                  </a:ext>
+                </a:extLst>
+              </p:cNvPr>
+              <p:cNvSpPr/>
+              <p:nvPr/>
+            </p:nvSpPr>
+            <p:spPr>
+              <a:xfrm>
+                <a:off x="1206500" y="3556000"/>
+                <a:ext cx="1079500" cy="825500"/>
+              </a:xfrm>
+              <a:prstGeom prst="ellipse">
+                <a:avLst/>
+              </a:prstGeom>
+              <a:grpFill/>
+              <a:ln w="19050" cap="flat" cmpd="sng" algn="ctr">
+                <a:noFill/>
+                <a:prstDash val="solid"/>
+                <a:miter lim="800000"/>
+              </a:ln>
+              <a:effectLst/>
+              <a:extLst>
+                <a:ext uri="{91240B29-F687-4F45-9708-019B960494DF}">
+                  <a14:hiddenLine xmlns:a14="http://schemas.microsoft.com/office/drawing/2010/main" w="19050" cap="flat" cmpd="sng" algn="ctr">
+                    <a:solidFill>
+                      <a:schemeClr val="accent1">
+                        <a:shade val="15000"/>
+                      </a:schemeClr>
+                    </a:solidFill>
+                    <a:prstDash val="solid"/>
+                    <a:miter lim="800000"/>
+                  </a14:hiddenLine>
+                </a:ext>
+              </a:extLst>
+            </p:spPr>
+            <p:style>
+              <a:lnRef idx="2">
+                <a:schemeClr val="accent1">
+                  <a:shade val="15000"/>
+                </a:schemeClr>
+              </a:lnRef>
+              <a:fillRef idx="1">
+                <a:schemeClr val="accent1"/>
+              </a:fillRef>
+              <a:effectRef idx="0">
+                <a:schemeClr val="accent1"/>
+              </a:effectRef>
+              <a:fontRef idx="minor">
+                <a:schemeClr val="lt1"/>
+              </a:fontRef>
+            </p:style>
+            <p:txBody>
+              <a:bodyPr rtlCol="0" anchor="ctr"/>
+              <a:lstStyle/>
+              <a:p>
+                <a:pPr algn="ctr"/>
+                <a:r>
+                  <a:rPr lang="en-US" sz="1400">
+                    <a:latin typeface="Arial" panose="020B0604020202020204" pitchFamily="34" charset="0"/>
+                  </a:rPr>
+                  <a:t>Group</a:t>
+                </a:r>
+              </a:p>
+            </p:txBody>
+          </p:sp>
+        </p:grpSp>
+        <p:sp>
+          <p:nvSpPr>
+            <p:cNvPr id="15" name="Nested fill transparent">
+              <a:extLst>
+                <a:ext uri="{FF2B5EF4-FFF2-40B4-BE49-F238E27FC236}">
+                  <a16:creationId xmlns:a16="http://schemas.microsoft.com/office/drawing/2014/main" id="{F925ED96-93C2-D385-238A-F02A7AC57BAD}"/>
+                </a:ext>
+              </a:extLst>
+            </p:cNvPr>
+            <p:cNvSpPr/>
+            <p:nvPr/>
+          </p:nvSpPr>
+          <p:spPr>
+            <a:xfrm>
+              <a:off x="2159000" y="3937000"/>
+              <a:ext cx="381000" cy="381000"/>
+            </a:xfrm>
+            <a:prstGeom prst="rect">
+              <a:avLst/>
+            </a:prstGeom>
+            <a:noFill/>
+            <a:ln w="19050" cap="flat" cmpd="sng" algn="ctr">
+              <a:noFill/>
+              <a:prstDash val="solid"/>
+              <a:miter lim="800000"/>
+            </a:ln>
+            <a:effectLst/>
+            <a:extLst>
+              <a:ext uri="{909E8E84-426E-40DD-AFC4-6F175D3DCCD1}">
+                <a14:hiddenFill xmlns:a14="http://schemas.microsoft.com/office/drawing/2010/main">
+                  <a:gradFill flip="none" rotWithShape="1">
+                    <a:gsLst>
+                      <a:gs pos="0">
+                        <a:schemeClr val="accent1"/>
+                      </a:gs>
+                      <a:gs pos="100000">
+                        <a:schemeClr val="accent1"/>
+                      </a:gs>
+                    </a:gsLst>
+                    <a:lin ang="5400000" scaled="1"/>
+                    <a:tileRect/>
+                  </a:gradFill>
+                </a14:hiddenFill>
+              </a:ext>
+              <a:ext uri="{91240B29-F687-4F45-9708-019B960494DF}">
+                <a14:hiddenLine xmlns:a14="http://schemas.microsoft.com/office/drawing/2010/main" w="19050" cap="flat" cmpd="sng" algn="ctr">
+                  <a:solidFill>
+                    <a:schemeClr val="accent1">
+                      <a:shade val="15000"/>
+                    </a:schemeClr>
+                  </a:solidFill>
+                  <a:prstDash val="solid"/>
+                  <a:miter lim="800000"/>
+                </a14:hiddenLine>
+              </a:ext>
+            </a:extLst>
+          </p:spPr>
+          <p:style>
+            <a:lnRef idx="2">
+              <a:schemeClr val="accent1">
+                <a:shade val="15000"/>
+              </a:schemeClr>
+            </a:lnRef>
+            <a:fillRef idx="1">
+              <a:schemeClr val="accent1"/>
+            </a:fillRef>
+            <a:effectRef idx="0">
+              <a:schemeClr val="accent1"/>
+            </a:effectRef>
+            <a:fontRef idx="minor">
+              <a:schemeClr val="lt1"/>
+            </a:fontRef>
+          </p:style>
+          <p:txBody>
+            <a:bodyPr rtlCol="0" anchor="ctr"/>
+            <a:lstStyle/>
+            <a:p>
+              <a:pPr algn="ctr"/>
+              <a:endParaRPr lang="en-US"/>
+            </a:p>
+          </p:txBody>
+        </p:sp>
+      </p:grpSp>
+      <p:grpSp>
+        <p:nvGrpSpPr>
+          <p:cNvPr id="20" name="Group reflection">
+            <a:extLst>
+              <a:ext uri="{FF2B5EF4-FFF2-40B4-BE49-F238E27FC236}">
+                <a16:creationId xmlns:a16="http://schemas.microsoft.com/office/drawing/2014/main" id="{0E46BAF5-3A35-CF21-300E-B785971E21B8}"/>
+              </a:ext>
+            </a:extLst>
+          </p:cNvPr>
+          <p:cNvGrpSpPr/>
+          <p:nvPr/>
+        </p:nvGrpSpPr>
+        <p:grpSpPr>
+          <a:xfrm>
+            <a:off x="3175000" y="3175000"/>
+            <a:ext cx="1778000" cy="1206500"/>
+            <a:chOff x="3175000" y="3175000"/>
+            <a:chExt cx="1778000" cy="1206500"/>
+          </a:xfrm>
+          <a:solidFill>
+            <a:srgbClr val="156082"/>
+          </a:solidFill>
+          <a:effectLst>
+            <a:reflection blurRad="6350" stA="50000" endA="300" endPos="55000" dir="5400000" sy="-100000" algn="bl" rotWithShape="0"/>
+          </a:effectLst>
+        </p:grpSpPr>
+        <p:sp>
+          <p:nvSpPr>
+            <p:cNvPr id="18" name="Group reflection A">
+              <a:extLst>
+                <a:ext uri="{FF2B5EF4-FFF2-40B4-BE49-F238E27FC236}">
+                  <a16:creationId xmlns:a16="http://schemas.microsoft.com/office/drawing/2014/main" id="{61328323-7A62-A8C7-2BDF-7C8BC1E38CAA}"/>
+                </a:ext>
+              </a:extLst>
+            </p:cNvPr>
+            <p:cNvSpPr/>
+            <p:nvPr/>
+          </p:nvSpPr>
+          <p:spPr>
+            <a:xfrm>
+              <a:off x="3175000" y="3175000"/>
+              <a:ext cx="1079500" cy="825500"/>
+            </a:xfrm>
+            <a:prstGeom prst="rect">
+              <a:avLst/>
+            </a:prstGeom>
+            <a:grpFill/>
+            <a:ln w="19050" cap="flat" cmpd="sng" algn="ctr">
+              <a:noFill/>
+              <a:prstDash val="solid"/>
+              <a:miter lim="800000"/>
+            </a:ln>
+            <a:effectLst/>
+            <a:extLst>
+              <a:ext uri="{91240B29-F687-4F45-9708-019B960494DF}">
+                <a14:hiddenLine xmlns:a14="http://schemas.microsoft.com/office/drawing/2010/main" w="19050" cap="flat" cmpd="sng" algn="ctr">
+                  <a:solidFill>
+                    <a:schemeClr val="accent1">
+                      <a:shade val="15000"/>
+                    </a:schemeClr>
+                  </a:solidFill>
+                  <a:prstDash val="solid"/>
+                  <a:miter lim="800000"/>
+                </a14:hiddenLine>
+              </a:ext>
+            </a:extLst>
+          </p:spPr>
+          <p:style>
+            <a:lnRef idx="2">
+              <a:schemeClr val="accent1">
+                <a:shade val="15000"/>
+              </a:schemeClr>
+            </a:lnRef>
+            <a:fillRef idx="1">
+              <a:schemeClr val="accent1"/>
+            </a:fillRef>
+            <a:effectRef idx="0">
+              <a:schemeClr val="accent1"/>
+            </a:effectRef>
+            <a:fontRef idx="minor">
+              <a:schemeClr val="lt1"/>
+            </a:fontRef>
+          </p:style>
+          <p:txBody>
+            <a:bodyPr rtlCol="0" anchor="ctr"/>
+            <a:lstStyle/>
+            <a:p>
+              <a:pPr algn="ctr"/>
+              <a:r>
+                <a:rPr lang="ar-EG" sz="1400">
+                  <a:latin typeface="Arial" panose="020B0604020202020204" pitchFamily="34" charset="0"/>
+                </a:rPr>
+                <a:t>مجموعة</a:t>
+              </a:r>
+              <a:endParaRPr lang="en-US" sz="1400">
+                <a:latin typeface="Arial" panose="020B0604020202020204" pitchFamily="34" charset="0"/>
+              </a:endParaRPr>
+            </a:p>
+          </p:txBody>
+        </p:sp>
+        <p:sp>
+          <p:nvSpPr>
+            <p:cNvPr id="19" name="Group reflection B">
+              <a:extLst>
+                <a:ext uri="{FF2B5EF4-FFF2-40B4-BE49-F238E27FC236}">
+                  <a16:creationId xmlns:a16="http://schemas.microsoft.com/office/drawing/2014/main" id="{B0208CEF-F4E7-83F7-A846-D866B6958BE0}"/>
+                </a:ext>
+              </a:extLst>
+            </p:cNvPr>
+            <p:cNvSpPr/>
+            <p:nvPr/>
+          </p:nvSpPr>
+          <p:spPr>
+            <a:xfrm>
+              <a:off x="3873500" y="3556000"/>
+              <a:ext cx="1079500" cy="825500"/>
+            </a:xfrm>
+            <a:prstGeom prst="ellipse">
+              <a:avLst/>
+            </a:prstGeom>
+            <a:grpFill/>
+            <a:ln w="19050" cap="flat" cmpd="sng" algn="ctr">
+              <a:noFill/>
+              <a:prstDash val="solid"/>
+              <a:miter lim="800000"/>
+            </a:ln>
+            <a:effectLst/>
+            <a:extLst>
+              <a:ext uri="{91240B29-F687-4F45-9708-019B960494DF}">
+                <a14:hiddenLine xmlns:a14="http://schemas.microsoft.com/office/drawing/2010/main" w="19050" cap="flat" cmpd="sng" algn="ctr">
+                  <a:solidFill>
+                    <a:schemeClr val="accent1">
+                      <a:shade val="15000"/>
+                    </a:schemeClr>
+                  </a:solidFill>
+                  <a:prstDash val="solid"/>
+                  <a:miter lim="800000"/>
+                </a14:hiddenLine>
+              </a:ext>
+            </a:extLst>
+          </p:spPr>
+          <p:style>
+            <a:lnRef idx="2">
+              <a:schemeClr val="accent1">
+                <a:shade val="15000"/>
+              </a:schemeClr>
+            </a:lnRef>
+            <a:fillRef idx="1">
+              <a:schemeClr val="accent1"/>
+            </a:fillRef>
+            <a:effectRef idx="0">
+              <a:schemeClr val="accent1"/>
+            </a:effectRef>
+            <a:fontRef idx="minor">
+              <a:schemeClr val="lt1"/>
+            </a:fontRef>
+          </p:style>
+          <p:txBody>
+            <a:bodyPr rtlCol="0" anchor="ctr"/>
+            <a:lstStyle/>
+            <a:p>
+              <a:pPr algn="ctr"/>
+              <a:r>
+                <a:rPr lang="en-US" sz="1400">
+                  <a:latin typeface="Arial" panose="020B0604020202020204" pitchFamily="34" charset="0"/>
+                </a:rPr>
+                <a:t>Group</a:t>
+              </a:r>
+            </a:p>
+          </p:txBody>
+        </p:sp>
+      </p:grpSp>
+      <p:grpSp>
+        <p:nvGrpSpPr>
+          <p:cNvPr id="23" name="Group inner shadow">
+            <a:extLst>
+              <a:ext uri="{FF2B5EF4-FFF2-40B4-BE49-F238E27FC236}">
+                <a16:creationId xmlns:a16="http://schemas.microsoft.com/office/drawing/2014/main" id="{F4300882-FFB2-75D3-C39C-74B1666C36D0}"/>
+              </a:ext>
+            </a:extLst>
+          </p:cNvPr>
+          <p:cNvGrpSpPr/>
+          <p:nvPr/>
+        </p:nvGrpSpPr>
+        <p:grpSpPr>
+          <a:xfrm>
+            <a:off x="5842000" y="3175000"/>
+            <a:ext cx="1778000" cy="1206500"/>
+            <a:chOff x="5842000" y="3175000"/>
+            <a:chExt cx="1778000" cy="1206500"/>
+          </a:xfrm>
+          <a:solidFill>
+            <a:srgbClr val="156082"/>
+          </a:solidFill>
+        </p:grpSpPr>
+        <p:sp>
+          <p:nvSpPr>
+            <p:cNvPr id="21" name="Group inner shadow A">
+              <a:extLst>
+                <a:ext uri="{FF2B5EF4-FFF2-40B4-BE49-F238E27FC236}">
+                  <a16:creationId xmlns:a16="http://schemas.microsoft.com/office/drawing/2014/main" id="{5ACAC6CD-5ECD-C667-8E3C-785C208BE31F}"/>
+                </a:ext>
+              </a:extLst>
+            </p:cNvPr>
+            <p:cNvSpPr/>
+            <p:nvPr/>
+          </p:nvSpPr>
+          <p:spPr>
+            <a:xfrm>
+              <a:off x="5842000" y="3175000"/>
+              <a:ext cx="1079500" cy="825500"/>
+            </a:xfrm>
+            <a:prstGeom prst="rect">
+              <a:avLst/>
+            </a:prstGeom>
+            <a:grpFill/>
+            <a:ln w="19050" cap="flat" cmpd="sng" algn="ctr">
+              <a:noFill/>
+              <a:prstDash val="solid"/>
+              <a:miter lim="800000"/>
+            </a:ln>
+            <a:effectLst>
+              <a:innerShdw blurRad="38100" dist="63500" dir="2212194">
+                <a:srgbClr val="000000">
+                  <a:alpha val="70000"/>
+                </a:srgbClr>
+              </a:innerShdw>
+            </a:effectLst>
+            <a:extLst>
+              <a:ext uri="{91240B29-F687-4F45-9708-019B960494DF}">
+                <a14:hiddenLine xmlns:a14="http://schemas.microsoft.com/office/drawing/2010/main" w="19050" cap="flat" cmpd="sng" algn="ctr">
+                  <a:solidFill>
+                    <a:schemeClr val="accent1">
+                      <a:shade val="15000"/>
+                    </a:schemeClr>
+                  </a:solidFill>
+                  <a:prstDash val="solid"/>
+                  <a:miter lim="800000"/>
+                </a14:hiddenLine>
+              </a:ext>
+            </a:extLst>
+          </p:spPr>
+          <p:style>
+            <a:lnRef idx="2">
+              <a:schemeClr val="accent1">
+                <a:shade val="15000"/>
+              </a:schemeClr>
+            </a:lnRef>
+            <a:fillRef idx="1">
+              <a:schemeClr val="accent1"/>
+            </a:fillRef>
+            <a:effectRef idx="0">
+              <a:schemeClr val="accent1"/>
+            </a:effectRef>
+            <a:fontRef idx="minor">
+              <a:schemeClr val="lt1"/>
+            </a:fontRef>
+          </p:style>
+          <p:txBody>
+            <a:bodyPr rtlCol="0" anchor="ctr"/>
+            <a:lstStyle/>
+            <a:p>
+              <a:pPr algn="ctr"/>
+              <a:r>
+                <a:rPr lang="ar-EG" sz="1400">
+                  <a:latin typeface="Arial" panose="020B0604020202020204" pitchFamily="34" charset="0"/>
+                </a:rPr>
+                <a:t>مجموعة</a:t>
+              </a:r>
+              <a:endParaRPr lang="en-US" sz="1400">
+                <a:latin typeface="Arial" panose="020B0604020202020204" pitchFamily="34" charset="0"/>
+              </a:endParaRPr>
+            </a:p>
+          </p:txBody>
+        </p:sp>
+        <p:sp>
+          <p:nvSpPr>
+            <p:cNvPr id="22" name="Group inner shadow B">
+              <a:extLst>
+                <a:ext uri="{FF2B5EF4-FFF2-40B4-BE49-F238E27FC236}">
+                  <a16:creationId xmlns:a16="http://schemas.microsoft.com/office/drawing/2014/main" id="{0F10016D-B589-3356-3ADC-C113E482631B}"/>
+                </a:ext>
+              </a:extLst>
+            </p:cNvPr>
+            <p:cNvSpPr/>
+            <p:nvPr/>
+          </p:nvSpPr>
+          <p:spPr>
+            <a:xfrm>
+              <a:off x="6540500" y="3556000"/>
+              <a:ext cx="1079500" cy="825500"/>
+            </a:xfrm>
+            <a:prstGeom prst="ellipse">
+              <a:avLst/>
+            </a:prstGeom>
+            <a:grpFill/>
+            <a:ln w="19050" cap="flat" cmpd="sng" algn="ctr">
+              <a:noFill/>
+              <a:prstDash val="solid"/>
+              <a:miter lim="800000"/>
+            </a:ln>
+            <a:effectLst>
+              <a:innerShdw blurRad="38100" dist="63500" dir="2212194">
+                <a:srgbClr val="000000">
+                  <a:alpha val="70000"/>
+                </a:srgbClr>
+              </a:innerShdw>
+            </a:effectLst>
+            <a:extLst>
+              <a:ext uri="{91240B29-F687-4F45-9708-019B960494DF}">
+                <a14:hiddenLine xmlns:a14="http://schemas.microsoft.com/office/drawing/2010/main" w="19050" cap="flat" cmpd="sng" algn="ctr">
+                  <a:solidFill>
+                    <a:schemeClr val="accent1">
+                      <a:shade val="15000"/>
+                    </a:schemeClr>
+                  </a:solidFill>
+                  <a:prstDash val="solid"/>
+                  <a:miter lim="800000"/>
+                </a14:hiddenLine>
+              </a:ext>
+            </a:extLst>
+          </p:spPr>
+          <p:style>
+            <a:lnRef idx="2">
+              <a:schemeClr val="accent1">
+                <a:shade val="15000"/>
+              </a:schemeClr>
+            </a:lnRef>
+            <a:fillRef idx="1">
+              <a:schemeClr val="accent1"/>
+            </a:fillRef>
+            <a:effectRef idx="0">
+              <a:schemeClr val="accent1"/>
+            </a:effectRef>
+            <a:fontRef idx="minor">
+              <a:schemeClr val="lt1"/>
+            </a:fontRef>
+          </p:style>
+          <p:txBody>
+            <a:bodyPr rtlCol="0" anchor="ctr"/>
+            <a:lstStyle/>
+            <a:p>
+              <a:pPr algn="ctr"/>
+              <a:r>
+                <a:rPr lang="en-US" sz="1400">
+                  <a:latin typeface="Arial" panose="020B0604020202020204" pitchFamily="34" charset="0"/>
+                </a:rPr>
+                <a:t>Group</a:t>
+              </a:r>
+            </a:p>
+          </p:txBody>
+        </p:sp>
+      </p:grpSp>
+      <p:grpSp>
+        <p:nvGrpSpPr>
+          <p:cNvPr id="26" name="Group soft edge">
+            <a:extLst>
+              <a:ext uri="{FF2B5EF4-FFF2-40B4-BE49-F238E27FC236}">
+                <a16:creationId xmlns:a16="http://schemas.microsoft.com/office/drawing/2014/main" id="{9118D3F6-1CF1-1859-9BDC-4DDB0F281DE3}"/>
+              </a:ext>
+            </a:extLst>
+          </p:cNvPr>
+          <p:cNvGrpSpPr/>
+          <p:nvPr/>
+        </p:nvGrpSpPr>
+        <p:grpSpPr>
+          <a:xfrm>
+            <a:off x="508000" y="5334000"/>
+            <a:ext cx="1778000" cy="1206500"/>
+            <a:chOff x="508000" y="5334000"/>
+            <a:chExt cx="1778000" cy="1206500"/>
+          </a:xfrm>
+          <a:solidFill>
+            <a:srgbClr val="156082"/>
+          </a:solidFill>
+          <a:effectLst>
+            <a:softEdge rad="63500"/>
+          </a:effectLst>
+        </p:grpSpPr>
+        <p:sp>
+          <p:nvSpPr>
+            <p:cNvPr id="24" name="Group soft edge A">
+              <a:extLst>
+                <a:ext uri="{FF2B5EF4-FFF2-40B4-BE49-F238E27FC236}">
+                  <a16:creationId xmlns:a16="http://schemas.microsoft.com/office/drawing/2014/main" id="{43411E50-F9AF-C729-8D20-DE4C5788C1D6}"/>
+                </a:ext>
+              </a:extLst>
+            </p:cNvPr>
+            <p:cNvSpPr/>
+            <p:nvPr/>
+          </p:nvSpPr>
+          <p:spPr>
+            <a:xfrm>
+              <a:off x="508000" y="5334000"/>
+              <a:ext cx="1079500" cy="825500"/>
+            </a:xfrm>
+            <a:prstGeom prst="rect">
+              <a:avLst/>
+            </a:prstGeom>
+            <a:grpFill/>
+            <a:ln w="19050" cap="flat" cmpd="sng" algn="ctr">
+              <a:noFill/>
+              <a:prstDash val="solid"/>
+              <a:miter lim="800000"/>
+            </a:ln>
+            <a:effectLst/>
+            <a:extLst>
+              <a:ext uri="{91240B29-F687-4F45-9708-019B960494DF}">
+                <a14:hiddenLine xmlns:a14="http://schemas.microsoft.com/office/drawing/2010/main" w="19050" cap="flat" cmpd="sng" algn="ctr">
+                  <a:solidFill>
+                    <a:schemeClr val="accent1">
+                      <a:shade val="15000"/>
+                    </a:schemeClr>
+                  </a:solidFill>
+                  <a:prstDash val="solid"/>
+                  <a:miter lim="800000"/>
+                </a14:hiddenLine>
+              </a:ext>
+            </a:extLst>
+          </p:spPr>
+          <p:style>
+            <a:lnRef idx="2">
+              <a:schemeClr val="accent1">
+                <a:shade val="15000"/>
+              </a:schemeClr>
+            </a:lnRef>
+            <a:fillRef idx="1">
+              <a:schemeClr val="accent1"/>
+            </a:fillRef>
+            <a:effectRef idx="0">
+              <a:schemeClr val="accent1"/>
+            </a:effectRef>
+            <a:fontRef idx="minor">
+              <a:schemeClr val="lt1"/>
+            </a:fontRef>
+          </p:style>
+          <p:txBody>
+            <a:bodyPr rtlCol="0" anchor="ctr"/>
+            <a:lstStyle/>
+            <a:p>
+              <a:pPr algn="ctr"/>
+              <a:r>
+                <a:rPr lang="ar-EG" sz="1400">
+                  <a:latin typeface="Arial" panose="020B0604020202020204" pitchFamily="34" charset="0"/>
+                </a:rPr>
+                <a:t>مجموعة</a:t>
+              </a:r>
+              <a:endParaRPr lang="en-US" sz="1400">
+                <a:latin typeface="Arial" panose="020B0604020202020204" pitchFamily="34" charset="0"/>
+              </a:endParaRPr>
+            </a:p>
+          </p:txBody>
+        </p:sp>
+        <p:sp>
+          <p:nvSpPr>
+            <p:cNvPr id="25" name="Group soft edge B">
+              <a:extLst>
+                <a:ext uri="{FF2B5EF4-FFF2-40B4-BE49-F238E27FC236}">
+                  <a16:creationId xmlns:a16="http://schemas.microsoft.com/office/drawing/2014/main" id="{F37BED01-5FC3-C9B9-6EA7-3359166ADC8D}"/>
+                </a:ext>
+              </a:extLst>
+            </p:cNvPr>
+            <p:cNvSpPr/>
+            <p:nvPr/>
+          </p:nvSpPr>
+          <p:spPr>
+            <a:xfrm>
+              <a:off x="1206500" y="5715000"/>
+              <a:ext cx="1079500" cy="825500"/>
+            </a:xfrm>
+            <a:prstGeom prst="ellipse">
+              <a:avLst/>
+            </a:prstGeom>
+            <a:grpFill/>
+            <a:ln w="19050" cap="flat" cmpd="sng" algn="ctr">
+              <a:noFill/>
+              <a:prstDash val="solid"/>
+              <a:miter lim="800000"/>
+            </a:ln>
+            <a:effectLst/>
+            <a:extLst>
+              <a:ext uri="{91240B29-F687-4F45-9708-019B960494DF}">
+                <a14:hiddenLine xmlns:a14="http://schemas.microsoft.com/office/drawing/2010/main" w="19050" cap="flat" cmpd="sng" algn="ctr">
+                  <a:solidFill>
+                    <a:schemeClr val="accent1">
+                      <a:shade val="15000"/>
+                    </a:schemeClr>
+                  </a:solidFill>
+                  <a:prstDash val="solid"/>
+                  <a:miter lim="800000"/>
+                </a14:hiddenLine>
+              </a:ext>
+            </a:extLst>
+          </p:spPr>
+          <p:style>
+            <a:lnRef idx="2">
+              <a:schemeClr val="accent1">
+                <a:shade val="15000"/>
+              </a:schemeClr>
+            </a:lnRef>
+            <a:fillRef idx="1">
+              <a:schemeClr val="accent1"/>
+            </a:fillRef>
+            <a:effectRef idx="0">
+              <a:schemeClr val="accent1"/>
+            </a:effectRef>
+            <a:fontRef idx="minor">
+              <a:schemeClr val="lt1"/>
+            </a:fontRef>
+          </p:style>
+          <p:txBody>
+            <a:bodyPr rtlCol="0" anchor="ctr"/>
+            <a:lstStyle/>
+            <a:p>
+              <a:pPr algn="ctr"/>
+              <a:r>
+                <a:rPr lang="en-US" sz="1400">
+                  <a:latin typeface="Arial" panose="020B0604020202020204" pitchFamily="34" charset="0"/>
+                </a:rPr>
+                <a:t>Group</a:t>
+              </a:r>
+            </a:p>
+          </p:txBody>
+        </p:sp>
+      </p:grpSp>
+    </p:spTree>
+    <p:extLst>
+      <p:ext uri="{BB962C8B-B14F-4D97-AF65-F5344CB8AC3E}">
+        <p14:creationId xmlns:p14="http://schemas.microsoft.com/office/powerpoint/2010/main" val="427893083"/>
       </p:ext>
     </p:extLst>
   </p:cSld>
@@ -8500,6 +10031,169 @@
     <p:extLst>
       <p:ext uri="{BB962C8B-B14F-4D97-AF65-F5344CB8AC3E}">
         <p14:creationId xmlns:p14="http://schemas.microsoft.com/office/powerpoint/2010/main" val="705791109"/>
+      </p:ext>
+    </p:extLst>
+  </p:cSld>
+  <p:clrMapOvr>
+    <a:masterClrMapping/>
+  </p:clrMapOvr>
+</p:sld>
+</file>
+
+<file path=ppt/slides/slide20.xml><?xml version="1.0" encoding="utf-8"?>
+<p:sld xmlns:a="http://schemas.openxmlformats.org/drawingml/2006/main" xmlns:r="http://schemas.openxmlformats.org/officeDocument/2006/relationships" xmlns:p="http://schemas.openxmlformats.org/presentationml/2006/main">
+  <p:cSld>
+    <p:spTree>
+      <p:nvGrpSpPr>
+        <p:cNvPr id="1" name=""/>
+        <p:cNvGrpSpPr/>
+        <p:nvPr/>
+      </p:nvGrpSpPr>
+      <p:grpSpPr>
+        <a:xfrm>
+          <a:off x="0" y="0"/>
+          <a:ext cx="0" cy="0"/>
+          <a:chOff x="0" y="0"/>
+          <a:chExt cx="0" cy="0"/>
+        </a:xfrm>
+      </p:grpSpPr>
+      <p:sp>
+        <p:nvSpPr>
+          <p:cNvPr id="2" name="Title 1">
+            <a:extLst>
+              <a:ext uri="{FF2B5EF4-FFF2-40B4-BE49-F238E27FC236}">
+                <a16:creationId xmlns:a16="http://schemas.microsoft.com/office/drawing/2014/main" id="{87F6A5B9-2CBF-C40A-343C-A6405B9AA487}"/>
+              </a:ext>
+            </a:extLst>
+          </p:cNvPr>
+          <p:cNvSpPr>
+            <a:spLocks noGrp="1"/>
+          </p:cNvSpPr>
+          <p:nvPr>
+            <p:ph type="title"/>
+          </p:nvPr>
+        </p:nvSpPr>
+        <p:spPr/>
+        <p:txBody>
+          <a:bodyPr/>
+          <a:lstStyle/>
+          <a:p>
+            <a:endParaRPr lang="en-US"/>
+          </a:p>
+        </p:txBody>
+      </p:sp>
+      <p:sp>
+        <p:nvSpPr>
+          <p:cNvPr id="3" name="Slide Number Placeholder 2">
+            <a:extLst>
+              <a:ext uri="{FF2B5EF4-FFF2-40B4-BE49-F238E27FC236}">
+                <a16:creationId xmlns:a16="http://schemas.microsoft.com/office/drawing/2014/main" id="{8FF23F6A-2D20-0D64-6BEC-4E5F28F5AB85}"/>
+              </a:ext>
+            </a:extLst>
+          </p:cNvPr>
+          <p:cNvSpPr>
+            <a:spLocks noGrp="1"/>
+          </p:cNvSpPr>
+          <p:nvPr>
+            <p:ph type="sldNum" sz="quarter" idx="12"/>
+          </p:nvPr>
+        </p:nvSpPr>
+        <p:spPr/>
+        <p:txBody>
+          <a:bodyPr/>
+          <a:lstStyle/>
+          <a:p>
+            <a:fld id="{DCB96425-C66E-449F-8335-3FF27AC80FA3}" type="slidenum">
+              <a:rPr lang="en-US" smtClean="0"/>
+              <a:t>20</a:t>
+            </a:fld>
+            <a:endParaRPr lang="en-US"/>
+          </a:p>
+        </p:txBody>
+      </p:sp>
+      <p:sp>
+        <p:nvSpPr>
+          <p:cNvPr id="4" name="SVG caption">
+            <a:extLst>
+              <a:ext uri="{FF2B5EF4-FFF2-40B4-BE49-F238E27FC236}">
+                <a16:creationId xmlns:a16="http://schemas.microsoft.com/office/drawing/2014/main" id="{B59402A2-3F65-0EF5-8AF8-527660F01782}"/>
+              </a:ext>
+            </a:extLst>
+          </p:cNvPr>
+          <p:cNvSpPr txBox="1"/>
+          <p:nvPr/>
+        </p:nvSpPr>
+        <p:spPr>
+          <a:xfrm>
+            <a:off x="457200" y="152400"/>
+            <a:ext cx="8128000" cy="400110"/>
+          </a:xfrm>
+          <a:prstGeom prst="rect">
+            <a:avLst/>
+          </a:prstGeom>
+          <a:noFill/>
+        </p:spPr>
+        <p:txBody>
+          <a:bodyPr vert="horz" rtlCol="0">
+            <a:spAutoFit/>
+          </a:bodyPr>
+          <a:lstStyle/>
+          <a:p>
+            <a:r>
+              <a:rPr lang="en-US" sz="2000"/>
+              <a:t>SVG picture / </a:t>
+            </a:r>
+            <a:r>
+              <a:rPr lang="ar-EG" sz="2000"/>
+              <a:t>صورة </a:t>
+            </a:r>
+            <a:r>
+              <a:rPr lang="en-US" sz="2000"/>
+              <a:t>SVG</a:t>
+            </a:r>
+          </a:p>
+        </p:txBody>
+      </p:sp>
+      <p:pic>
+        <p:nvPicPr>
+          <p:cNvPr id="6" name="SVG picture">
+            <a:extLst>
+              <a:ext uri="{FF2B5EF4-FFF2-40B4-BE49-F238E27FC236}">
+                <a16:creationId xmlns:a16="http://schemas.microsoft.com/office/drawing/2014/main" id="{F83CC0D4-B616-DDC3-CD7D-BD36882AC35C}"/>
+              </a:ext>
+            </a:extLst>
+          </p:cNvPr>
+          <p:cNvPicPr>
+            <a:picLocks/>
+          </p:cNvPicPr>
+          <p:nvPr/>
+        </p:nvPicPr>
+        <p:blipFill>
+          <a:blip>
+            <a:extLst>
+              <a:ext uri="{96DAC541-7B7A-43D3-8B79-37D633B846F1}">
+                <asvg:svgBlip xmlns:asvg="http://schemas.microsoft.com/office/drawing/2016/SVG/main" r:embed="rId2"/>
+              </a:ext>
+            </a:extLst>
+          </a:blip>
+          <a:stretch>
+            <a:fillRect/>
+          </a:stretch>
+        </p:blipFill>
+        <p:spPr>
+          <a:xfrm>
+            <a:off x="914400" y="914400"/>
+            <a:ext cx="3657600" cy="2743200"/>
+          </a:xfrm>
+          <a:prstGeom prst="rect">
+            <a:avLst/>
+          </a:prstGeom>
+        </p:spPr>
+      </p:pic>
+    </p:spTree>
+    <p:extLst>
+      <p:ext uri="{BB962C8B-B14F-4D97-AF65-F5344CB8AC3E}">
+        <p14:creationId xmlns:p14="http://schemas.microsoft.com/office/powerpoint/2010/main" val="2051564055"/>
       </p:ext>
     </p:extLst>
   </p:cSld>
